--- a/examples/cases/cafe-pptx/deck.pptx
+++ b/examples/cases/cafe-pptx/deck.pptx
@@ -1412,7 +1412,7 @@
           <p:spPr>
             <a:xfrm>
               <a:off x="603504" y="523875"/>
-              <a:ext cx="1472855" cy="234696"/>
+              <a:ext cx="1630364" cy="234696"/>
             </a:xfrm>
             <a:prstGeom prst="rect">
               <a:avLst/>
@@ -1547,7 +1547,7 @@
           <p:spPr>
             <a:xfrm>
               <a:off x="590550" y="2784475"/>
-              <a:ext cx="3827882" cy="834390"/>
+              <a:ext cx="3863976" cy="834390"/>
             </a:xfrm>
             <a:prstGeom prst="rect">
               <a:avLst/>
@@ -1722,7 +1722,7 @@
           <p:spPr>
             <a:xfrm>
               <a:off x="10614279" y="6315075"/>
-              <a:ext cx="553364" cy="234696"/>
+              <a:ext cx="684213" cy="234696"/>
             </a:xfrm>
             <a:prstGeom prst="rect">
               <a:avLst/>
@@ -1813,7 +1813,7 @@
           <p:spPr>
             <a:xfrm>
               <a:off x="603504" y="523875"/>
-              <a:ext cx="1472855" cy="234696"/>
+              <a:ext cx="1630364" cy="234696"/>
             </a:xfrm>
             <a:prstGeom prst="rect">
               <a:avLst/>
@@ -1887,16 +1887,16 @@
       </p:grpSp>
       <p:grpSp>
         <p:nvGrpSpPr>
-          <p:cNvPr id="17" name="content"/>
+          <p:cNvPr id="18" name="content"/>
           <p:cNvGrpSpPr/>
           <p:nvPr/>
         </p:nvGrpSpPr>
         <p:grpSpPr>
           <a:xfrm>
-            <a:off x="598170" y="1952625"/>
-            <a:ext cx="10698480" cy="1635951"/>
-            <a:chOff x="598170" y="1952625"/>
-            <a:chExt cx="10698480" cy="1635951"/>
+            <a:off x="600075" y="2066925"/>
+            <a:ext cx="10963275" cy="3519932"/>
+            <a:chOff x="600075" y="2066925"/>
+            <a:chExt cx="10963275" cy="3519932"/>
           </a:xfrm>
         </p:grpSpPr>
         <p:sp>
@@ -1907,8 +1907,292 @@
           </p:nvSpPr>
           <p:spPr>
             <a:xfrm>
-              <a:off x="609600" y="1952625"/>
-              <a:ext cx="3257550" cy="28575"/>
+              <a:off x="609600" y="2066925"/>
+              <a:ext cx="5238750" cy="857250"/>
+            </a:xfrm>
+            <a:prstGeom prst="rect">
+              <a:avLst/>
+            </a:prstGeom>
+            <a:solidFill>
+              <a:srgbClr val="E5EEE7"/>
+            </a:solidFill>
+            <a:ln>
+              <a:noFill/>
+            </a:ln>
+          </p:spPr>
+        </p:sp>
+        <p:sp>
+          <p:nvSpPr>
+            <p:cNvPr id="6" name="TextBox 6"/>
+            <p:cNvSpPr txBox="1"/>
+            <p:nvPr/>
+          </p:nvSpPr>
+          <p:spPr>
+            <a:xfrm>
+              <a:off x="808863" y="2168525"/>
+              <a:ext cx="1652168" cy="396050"/>
+            </a:xfrm>
+            <a:prstGeom prst="rect">
+              <a:avLst/>
+            </a:prstGeom>
+            <a:noFill/>
+            <a:ln>
+              <a:noFill/>
+            </a:ln>
+          </p:spPr>
+          <p:txBody>
+            <a:bodyPr wrap="none" lIns="0" tIns="0" rIns="0" bIns="0" anchor="t" anchorCtr="0">
+              <a:spAutoFit/>
+            </a:bodyPr>
+            <a:lstStyle/>
+            <a:p>
+              <a:pPr algn="l"/>
+              <a:r>
+                <a:rPr lang="ja-JP" sz="2020" b="1" dirty="0">
+                  <a:solidFill>
+                    <a:srgbClr val="21654C"/>
+                  </a:solidFill>
+                  <a:latin typeface="+mn-lt"/>
+                  <a:ea typeface="+mn-ea"/>
+                  <a:cs typeface="+mn-cs"/>
+                </a:rPr>
+                <a:t>平日の近隣客</a:t>
+              </a:r>
+            </a:p>
+          </p:txBody>
+        </p:sp>
+        <p:sp>
+          <p:nvSpPr>
+            <p:cNvPr id="7" name="TextBox 7"/>
+            <p:cNvSpPr txBox="1"/>
+            <p:nvPr/>
+          </p:nvSpPr>
+          <p:spPr>
+            <a:xfrm>
+              <a:off x="811149" y="2533650"/>
+              <a:ext cx="1717599" cy="308991"/>
+            </a:xfrm>
+            <a:prstGeom prst="rect">
+              <a:avLst/>
+            </a:prstGeom>
+            <a:noFill/>
+            <a:ln>
+              <a:noFill/>
+            </a:ln>
+          </p:spPr>
+          <p:txBody>
+            <a:bodyPr wrap="none" lIns="0" tIns="0" rIns="0" bIns="0" anchor="t" anchorCtr="0">
+              <a:spAutoFit/>
+            </a:bodyPr>
+            <a:lstStyle/>
+            <a:p>
+              <a:pPr algn="l"/>
+              <a:r>
+                <a:rPr lang="ja-JP" sz="1580" dirty="0">
+                  <a:solidFill>
+                    <a:srgbClr val="202C29"/>
+                  </a:solidFill>
+                  <a:latin typeface="+mn-lt"/>
+                  <a:ea typeface="+mn-ea"/>
+                  <a:cs typeface="+mn-cs"/>
+                </a:rPr>
+                <a:t>仕事の合間の滞在</a:t>
+              </a:r>
+            </a:p>
+          </p:txBody>
+        </p:sp>
+        <p:sp>
+          <p:nvSpPr>
+            <p:cNvPr id="8" name="TextBox 8"/>
+            <p:cNvSpPr txBox="1"/>
+            <p:nvPr/>
+          </p:nvSpPr>
+          <p:spPr>
+            <a:xfrm>
+              <a:off x="2883027" y="2990850"/>
+              <a:ext cx="431800" cy="485013"/>
+            </a:xfrm>
+            <a:prstGeom prst="rect">
+              <a:avLst/>
+            </a:prstGeom>
+            <a:noFill/>
+            <a:ln>
+              <a:noFill/>
+            </a:ln>
+          </p:spPr>
+          <p:txBody>
+            <a:bodyPr wrap="none" lIns="0" tIns="0" rIns="0" bIns="0" anchor="t" anchorCtr="0">
+              <a:spAutoFit/>
+            </a:bodyPr>
+            <a:lstStyle/>
+            <a:p>
+              <a:pPr algn="l"/>
+              <a:r>
+                <a:rPr lang="ja-JP" sz="2480" b="1" dirty="0">
+                  <a:solidFill>
+                    <a:srgbClr val="21654C"/>
+                  </a:solidFill>
+                  <a:latin typeface="+mn-lt"/>
+                  <a:ea typeface="+mn-ea"/>
+                  <a:cs typeface="+mn-cs"/>
+                </a:rPr>
+                <a:t>↓</a:t>
+              </a:r>
+            </a:p>
+          </p:txBody>
+        </p:sp>
+        <p:sp>
+          <p:nvSpPr>
+            <p:cNvPr id="9" name="Rectangle 9"/>
+            <p:cNvSpPr/>
+            <p:nvPr/>
+          </p:nvSpPr>
+          <p:spPr>
+            <a:xfrm>
+              <a:off x="6229350" y="2066925"/>
+              <a:ext cx="5238750" cy="857250"/>
+            </a:xfrm>
+            <a:prstGeom prst="rect">
+              <a:avLst/>
+            </a:prstGeom>
+            <a:solidFill>
+              <a:srgbClr val="E5EEE7"/>
+            </a:solidFill>
+            <a:ln>
+              <a:noFill/>
+            </a:ln>
+          </p:spPr>
+        </p:sp>
+        <p:sp>
+          <p:nvSpPr>
+            <p:cNvPr id="10" name="TextBox 10"/>
+            <p:cNvSpPr txBox="1"/>
+            <p:nvPr/>
+          </p:nvSpPr>
+          <p:spPr>
+            <a:xfrm>
+              <a:off x="6428613" y="2168525"/>
+              <a:ext cx="1652168" cy="396050"/>
+            </a:xfrm>
+            <a:prstGeom prst="rect">
+              <a:avLst/>
+            </a:prstGeom>
+            <a:noFill/>
+            <a:ln>
+              <a:noFill/>
+            </a:ln>
+          </p:spPr>
+          <p:txBody>
+            <a:bodyPr wrap="none" lIns="0" tIns="0" rIns="0" bIns="0" anchor="t" anchorCtr="0">
+              <a:spAutoFit/>
+            </a:bodyPr>
+            <a:lstStyle/>
+            <a:p>
+              <a:pPr algn="l"/>
+              <a:r>
+                <a:rPr lang="ja-JP" sz="2020" b="1" dirty="0">
+                  <a:solidFill>
+                    <a:srgbClr val="21654C"/>
+                  </a:solidFill>
+                  <a:latin typeface="+mn-lt"/>
+                  <a:ea typeface="+mn-ea"/>
+                  <a:cs typeface="+mn-cs"/>
+                </a:rPr>
+                <a:t>週末の来訪者</a:t>
+              </a:r>
+            </a:p>
+          </p:txBody>
+        </p:sp>
+        <p:sp>
+          <p:nvSpPr>
+            <p:cNvPr id="11" name="TextBox 11"/>
+            <p:cNvSpPr txBox="1"/>
+            <p:nvPr/>
+          </p:nvSpPr>
+          <p:spPr>
+            <a:xfrm>
+              <a:off x="6430899" y="2533650"/>
+              <a:ext cx="1930298" cy="308991"/>
+            </a:xfrm>
+            <a:prstGeom prst="rect">
+              <a:avLst/>
+            </a:prstGeom>
+            <a:noFill/>
+            <a:ln>
+              <a:noFill/>
+            </a:ln>
+          </p:spPr>
+          <p:txBody>
+            <a:bodyPr wrap="none" lIns="0" tIns="0" rIns="0" bIns="0" anchor="t" anchorCtr="0">
+              <a:spAutoFit/>
+            </a:bodyPr>
+            <a:lstStyle/>
+            <a:p>
+              <a:pPr algn="l"/>
+              <a:r>
+                <a:rPr lang="ja-JP" sz="1580" dirty="0">
+                  <a:solidFill>
+                    <a:srgbClr val="202C29"/>
+                  </a:solidFill>
+                  <a:latin typeface="+mn-lt"/>
+                  <a:ea typeface="+mn-ea"/>
+                  <a:cs typeface="+mn-cs"/>
+                </a:rPr>
+                <a:t>散歩・買い物の途中</a:t>
+              </a:r>
+            </a:p>
+          </p:txBody>
+        </p:sp>
+        <p:sp>
+          <p:nvSpPr>
+            <p:cNvPr id="12" name="TextBox 12"/>
+            <p:cNvSpPr txBox="1"/>
+            <p:nvPr/>
+          </p:nvSpPr>
+          <p:spPr>
+            <a:xfrm>
+              <a:off x="8502777" y="2990850"/>
+              <a:ext cx="431800" cy="485013"/>
+            </a:xfrm>
+            <a:prstGeom prst="rect">
+              <a:avLst/>
+            </a:prstGeom>
+            <a:noFill/>
+            <a:ln>
+              <a:noFill/>
+            </a:ln>
+          </p:spPr>
+          <p:txBody>
+            <a:bodyPr wrap="none" lIns="0" tIns="0" rIns="0" bIns="0" anchor="t" anchorCtr="0">
+              <a:spAutoFit/>
+            </a:bodyPr>
+            <a:lstStyle/>
+            <a:p>
+              <a:pPr algn="l"/>
+              <a:r>
+                <a:rPr lang="ja-JP" sz="2480" b="1" dirty="0">
+                  <a:solidFill>
+                    <a:srgbClr val="21654C"/>
+                  </a:solidFill>
+                  <a:latin typeface="+mn-lt"/>
+                  <a:ea typeface="+mn-ea"/>
+                  <a:cs typeface="+mn-cs"/>
+                </a:rPr>
+                <a:t>↓</a:t>
+              </a:r>
+            </a:p>
+          </p:txBody>
+        </p:sp>
+        <p:sp>
+          <p:nvSpPr>
+            <p:cNvPr id="13" name="Rectangle 13"/>
+            <p:cNvSpPr/>
+            <p:nvPr/>
+          </p:nvSpPr>
+          <p:spPr>
+            <a:xfrm>
+              <a:off x="609600" y="3495675"/>
+              <a:ext cx="10953750" cy="1038225"/>
             </a:xfrm>
             <a:prstGeom prst="rect">
               <a:avLst/>
@@ -1923,72 +2207,112 @@
         </p:sp>
         <p:sp>
           <p:nvSpPr>
-            <p:cNvPr id="6" name="TextBox 6"/>
-            <p:cNvSpPr txBox="1"/>
-            <p:nvPr/>
-          </p:nvSpPr>
-          <p:spPr>
-            <a:xfrm>
-              <a:off x="598170" y="2178050"/>
-              <a:ext cx="1840230" cy="440055"/>
-            </a:xfrm>
-            <a:prstGeom prst="rect">
-              <a:avLst/>
-            </a:prstGeom>
-            <a:noFill/>
-            <a:ln>
-              <a:noFill/>
-            </a:ln>
-          </p:spPr>
-          <p:txBody>
-            <a:bodyPr wrap="none" lIns="0" tIns="0" rIns="0" bIns="0" anchor="t" anchorCtr="0">
-              <a:spAutoFit/>
-            </a:bodyPr>
-            <a:lstStyle/>
-            <a:p>
-              <a:pPr algn="l"/>
-              <a:r>
-                <a:rPr lang="ja-JP" sz="2250" b="1" dirty="0">
-                  <a:solidFill>
-                    <a:srgbClr val="21654C"/>
-                  </a:solidFill>
-                  <a:latin typeface="+mn-lt"/>
-                  <a:ea typeface="+mn-ea"/>
-                  <a:cs typeface="+mn-cs"/>
-                </a:rPr>
-                <a:t>平日の近隣客</a:t>
-              </a:r>
-            </a:p>
-          </p:txBody>
-        </p:sp>
-        <p:sp>
-          <p:nvSpPr>
-            <p:cNvPr id="7" name="TextBox 7"/>
-            <p:cNvSpPr txBox="1"/>
-            <p:nvPr/>
-          </p:nvSpPr>
-          <p:spPr>
-            <a:xfrm>
-              <a:off x="600837" y="2822575"/>
-              <a:ext cx="2564536" cy="337376"/>
-            </a:xfrm>
-            <a:prstGeom prst="rect">
-              <a:avLst/>
-            </a:prstGeom>
-            <a:noFill/>
-            <a:ln>
-              <a:noFill/>
-            </a:ln>
-          </p:spPr>
-          <p:txBody>
-            <a:bodyPr wrap="none" lIns="0" tIns="0" rIns="0" bIns="0" anchor="t" anchorCtr="0">
-              <a:spAutoFit/>
-            </a:bodyPr>
-            <a:lstStyle/>
-            <a:p>
-              <a:pPr algn="l"/>
-              <a:r>
-                <a:rPr lang="ja-JP" sz="1720" dirty="0">
+            <p:cNvPr id="14" name="TextBox 14"/>
+            <p:cNvSpPr txBox="1"/>
+            <p:nvPr/>
+          </p:nvSpPr>
+          <p:spPr>
+            <a:xfrm>
+              <a:off x="827151" y="3657600"/>
+              <a:ext cx="4130700" cy="426339"/>
+            </a:xfrm>
+            <a:prstGeom prst="rect">
+              <a:avLst/>
+            </a:prstGeom>
+            <a:noFill/>
+            <a:ln>
+              <a:noFill/>
+            </a:ln>
+          </p:spPr>
+          <p:txBody>
+            <a:bodyPr wrap="none" lIns="0" tIns="0" rIns="0" bIns="0" anchor="t" anchorCtr="0">
+              <a:spAutoFit/>
+            </a:bodyPr>
+            <a:lstStyle/>
+            <a:p>
+              <a:pPr algn="l"/>
+              <a:r>
+                <a:rPr lang="ja-JP" sz="2180" b="1" dirty="0">
+                  <a:solidFill>
+                    <a:srgbClr val="FFFFFF"/>
+                  </a:solidFill>
+                  <a:latin typeface="+mn-lt"/>
+                  <a:ea typeface="+mn-ea"/>
+                  <a:cs typeface="+mn-cs"/>
+                </a:rPr>
+                <a:t>新店：落ち着いて滞在する場所</a:t>
+              </a:r>
+            </a:p>
+          </p:txBody>
+        </p:sp>
+        <p:sp>
+          <p:nvSpPr>
+            <p:cNvPr id="15" name="TextBox 15"/>
+            <p:cNvSpPr txBox="1"/>
+            <p:nvPr/>
+          </p:nvSpPr>
+          <p:spPr>
+            <a:xfrm>
+              <a:off x="829818" y="4083050"/>
+              <a:ext cx="4481436" cy="322707"/>
+            </a:xfrm>
+            <a:prstGeom prst="rect">
+              <a:avLst/>
+            </a:prstGeom>
+            <a:noFill/>
+            <a:ln>
+              <a:noFill/>
+            </a:ln>
+          </p:spPr>
+          <p:txBody>
+            <a:bodyPr wrap="none" lIns="0" tIns="0" rIns="0" bIns="0" anchor="t" anchorCtr="0">
+              <a:spAutoFit/>
+            </a:bodyPr>
+            <a:lstStyle/>
+            <a:p>
+              <a:pPr algn="l"/>
+              <a:r>
+                <a:rPr lang="ja-JP" sz="1650" dirty="0">
+                  <a:solidFill>
+                    <a:srgbClr val="FFFFFF"/>
+                  </a:solidFill>
+                  <a:latin typeface="+mn-lt"/>
+                  <a:ea typeface="+mn-ea"/>
+                  <a:cs typeface="+mn-cs"/>
+                </a:rPr>
+                <a:t>32席の計画。利用場面を調査して確かめる。</a:t>
+              </a:r>
+            </a:p>
+          </p:txBody>
+        </p:sp>
+        <p:sp>
+          <p:nvSpPr>
+            <p:cNvPr id="16" name="TextBox 16"/>
+            <p:cNvSpPr txBox="1"/>
+            <p:nvPr/>
+          </p:nvSpPr>
+          <p:spPr>
+            <a:xfrm>
+              <a:off x="600075" y="4829175"/>
+              <a:ext cx="2842220" cy="367665"/>
+            </a:xfrm>
+            <a:prstGeom prst="rect">
+              <a:avLst/>
+            </a:prstGeom>
+            <a:noFill/>
+            <a:ln>
+              <a:noFill/>
+            </a:ln>
+          </p:spPr>
+          <p:txBody>
+            <a:bodyPr wrap="none" lIns="0" tIns="0" rIns="0" bIns="0" anchor="t" anchorCtr="0">
+              <a:spAutoFit/>
+            </a:bodyPr>
+            <a:lstStyle/>
+            <a:p>
+              <a:pPr algn="l"/>
+              <a:r>
+                <a:rPr lang="ja-JP" sz="1880" b="1" dirty="0">
                   <a:solidFill>
                     <a:srgbClr val="202C29"/>
                   </a:solidFill>
@@ -1996,39 +2320,39 @@
                   <a:ea typeface="+mn-ea"/>
                   <a:cs typeface="+mn-cs"/>
                 </a:rPr>
-                <a:t>仕事の合間に、ひと息。</a:t>
-              </a:r>
-            </a:p>
-          </p:txBody>
-        </p:sp>
-        <p:sp>
-          <p:nvSpPr>
-            <p:cNvPr id="8" name="TextBox 8"/>
-            <p:cNvSpPr txBox="1"/>
-            <p:nvPr/>
-          </p:nvSpPr>
-          <p:spPr>
-            <a:xfrm>
-              <a:off x="600837" y="3251200"/>
-              <a:ext cx="2796083" cy="337376"/>
-            </a:xfrm>
-            <a:prstGeom prst="rect">
-              <a:avLst/>
-            </a:prstGeom>
-            <a:noFill/>
-            <a:ln>
-              <a:noFill/>
-            </a:ln>
-          </p:spPr>
-          <p:txBody>
-            <a:bodyPr wrap="none" lIns="0" tIns="0" rIns="0" bIns="0" anchor="t" anchorCtr="0">
-              <a:spAutoFit/>
-            </a:bodyPr>
-            <a:lstStyle/>
-            <a:p>
-              <a:pPr algn="l"/>
-              <a:r>
-                <a:rPr lang="ja-JP" sz="1720" dirty="0">
+                <a:t>既存店：24席の日常使い</a:t>
+              </a:r>
+            </a:p>
+          </p:txBody>
+        </p:sp>
+        <p:sp>
+          <p:nvSpPr>
+            <p:cNvPr id="17" name="TextBox 17"/>
+            <p:cNvSpPr txBox="1"/>
+            <p:nvPr/>
+          </p:nvSpPr>
+          <p:spPr>
+            <a:xfrm>
+              <a:off x="601218" y="5264150"/>
+              <a:ext cx="6014085" cy="322707"/>
+            </a:xfrm>
+            <a:prstGeom prst="rect">
+              <a:avLst/>
+            </a:prstGeom>
+            <a:noFill/>
+            <a:ln>
+              <a:noFill/>
+            </a:ln>
+          </p:spPr>
+          <p:txBody>
+            <a:bodyPr wrap="none" lIns="0" tIns="0" rIns="0" bIns="0" anchor="t" anchorCtr="0">
+              <a:spAutoFit/>
+            </a:bodyPr>
+            <a:lstStyle/>
+            <a:p>
+              <a:pPr algn="l"/>
+              <a:r>
+                <a:rPr lang="ja-JP" sz="1650" dirty="0">
                   <a:solidFill>
                     <a:srgbClr val="202C29"/>
                   </a:solidFill>
@@ -2036,291 +2360,7 @@
                   <a:ea typeface="+mn-ea"/>
                   <a:cs typeface="+mn-cs"/>
                 </a:rPr>
-                <a:t>落ち着いて滞在できる席。</a:t>
-              </a:r>
-            </a:p>
-          </p:txBody>
-        </p:sp>
-        <p:sp>
-          <p:nvSpPr>
-            <p:cNvPr id="9" name="Rectangle 9"/>
-            <p:cNvSpPr/>
-            <p:nvPr/>
-          </p:nvSpPr>
-          <p:spPr>
-            <a:xfrm>
-              <a:off x="4324350" y="1952625"/>
-              <a:ext cx="3257550" cy="28575"/>
-            </a:xfrm>
-            <a:prstGeom prst="rect">
-              <a:avLst/>
-            </a:prstGeom>
-            <a:solidFill>
-              <a:srgbClr val="21654C"/>
-            </a:solidFill>
-            <a:ln>
-              <a:noFill/>
-            </a:ln>
-          </p:spPr>
-        </p:sp>
-        <p:sp>
-          <p:nvSpPr>
-            <p:cNvPr id="10" name="TextBox 10"/>
-            <p:cNvSpPr txBox="1"/>
-            <p:nvPr/>
-          </p:nvSpPr>
-          <p:spPr>
-            <a:xfrm>
-              <a:off x="4312920" y="2178050"/>
-              <a:ext cx="1840230" cy="440055"/>
-            </a:xfrm>
-            <a:prstGeom prst="rect">
-              <a:avLst/>
-            </a:prstGeom>
-            <a:noFill/>
-            <a:ln>
-              <a:noFill/>
-            </a:ln>
-          </p:spPr>
-          <p:txBody>
-            <a:bodyPr wrap="none" lIns="0" tIns="0" rIns="0" bIns="0" anchor="t" anchorCtr="0">
-              <a:spAutoFit/>
-            </a:bodyPr>
-            <a:lstStyle/>
-            <a:p>
-              <a:pPr algn="l"/>
-              <a:r>
-                <a:rPr lang="ja-JP" sz="2250" b="1" dirty="0">
-                  <a:solidFill>
-                    <a:srgbClr val="21654C"/>
-                  </a:solidFill>
-                  <a:latin typeface="+mn-lt"/>
-                  <a:ea typeface="+mn-ea"/>
-                  <a:cs typeface="+mn-cs"/>
-                </a:rPr>
-                <a:t>週末の来訪者</a:t>
-              </a:r>
-            </a:p>
-          </p:txBody>
-        </p:sp>
-        <p:sp>
-          <p:nvSpPr>
-            <p:cNvPr id="11" name="TextBox 11"/>
-            <p:cNvSpPr txBox="1"/>
-            <p:nvPr/>
-          </p:nvSpPr>
-          <p:spPr>
-            <a:xfrm>
-              <a:off x="4315587" y="2822575"/>
-              <a:ext cx="2564536" cy="337376"/>
-            </a:xfrm>
-            <a:prstGeom prst="rect">
-              <a:avLst/>
-            </a:prstGeom>
-            <a:noFill/>
-            <a:ln>
-              <a:noFill/>
-            </a:ln>
-          </p:spPr>
-          <p:txBody>
-            <a:bodyPr wrap="none" lIns="0" tIns="0" rIns="0" bIns="0" anchor="t" anchorCtr="0">
-              <a:spAutoFit/>
-            </a:bodyPr>
-            <a:lstStyle/>
-            <a:p>
-              <a:pPr algn="l"/>
-              <a:r>
-                <a:rPr lang="ja-JP" sz="1720" dirty="0">
-                  <a:solidFill>
-                    <a:srgbClr val="202C29"/>
-                  </a:solidFill>
-                  <a:latin typeface="+mn-lt"/>
-                  <a:ea typeface="+mn-ea"/>
-                  <a:cs typeface="+mn-cs"/>
-                </a:rPr>
-                <a:t>散歩と買い物の途中に。</a:t>
-              </a:r>
-            </a:p>
-          </p:txBody>
-        </p:sp>
-        <p:sp>
-          <p:nvSpPr>
-            <p:cNvPr id="12" name="TextBox 12"/>
-            <p:cNvSpPr txBox="1"/>
-            <p:nvPr/>
-          </p:nvSpPr>
-          <p:spPr>
-            <a:xfrm>
-              <a:off x="4315587" y="3251200"/>
-              <a:ext cx="2564536" cy="337376"/>
-            </a:xfrm>
-            <a:prstGeom prst="rect">
-              <a:avLst/>
-            </a:prstGeom>
-            <a:noFill/>
-            <a:ln>
-              <a:noFill/>
-            </a:ln>
-          </p:spPr>
-          <p:txBody>
-            <a:bodyPr wrap="none" lIns="0" tIns="0" rIns="0" bIns="0" anchor="t" anchorCtr="0">
-              <a:spAutoFit/>
-            </a:bodyPr>
-            <a:lstStyle/>
-            <a:p>
-              <a:pPr algn="l"/>
-              <a:r>
-                <a:rPr lang="ja-JP" sz="1720" dirty="0">
-                  <a:solidFill>
-                    <a:srgbClr val="202C29"/>
-                  </a:solidFill>
-                  <a:latin typeface="+mn-lt"/>
-                  <a:ea typeface="+mn-ea"/>
-                  <a:cs typeface="+mn-cs"/>
-                </a:rPr>
-                <a:t>家族で利用できる場所。</a:t>
-              </a:r>
-            </a:p>
-          </p:txBody>
-        </p:sp>
-        <p:sp>
-          <p:nvSpPr>
-            <p:cNvPr id="13" name="Rectangle 13"/>
-            <p:cNvSpPr/>
-            <p:nvPr/>
-          </p:nvSpPr>
-          <p:spPr>
-            <a:xfrm>
-              <a:off x="8039100" y="1952625"/>
-              <a:ext cx="3257550" cy="28575"/>
-            </a:xfrm>
-            <a:prstGeom prst="rect">
-              <a:avLst/>
-            </a:prstGeom>
-            <a:solidFill>
-              <a:srgbClr val="21654C"/>
-            </a:solidFill>
-            <a:ln>
-              <a:noFill/>
-            </a:ln>
-          </p:spPr>
-        </p:sp>
-        <p:sp>
-          <p:nvSpPr>
-            <p:cNvPr id="14" name="TextBox 14"/>
-            <p:cNvSpPr txBox="1"/>
-            <p:nvPr/>
-          </p:nvSpPr>
-          <p:spPr>
-            <a:xfrm>
-              <a:off x="8027670" y="2178050"/>
-              <a:ext cx="2143125" cy="440055"/>
-            </a:xfrm>
-            <a:prstGeom prst="rect">
-              <a:avLst/>
-            </a:prstGeom>
-            <a:noFill/>
-            <a:ln>
-              <a:noFill/>
-            </a:ln>
-          </p:spPr>
-          <p:txBody>
-            <a:bodyPr wrap="none" lIns="0" tIns="0" rIns="0" bIns="0" anchor="t" anchorCtr="0">
-              <a:spAutoFit/>
-            </a:bodyPr>
-            <a:lstStyle/>
-            <a:p>
-              <a:pPr algn="l"/>
-              <a:r>
-                <a:rPr lang="ja-JP" sz="2250" b="1" dirty="0">
-                  <a:solidFill>
-                    <a:srgbClr val="21654C"/>
-                  </a:solidFill>
-                  <a:latin typeface="+mn-lt"/>
-                  <a:ea typeface="+mn-ea"/>
-                  <a:cs typeface="+mn-cs"/>
-                </a:rPr>
-                <a:t>既存店との役割</a:t>
-              </a:r>
-            </a:p>
-          </p:txBody>
-        </p:sp>
-        <p:sp>
-          <p:nvSpPr>
-            <p:cNvPr id="15" name="TextBox 15"/>
-            <p:cNvSpPr txBox="1"/>
-            <p:nvPr/>
-          </p:nvSpPr>
-          <p:spPr>
-            <a:xfrm>
-              <a:off x="8030337" y="2822575"/>
-              <a:ext cx="2819237" cy="337376"/>
-            </a:xfrm>
-            <a:prstGeom prst="rect">
-              <a:avLst/>
-            </a:prstGeom>
-            <a:noFill/>
-            <a:ln>
-              <a:noFill/>
-            </a:ln>
-          </p:spPr>
-          <p:txBody>
-            <a:bodyPr wrap="none" lIns="0" tIns="0" rIns="0" bIns="0" anchor="t" anchorCtr="0">
-              <a:spAutoFit/>
-            </a:bodyPr>
-            <a:lstStyle/>
-            <a:p>
-              <a:pPr algn="l"/>
-              <a:r>
-                <a:rPr lang="ja-JP" sz="1720" dirty="0">
-                  <a:solidFill>
-                    <a:srgbClr val="202C29"/>
-                  </a:solidFill>
-                  <a:latin typeface="+mn-lt"/>
-                  <a:ea typeface="+mn-ea"/>
-                  <a:cs typeface="+mn-cs"/>
-                </a:rPr>
-                <a:t>24席の既存店は日常使い。</a:t>
-              </a:r>
-            </a:p>
-          </p:txBody>
-        </p:sp>
-        <p:sp>
-          <p:nvSpPr>
-            <p:cNvPr id="16" name="TextBox 16"/>
-            <p:cNvSpPr txBox="1"/>
-            <p:nvPr/>
-          </p:nvSpPr>
-          <p:spPr>
-            <a:xfrm>
-              <a:off x="8030337" y="3251200"/>
-              <a:ext cx="3027629" cy="337376"/>
-            </a:xfrm>
-            <a:prstGeom prst="rect">
-              <a:avLst/>
-            </a:prstGeom>
-            <a:noFill/>
-            <a:ln>
-              <a:noFill/>
-            </a:ln>
-          </p:spPr>
-          <p:txBody>
-            <a:bodyPr wrap="none" lIns="0" tIns="0" rIns="0" bIns="0" anchor="t" anchorCtr="0">
-              <a:spAutoFit/>
-            </a:bodyPr>
-            <a:lstStyle/>
-            <a:p>
-              <a:pPr algn="l"/>
-              <a:r>
-                <a:rPr lang="ja-JP" sz="1720" dirty="0">
-                  <a:solidFill>
-                    <a:srgbClr val="202C29"/>
-                  </a:solidFill>
-                  <a:latin typeface="+mn-lt"/>
-                  <a:ea typeface="+mn-ea"/>
-                  <a:cs typeface="+mn-cs"/>
-                </a:rPr>
-                <a:t>新店は滞在しやすさを重視。</a:t>
+                <a:t>新店との役割が重なるだけにならないか、来店理由を聞く。</a:t>
               </a:r>
             </a:p>
           </p:txBody>
@@ -2328,7 +2368,7 @@
       </p:grpSp>
       <p:grpSp>
         <p:nvGrpSpPr>
-          <p:cNvPr id="20" name="footer"/>
+          <p:cNvPr id="21" name="footer"/>
           <p:cNvGrpSpPr/>
           <p:nvPr/>
         </p:nvGrpSpPr>
@@ -2342,7 +2382,7 @@
         </p:grpSpPr>
         <p:sp>
           <p:nvSpPr>
-            <p:cNvPr id="18" name="TextBox 18"/>
+            <p:cNvPr id="19" name="TextBox 19"/>
             <p:cNvSpPr txBox="1"/>
             <p:nvPr/>
           </p:nvSpPr>
@@ -2382,14 +2422,14 @@
         </p:sp>
         <p:sp>
           <p:nvSpPr>
-            <p:cNvPr id="19" name="TextBox 19"/>
+            <p:cNvPr id="20" name="TextBox 20"/>
             <p:cNvSpPr txBox="1"/>
             <p:nvPr/>
           </p:nvSpPr>
           <p:spPr>
             <a:xfrm>
               <a:off x="10614279" y="6315075"/>
-              <a:ext cx="553364" cy="234696"/>
+              <a:ext cx="704851" cy="234696"/>
             </a:xfrm>
             <a:prstGeom prst="rect">
               <a:avLst/>
@@ -2480,7 +2520,7 @@
           <p:spPr>
             <a:xfrm>
               <a:off x="603504" y="523875"/>
-              <a:ext cx="1472855" cy="234696"/>
+              <a:ext cx="1630364" cy="234696"/>
             </a:xfrm>
             <a:prstGeom prst="rect">
               <a:avLst/>
@@ -2554,16 +2594,16 @@
       </p:grpSp>
       <p:grpSp>
         <p:nvGrpSpPr>
-          <p:cNvPr id="26" name="content"/>
+          <p:cNvPr id="37" name="content"/>
           <p:cNvGrpSpPr/>
           <p:nvPr/>
         </p:nvGrpSpPr>
         <p:grpSpPr>
           <a:xfrm>
-            <a:off x="600837" y="1946275"/>
-            <a:ext cx="10584520" cy="3942525"/>
-            <a:chOff x="600837" y="1946275"/>
-            <a:chExt cx="10584520" cy="3942525"/>
+            <a:off x="601980" y="1936750"/>
+            <a:ext cx="10961370" cy="3860165"/>
+            <a:chOff x="601980" y="1936750"/>
+            <a:chExt cx="10961370" cy="3860165"/>
           </a:xfrm>
         </p:grpSpPr>
         <p:sp>
@@ -2574,8 +2614,8 @@
           </p:nvSpPr>
           <p:spPr>
             <a:xfrm>
-              <a:off x="601980" y="1946275"/>
-              <a:ext cx="5972175" cy="293370"/>
+              <a:off x="601980" y="1936750"/>
+              <a:ext cx="4800981" cy="293370"/>
             </a:xfrm>
             <a:prstGeom prst="rect">
               <a:avLst/>
@@ -2601,39 +2641,203 @@
                   <a:ea typeface="+mn-ea"/>
                   <a:cs typeface="+mn-cs"/>
                 </a:rPr>
-                <a:t>5点満点 × 重み / 合計100点。仮置き評価のため現地調査で更新。</a:t>
-              </a:r>
-            </a:p>
-          </p:txBody>
-        </p:sp>
-        <p:sp>
-          <p:nvSpPr>
-            <p:cNvPr id="6" name="TextBox 6"/>
-            <p:cNvSpPr txBox="1"/>
-            <p:nvPr/>
-          </p:nvSpPr>
-          <p:spPr>
-            <a:xfrm>
-              <a:off x="600837" y="2565400"/>
-              <a:ext cx="943712" cy="337376"/>
-            </a:xfrm>
-            <a:prstGeom prst="rect">
-              <a:avLst/>
-            </a:prstGeom>
-            <a:noFill/>
-            <a:ln>
-              <a:noFill/>
-            </a:ln>
-          </p:spPr>
-          <p:txBody>
-            <a:bodyPr wrap="none" lIns="0" tIns="0" rIns="0" bIns="0" anchor="t" anchorCtr="0">
-              <a:spAutoFit/>
-            </a:bodyPr>
-            <a:lstStyle/>
-            <a:p>
-              <a:pPr algn="l"/>
-              <a:r>
-                <a:rPr lang="ja-JP" sz="1720" dirty="0">
+                <a:t>5点満点 × 重み。仮置き評価のため現地調査で更新。</a:t>
+              </a:r>
+            </a:p>
+          </p:txBody>
+        </p:sp>
+        <p:sp>
+          <p:nvSpPr>
+            <p:cNvPr id="6" name="Rectangle 6"/>
+            <p:cNvSpPr/>
+            <p:nvPr/>
+          </p:nvSpPr>
+          <p:spPr>
+            <a:xfrm>
+              <a:off x="609600" y="2428875"/>
+              <a:ext cx="10953750" cy="457200"/>
+            </a:xfrm>
+            <a:prstGeom prst="rect">
+              <a:avLst/>
+            </a:prstGeom>
+            <a:solidFill>
+              <a:srgbClr val="21654C"/>
+            </a:solidFill>
+            <a:ln>
+              <a:noFill/>
+            </a:ln>
+          </p:spPr>
+        </p:sp>
+        <p:sp>
+          <p:nvSpPr>
+            <p:cNvPr id="7" name="TextBox 7"/>
+            <p:cNvSpPr txBox="1"/>
+            <p:nvPr/>
+          </p:nvSpPr>
+          <p:spPr>
+            <a:xfrm>
+              <a:off x="772287" y="2517775"/>
+              <a:ext cx="1638351" cy="337376"/>
+            </a:xfrm>
+            <a:prstGeom prst="rect">
+              <a:avLst/>
+            </a:prstGeom>
+            <a:noFill/>
+            <a:ln>
+              <a:noFill/>
+            </a:ln>
+          </p:spPr>
+          <p:txBody>
+            <a:bodyPr wrap="none" lIns="0" tIns="0" rIns="0" bIns="0" anchor="t" anchorCtr="0">
+              <a:spAutoFit/>
+            </a:bodyPr>
+            <a:lstStyle/>
+            <a:p>
+              <a:pPr algn="l"/>
+              <a:r>
+                <a:rPr lang="ja-JP" sz="1720" b="1" dirty="0">
+                  <a:solidFill>
+                    <a:srgbClr val="FFFFFF"/>
+                  </a:solidFill>
+                  <a:latin typeface="+mn-lt"/>
+                  <a:ea typeface="+mn-ea"/>
+                  <a:cs typeface="+mn-cs"/>
+                </a:rPr>
+                <a:t>比較項目・重み</a:t>
+              </a:r>
+            </a:p>
+          </p:txBody>
+        </p:sp>
+        <p:sp>
+          <p:nvSpPr>
+            <p:cNvPr id="8" name="TextBox 8"/>
+            <p:cNvSpPr txBox="1"/>
+            <p:nvPr/>
+          </p:nvSpPr>
+          <p:spPr>
+            <a:xfrm>
+              <a:off x="6230112" y="2517775"/>
+              <a:ext cx="766763" cy="337376"/>
+            </a:xfrm>
+            <a:prstGeom prst="rect">
+              <a:avLst/>
+            </a:prstGeom>
+            <a:noFill/>
+            <a:ln>
+              <a:noFill/>
+            </a:ln>
+          </p:spPr>
+          <p:txBody>
+            <a:bodyPr wrap="none" lIns="0" tIns="0" rIns="0" bIns="0" anchor="t" anchorCtr="0">
+              <a:spAutoFit/>
+            </a:bodyPr>
+            <a:lstStyle/>
+            <a:p>
+              <a:pPr algn="l"/>
+              <a:r>
+                <a:rPr lang="ja-JP" sz="1720" b="1" dirty="0">
+                  <a:solidFill>
+                    <a:srgbClr val="FFFFFF"/>
+                  </a:solidFill>
+                  <a:latin typeface="+mn-lt"/>
+                  <a:ea typeface="+mn-ea"/>
+                  <a:cs typeface="+mn-cs"/>
+                </a:rPr>
+                <a:t>A 駅前</a:t>
+              </a:r>
+            </a:p>
+          </p:txBody>
+        </p:sp>
+        <p:sp>
+          <p:nvSpPr>
+            <p:cNvPr id="9" name="TextBox 9"/>
+            <p:cNvSpPr txBox="1"/>
+            <p:nvPr/>
+          </p:nvSpPr>
+          <p:spPr>
+            <a:xfrm>
+              <a:off x="8973312" y="2517775"/>
+              <a:ext cx="1203326" cy="337376"/>
+            </a:xfrm>
+            <a:prstGeom prst="rect">
+              <a:avLst/>
+            </a:prstGeom>
+            <a:noFill/>
+            <a:ln>
+              <a:noFill/>
+            </a:ln>
+          </p:spPr>
+          <p:txBody>
+            <a:bodyPr wrap="none" lIns="0" tIns="0" rIns="0" bIns="0" anchor="t" anchorCtr="0">
+              <a:spAutoFit/>
+            </a:bodyPr>
+            <a:lstStyle/>
+            <a:p>
+              <a:pPr algn="l"/>
+              <a:r>
+                <a:rPr lang="ja-JP" sz="1720" b="1" dirty="0">
+                  <a:solidFill>
+                    <a:srgbClr val="FFFFFF"/>
+                  </a:solidFill>
+                  <a:latin typeface="+mn-lt"/>
+                  <a:ea typeface="+mn-ea"/>
+                  <a:cs typeface="+mn-cs"/>
+                </a:rPr>
+                <a:t>B 運河沿い</a:t>
+              </a:r>
+            </a:p>
+          </p:txBody>
+        </p:sp>
+        <p:sp>
+          <p:nvSpPr>
+            <p:cNvPr id="10" name="Rectangle 10"/>
+            <p:cNvSpPr/>
+            <p:nvPr/>
+          </p:nvSpPr>
+          <p:spPr>
+            <a:xfrm>
+              <a:off x="609600" y="2886075"/>
+              <a:ext cx="10953750" cy="457200"/>
+            </a:xfrm>
+            <a:prstGeom prst="rect">
+              <a:avLst/>
+            </a:prstGeom>
+            <a:solidFill>
+              <a:srgbClr val="E5EEE7"/>
+            </a:solidFill>
+            <a:ln>
+              <a:noFill/>
+            </a:ln>
+          </p:spPr>
+        </p:sp>
+        <p:sp>
+          <p:nvSpPr>
+            <p:cNvPr id="11" name="TextBox 11"/>
+            <p:cNvSpPr txBox="1"/>
+            <p:nvPr/>
+          </p:nvSpPr>
+          <p:spPr>
+            <a:xfrm>
+              <a:off x="772668" y="2987675"/>
+              <a:ext cx="1882776" cy="322707"/>
+            </a:xfrm>
+            <a:prstGeom prst="rect">
+              <a:avLst/>
+            </a:prstGeom>
+            <a:noFill/>
+            <a:ln>
+              <a:noFill/>
+            </a:ln>
+          </p:spPr>
+          <p:txBody>
+            <a:bodyPr wrap="none" lIns="0" tIns="0" rIns="0" bIns="0" anchor="t" anchorCtr="0">
+              <a:spAutoFit/>
+            </a:bodyPr>
+            <a:lstStyle/>
+            <a:p>
+              <a:pPr algn="l"/>
+              <a:r>
+                <a:rPr lang="ja-JP" sz="1650" dirty="0">
                   <a:solidFill>
                     <a:srgbClr val="202C29"/>
                   </a:solidFill>
@@ -2641,39 +2845,39 @@
                   <a:ea typeface="+mn-ea"/>
                   <a:cs typeface="+mn-cs"/>
                 </a:rPr>
-                <a:t>比較項目</a:t>
-              </a:r>
-            </a:p>
-          </p:txBody>
-        </p:sp>
-        <p:sp>
-          <p:nvSpPr>
-            <p:cNvPr id="7" name="TextBox 7"/>
-            <p:cNvSpPr txBox="1"/>
-            <p:nvPr/>
-          </p:nvSpPr>
-          <p:spPr>
-            <a:xfrm>
-              <a:off x="600837" y="2994025"/>
-              <a:ext cx="1904629" cy="337376"/>
-            </a:xfrm>
-            <a:prstGeom prst="rect">
-              <a:avLst/>
-            </a:prstGeom>
-            <a:noFill/>
-            <a:ln>
-              <a:noFill/>
-            </a:ln>
-          </p:spPr>
-          <p:txBody>
-            <a:bodyPr wrap="none" lIns="0" tIns="0" rIns="0" bIns="0" anchor="t" anchorCtr="0">
-              <a:spAutoFit/>
-            </a:bodyPr>
-            <a:lstStyle/>
-            <a:p>
-              <a:pPr algn="l"/>
-              <a:r>
-                <a:rPr lang="ja-JP" sz="1720" dirty="0">
+                <a:t>滞在しやすさ 30%</a:t>
+              </a:r>
+            </a:p>
+          </p:txBody>
+        </p:sp>
+        <p:sp>
+          <p:nvSpPr>
+            <p:cNvPr id="12" name="TextBox 12"/>
+            <p:cNvSpPr txBox="1"/>
+            <p:nvPr/>
+          </p:nvSpPr>
+          <p:spPr>
+            <a:xfrm>
+              <a:off x="6229731" y="2974975"/>
+              <a:ext cx="701676" cy="352044"/>
+            </a:xfrm>
+            <a:prstGeom prst="rect">
+              <a:avLst/>
+            </a:prstGeom>
+            <a:noFill/>
+            <a:ln>
+              <a:noFill/>
+            </a:ln>
+          </p:spPr>
+          <p:txBody>
+            <a:bodyPr wrap="none" lIns="0" tIns="0" rIns="0" bIns="0" anchor="t" anchorCtr="0">
+              <a:spAutoFit/>
+            </a:bodyPr>
+            <a:lstStyle/>
+            <a:p>
+              <a:pPr algn="l"/>
+              <a:r>
+                <a:rPr lang="ja-JP" sz="1800" dirty="0">
                   <a:solidFill>
                     <a:srgbClr val="202C29"/>
                   </a:solidFill>
@@ -2681,39 +2885,123 @@
                   <a:ea typeface="+mn-ea"/>
                   <a:cs typeface="+mn-cs"/>
                 </a:rPr>
-                <a:t>滞在しやすさ 30%</a:t>
-              </a:r>
-            </a:p>
-          </p:txBody>
-        </p:sp>
-        <p:sp>
-          <p:nvSpPr>
-            <p:cNvPr id="8" name="TextBox 8"/>
-            <p:cNvSpPr txBox="1"/>
-            <p:nvPr/>
-          </p:nvSpPr>
-          <p:spPr>
-            <a:xfrm>
-              <a:off x="600837" y="3422650"/>
-              <a:ext cx="1209990" cy="337376"/>
-            </a:xfrm>
-            <a:prstGeom prst="rect">
-              <a:avLst/>
-            </a:prstGeom>
-            <a:noFill/>
-            <a:ln>
-              <a:noFill/>
-            </a:ln>
-          </p:spPr>
-          <p:txBody>
-            <a:bodyPr wrap="none" lIns="0" tIns="0" rIns="0" bIns="0" anchor="t" anchorCtr="0">
-              <a:spAutoFit/>
-            </a:bodyPr>
-            <a:lstStyle/>
-            <a:p>
-              <a:pPr algn="l"/>
-              <a:r>
-                <a:rPr lang="ja-JP" sz="1720" dirty="0">
+                <a:t>4 / 5</a:t>
+              </a:r>
+            </a:p>
+          </p:txBody>
+        </p:sp>
+        <p:sp>
+          <p:nvSpPr>
+            <p:cNvPr id="13" name="TextBox 13"/>
+            <p:cNvSpPr txBox="1"/>
+            <p:nvPr/>
+          </p:nvSpPr>
+          <p:spPr>
+            <a:xfrm>
+              <a:off x="8972931" y="2974975"/>
+              <a:ext cx="701675" cy="352044"/>
+            </a:xfrm>
+            <a:prstGeom prst="rect">
+              <a:avLst/>
+            </a:prstGeom>
+            <a:noFill/>
+            <a:ln>
+              <a:noFill/>
+            </a:ln>
+          </p:spPr>
+          <p:txBody>
+            <a:bodyPr wrap="none" lIns="0" tIns="0" rIns="0" bIns="0" anchor="t" anchorCtr="0">
+              <a:spAutoFit/>
+            </a:bodyPr>
+            <a:lstStyle/>
+            <a:p>
+              <a:pPr algn="l"/>
+              <a:r>
+                <a:rPr lang="ja-JP" sz="1800" b="1" dirty="0">
+                  <a:solidFill>
+                    <a:srgbClr val="21654C"/>
+                  </a:solidFill>
+                  <a:latin typeface="+mn-lt"/>
+                  <a:ea typeface="+mn-ea"/>
+                  <a:cs typeface="+mn-cs"/>
+                </a:rPr>
+                <a:t>5 / 5</a:t>
+              </a:r>
+            </a:p>
+          </p:txBody>
+        </p:sp>
+        <p:sp>
+          <p:nvSpPr>
+            <p:cNvPr id="14" name="Rectangle 14"/>
+            <p:cNvSpPr/>
+            <p:nvPr/>
+          </p:nvSpPr>
+          <p:spPr>
+            <a:xfrm>
+              <a:off x="609600" y="3333750"/>
+              <a:ext cx="10953750" cy="9525"/>
+            </a:xfrm>
+            <a:prstGeom prst="rect">
+              <a:avLst/>
+            </a:prstGeom>
+            <a:solidFill>
+              <a:srgbClr val="CAD5CC"/>
+            </a:solidFill>
+            <a:ln>
+              <a:noFill/>
+            </a:ln>
+          </p:spPr>
+        </p:sp>
+        <p:sp>
+          <p:nvSpPr>
+            <p:cNvPr id="15" name="Rectangle 15"/>
+            <p:cNvSpPr/>
+            <p:nvPr/>
+          </p:nvSpPr>
+          <p:spPr>
+            <a:xfrm>
+              <a:off x="609600" y="3343275"/>
+              <a:ext cx="10953750" cy="457200"/>
+            </a:xfrm>
+            <a:prstGeom prst="rect">
+              <a:avLst/>
+            </a:prstGeom>
+            <a:solidFill>
+              <a:srgbClr val="EDF0EC"/>
+            </a:solidFill>
+            <a:ln>
+              <a:noFill/>
+            </a:ln>
+          </p:spPr>
+        </p:sp>
+        <p:sp>
+          <p:nvSpPr>
+            <p:cNvPr id="16" name="TextBox 16"/>
+            <p:cNvSpPr txBox="1"/>
+            <p:nvPr/>
+          </p:nvSpPr>
+          <p:spPr>
+            <a:xfrm>
+              <a:off x="772668" y="3444875"/>
+              <a:ext cx="1308101" cy="322707"/>
+            </a:xfrm>
+            <a:prstGeom prst="rect">
+              <a:avLst/>
+            </a:prstGeom>
+            <a:noFill/>
+            <a:ln>
+              <a:noFill/>
+            </a:ln>
+          </p:spPr>
+          <p:txBody>
+            <a:bodyPr wrap="none" lIns="0" tIns="0" rIns="0" bIns="0" anchor="t" anchorCtr="0">
+              <a:spAutoFit/>
+            </a:bodyPr>
+            <a:lstStyle/>
+            <a:p>
+              <a:pPr algn="l"/>
+              <a:r>
+                <a:rPr lang="ja-JP" sz="1650" dirty="0">
                   <a:solidFill>
                     <a:srgbClr val="202C29"/>
                   </a:solidFill>
@@ -2728,32 +3016,32 @@
         </p:sp>
         <p:sp>
           <p:nvSpPr>
-            <p:cNvPr id="9" name="TextBox 9"/>
-            <p:cNvSpPr txBox="1"/>
-            <p:nvPr/>
-          </p:nvSpPr>
-          <p:spPr>
-            <a:xfrm>
-              <a:off x="600837" y="3851275"/>
-              <a:ext cx="978444" cy="337376"/>
-            </a:xfrm>
-            <a:prstGeom prst="rect">
-              <a:avLst/>
-            </a:prstGeom>
-            <a:noFill/>
-            <a:ln>
-              <a:noFill/>
-            </a:ln>
-          </p:spPr>
-          <p:txBody>
-            <a:bodyPr wrap="none" lIns="0" tIns="0" rIns="0" bIns="0" anchor="t" anchorCtr="0">
-              <a:spAutoFit/>
-            </a:bodyPr>
-            <a:lstStyle/>
-            <a:p>
-              <a:pPr algn="l"/>
-              <a:r>
-                <a:rPr lang="ja-JP" sz="1720" dirty="0">
+            <p:cNvPr id="17" name="TextBox 17"/>
+            <p:cNvSpPr txBox="1"/>
+            <p:nvPr/>
+          </p:nvSpPr>
+          <p:spPr>
+            <a:xfrm>
+              <a:off x="6229731" y="3432175"/>
+              <a:ext cx="701675" cy="352044"/>
+            </a:xfrm>
+            <a:prstGeom prst="rect">
+              <a:avLst/>
+            </a:prstGeom>
+            <a:noFill/>
+            <a:ln>
+              <a:noFill/>
+            </a:ln>
+          </p:spPr>
+          <p:txBody>
+            <a:bodyPr wrap="none" lIns="0" tIns="0" rIns="0" bIns="0" anchor="t" anchorCtr="0">
+              <a:spAutoFit/>
+            </a:bodyPr>
+            <a:lstStyle/>
+            <a:p>
+              <a:pPr algn="l"/>
+              <a:r>
+                <a:rPr lang="ja-JP" sz="1800" b="1" dirty="0">
                   <a:solidFill>
                     <a:srgbClr val="202C29"/>
                   </a:solidFill>
@@ -2761,6 +3049,130 @@
                   <a:ea typeface="+mn-ea"/>
                   <a:cs typeface="+mn-cs"/>
                 </a:rPr>
+                <a:t>5 / 5</a:t>
+              </a:r>
+            </a:p>
+          </p:txBody>
+        </p:sp>
+        <p:sp>
+          <p:nvSpPr>
+            <p:cNvPr id="18" name="TextBox 18"/>
+            <p:cNvSpPr txBox="1"/>
+            <p:nvPr/>
+          </p:nvSpPr>
+          <p:spPr>
+            <a:xfrm>
+              <a:off x="8972931" y="3432175"/>
+              <a:ext cx="701676" cy="352044"/>
+            </a:xfrm>
+            <a:prstGeom prst="rect">
+              <a:avLst/>
+            </a:prstGeom>
+            <a:noFill/>
+            <a:ln>
+              <a:noFill/>
+            </a:ln>
+          </p:spPr>
+          <p:txBody>
+            <a:bodyPr wrap="none" lIns="0" tIns="0" rIns="0" bIns="0" anchor="t" anchorCtr="0">
+              <a:spAutoFit/>
+            </a:bodyPr>
+            <a:lstStyle/>
+            <a:p>
+              <a:pPr algn="l"/>
+              <a:r>
+                <a:rPr lang="ja-JP" sz="1800" dirty="0">
+                  <a:solidFill>
+                    <a:srgbClr val="21654C"/>
+                  </a:solidFill>
+                  <a:latin typeface="+mn-lt"/>
+                  <a:ea typeface="+mn-ea"/>
+                  <a:cs typeface="+mn-cs"/>
+                </a:rPr>
+                <a:t>3 / 5</a:t>
+              </a:r>
+            </a:p>
+          </p:txBody>
+        </p:sp>
+        <p:sp>
+          <p:nvSpPr>
+            <p:cNvPr id="19" name="Rectangle 19"/>
+            <p:cNvSpPr/>
+            <p:nvPr/>
+          </p:nvSpPr>
+          <p:spPr>
+            <a:xfrm>
+              <a:off x="609600" y="3790950"/>
+              <a:ext cx="10953750" cy="9525"/>
+            </a:xfrm>
+            <a:prstGeom prst="rect">
+              <a:avLst/>
+            </a:prstGeom>
+            <a:solidFill>
+              <a:srgbClr val="CAD5CC"/>
+            </a:solidFill>
+            <a:ln>
+              <a:noFill/>
+            </a:ln>
+          </p:spPr>
+        </p:sp>
+        <p:sp>
+          <p:nvSpPr>
+            <p:cNvPr id="20" name="Rectangle 20"/>
+            <p:cNvSpPr/>
+            <p:nvPr/>
+          </p:nvSpPr>
+          <p:spPr>
+            <a:xfrm>
+              <a:off x="609600" y="3800475"/>
+              <a:ext cx="10953750" cy="457200"/>
+            </a:xfrm>
+            <a:prstGeom prst="rect">
+              <a:avLst/>
+            </a:prstGeom>
+            <a:solidFill>
+              <a:srgbClr val="E5EEE7"/>
+            </a:solidFill>
+            <a:ln>
+              <a:noFill/>
+            </a:ln>
+          </p:spPr>
+        </p:sp>
+        <p:sp>
+          <p:nvSpPr>
+            <p:cNvPr id="21" name="TextBox 21"/>
+            <p:cNvSpPr txBox="1"/>
+            <p:nvPr/>
+          </p:nvSpPr>
+          <p:spPr>
+            <a:xfrm>
+              <a:off x="772668" y="3902075"/>
+              <a:ext cx="1098550" cy="322707"/>
+            </a:xfrm>
+            <a:prstGeom prst="rect">
+              <a:avLst/>
+            </a:prstGeom>
+            <a:noFill/>
+            <a:ln>
+              <a:noFill/>
+            </a:ln>
+          </p:spPr>
+          <p:txBody>
+            <a:bodyPr wrap="none" lIns="0" tIns="0" rIns="0" bIns="0" anchor="t" anchorCtr="0">
+              <a:spAutoFit/>
+            </a:bodyPr>
+            <a:lstStyle/>
+            <a:p>
+              <a:pPr algn="l"/>
+              <a:r>
+                <a:rPr lang="ja-JP" sz="1650" dirty="0">
+                  <a:solidFill>
+                    <a:srgbClr val="202C29"/>
+                  </a:solidFill>
+                  <a:latin typeface="+mn-lt"/>
+                  <a:ea typeface="+mn-ea"/>
+                  <a:cs typeface="+mn-cs"/>
+                </a:rPr>
                 <a:t>賃料 20%</a:t>
               </a:r>
             </a:p>
@@ -2768,32 +3180,32 @@
         </p:sp>
         <p:sp>
           <p:nvSpPr>
-            <p:cNvPr id="10" name="TextBox 10"/>
-            <p:cNvSpPr txBox="1"/>
-            <p:nvPr/>
-          </p:nvSpPr>
-          <p:spPr>
-            <a:xfrm>
-              <a:off x="600837" y="4279900"/>
-              <a:ext cx="1209990" cy="337376"/>
-            </a:xfrm>
-            <a:prstGeom prst="rect">
-              <a:avLst/>
-            </a:prstGeom>
-            <a:noFill/>
-            <a:ln>
-              <a:noFill/>
-            </a:ln>
-          </p:spPr>
-          <p:txBody>
-            <a:bodyPr wrap="none" lIns="0" tIns="0" rIns="0" bIns="0" anchor="t" anchorCtr="0">
-              <a:spAutoFit/>
-            </a:bodyPr>
-            <a:lstStyle/>
-            <a:p>
-              <a:pPr algn="l"/>
-              <a:r>
-                <a:rPr lang="ja-JP" sz="1720" dirty="0">
+            <p:cNvPr id="22" name="TextBox 22"/>
+            <p:cNvSpPr txBox="1"/>
+            <p:nvPr/>
+          </p:nvSpPr>
+          <p:spPr>
+            <a:xfrm>
+              <a:off x="6229731" y="3889375"/>
+              <a:ext cx="701676" cy="352044"/>
+            </a:xfrm>
+            <a:prstGeom prst="rect">
+              <a:avLst/>
+            </a:prstGeom>
+            <a:noFill/>
+            <a:ln>
+              <a:noFill/>
+            </a:ln>
+          </p:spPr>
+          <p:txBody>
+            <a:bodyPr wrap="none" lIns="0" tIns="0" rIns="0" bIns="0" anchor="t" anchorCtr="0">
+              <a:spAutoFit/>
+            </a:bodyPr>
+            <a:lstStyle/>
+            <a:p>
+              <a:pPr algn="l"/>
+              <a:r>
+                <a:rPr lang="ja-JP" sz="1800" dirty="0">
                   <a:solidFill>
                     <a:srgbClr val="202C29"/>
                   </a:solidFill>
@@ -2801,6 +3213,130 @@
                   <a:ea typeface="+mn-ea"/>
                   <a:cs typeface="+mn-cs"/>
                 </a:rPr>
+                <a:t>3 / 5</a:t>
+              </a:r>
+            </a:p>
+          </p:txBody>
+        </p:sp>
+        <p:sp>
+          <p:nvSpPr>
+            <p:cNvPr id="23" name="TextBox 23"/>
+            <p:cNvSpPr txBox="1"/>
+            <p:nvPr/>
+          </p:nvSpPr>
+          <p:spPr>
+            <a:xfrm>
+              <a:off x="8972931" y="3889375"/>
+              <a:ext cx="701675" cy="352044"/>
+            </a:xfrm>
+            <a:prstGeom prst="rect">
+              <a:avLst/>
+            </a:prstGeom>
+            <a:noFill/>
+            <a:ln>
+              <a:noFill/>
+            </a:ln>
+          </p:spPr>
+          <p:txBody>
+            <a:bodyPr wrap="none" lIns="0" tIns="0" rIns="0" bIns="0" anchor="t" anchorCtr="0">
+              <a:spAutoFit/>
+            </a:bodyPr>
+            <a:lstStyle/>
+            <a:p>
+              <a:pPr algn="l"/>
+              <a:r>
+                <a:rPr lang="ja-JP" sz="1800" b="1" dirty="0">
+                  <a:solidFill>
+                    <a:srgbClr val="21654C"/>
+                  </a:solidFill>
+                  <a:latin typeface="+mn-lt"/>
+                  <a:ea typeface="+mn-ea"/>
+                  <a:cs typeface="+mn-cs"/>
+                </a:rPr>
+                <a:t>5 / 5</a:t>
+              </a:r>
+            </a:p>
+          </p:txBody>
+        </p:sp>
+        <p:sp>
+          <p:nvSpPr>
+            <p:cNvPr id="24" name="Rectangle 24"/>
+            <p:cNvSpPr/>
+            <p:nvPr/>
+          </p:nvSpPr>
+          <p:spPr>
+            <a:xfrm>
+              <a:off x="609600" y="4248150"/>
+              <a:ext cx="10953750" cy="9525"/>
+            </a:xfrm>
+            <a:prstGeom prst="rect">
+              <a:avLst/>
+            </a:prstGeom>
+            <a:solidFill>
+              <a:srgbClr val="CAD5CC"/>
+            </a:solidFill>
+            <a:ln>
+              <a:noFill/>
+            </a:ln>
+          </p:spPr>
+        </p:sp>
+        <p:sp>
+          <p:nvSpPr>
+            <p:cNvPr id="25" name="Rectangle 25"/>
+            <p:cNvSpPr/>
+            <p:nvPr/>
+          </p:nvSpPr>
+          <p:spPr>
+            <a:xfrm>
+              <a:off x="609600" y="4257675"/>
+              <a:ext cx="10953750" cy="457200"/>
+            </a:xfrm>
+            <a:prstGeom prst="rect">
+              <a:avLst/>
+            </a:prstGeom>
+            <a:solidFill>
+              <a:srgbClr val="EDF0EC"/>
+            </a:solidFill>
+            <a:ln>
+              <a:noFill/>
+            </a:ln>
+          </p:spPr>
+        </p:sp>
+        <p:sp>
+          <p:nvSpPr>
+            <p:cNvPr id="26" name="TextBox 26"/>
+            <p:cNvSpPr txBox="1"/>
+            <p:nvPr/>
+          </p:nvSpPr>
+          <p:spPr>
+            <a:xfrm>
+              <a:off x="772668" y="4359275"/>
+              <a:ext cx="1281114" cy="322707"/>
+            </a:xfrm>
+            <a:prstGeom prst="rect">
+              <a:avLst/>
+            </a:prstGeom>
+            <a:noFill/>
+            <a:ln>
+              <a:noFill/>
+            </a:ln>
+          </p:spPr>
+          <p:txBody>
+            <a:bodyPr wrap="none" lIns="0" tIns="0" rIns="0" bIns="0" anchor="t" anchorCtr="0">
+              <a:spAutoFit/>
+            </a:bodyPr>
+            <a:lstStyle/>
+            <a:p>
+              <a:pPr algn="l"/>
+              <a:r>
+                <a:rPr lang="ja-JP" sz="1650" dirty="0">
+                  <a:solidFill>
+                    <a:srgbClr val="202C29"/>
+                  </a:solidFill>
+                  <a:latin typeface="+mn-lt"/>
+                  <a:ea typeface="+mn-ea"/>
+                  <a:cs typeface="+mn-cs"/>
+                </a:rPr>
                 <a:t>視認性 15%</a:t>
               </a:r>
             </a:p>
@@ -2808,32 +3344,32 @@
         </p:sp>
         <p:sp>
           <p:nvSpPr>
-            <p:cNvPr id="11" name="TextBox 11"/>
-            <p:cNvSpPr txBox="1"/>
-            <p:nvPr/>
-          </p:nvSpPr>
-          <p:spPr>
-            <a:xfrm>
-              <a:off x="600837" y="4708525"/>
-              <a:ext cx="1904629" cy="337376"/>
-            </a:xfrm>
-            <a:prstGeom prst="rect">
-              <a:avLst/>
-            </a:prstGeom>
-            <a:noFill/>
-            <a:ln>
-              <a:noFill/>
-            </a:ln>
-          </p:spPr>
-          <p:txBody>
-            <a:bodyPr wrap="none" lIns="0" tIns="0" rIns="0" bIns="0" anchor="t" anchorCtr="0">
-              <a:spAutoFit/>
-            </a:bodyPr>
-            <a:lstStyle/>
-            <a:p>
-              <a:pPr algn="l"/>
-              <a:r>
-                <a:rPr lang="ja-JP" sz="1720" dirty="0">
+            <p:cNvPr id="27" name="TextBox 27"/>
+            <p:cNvSpPr txBox="1"/>
+            <p:nvPr/>
+          </p:nvSpPr>
+          <p:spPr>
+            <a:xfrm>
+              <a:off x="6229731" y="4346575"/>
+              <a:ext cx="701675" cy="352044"/>
+            </a:xfrm>
+            <a:prstGeom prst="rect">
+              <a:avLst/>
+            </a:prstGeom>
+            <a:noFill/>
+            <a:ln>
+              <a:noFill/>
+            </a:ln>
+          </p:spPr>
+          <p:txBody>
+            <a:bodyPr wrap="none" lIns="0" tIns="0" rIns="0" bIns="0" anchor="t" anchorCtr="0">
+              <a:spAutoFit/>
+            </a:bodyPr>
+            <a:lstStyle/>
+            <a:p>
+              <a:pPr algn="l"/>
+              <a:r>
+                <a:rPr lang="ja-JP" sz="1800" b="1" dirty="0">
                   <a:solidFill>
                     <a:srgbClr val="202C29"/>
                   </a:solidFill>
@@ -2841,21 +3377,21 @@
                   <a:ea typeface="+mn-ea"/>
                   <a:cs typeface="+mn-cs"/>
                 </a:rPr>
-                <a:t>運営しやすさ 10%</a:t>
-              </a:r>
-            </a:p>
-          </p:txBody>
-        </p:sp>
-        <p:sp>
-          <p:nvSpPr>
-            <p:cNvPr id="12" name="TextBox 12"/>
-            <p:cNvSpPr txBox="1"/>
-            <p:nvPr/>
-          </p:nvSpPr>
-          <p:spPr>
-            <a:xfrm>
-              <a:off x="6277356" y="2565400"/>
-              <a:ext cx="720547" cy="352044"/>
+                <a:t>4 / 5</a:t>
+              </a:r>
+            </a:p>
+          </p:txBody>
+        </p:sp>
+        <p:sp>
+          <p:nvSpPr>
+            <p:cNvPr id="28" name="TextBox 28"/>
+            <p:cNvSpPr txBox="1"/>
+            <p:nvPr/>
+          </p:nvSpPr>
+          <p:spPr>
+            <a:xfrm>
+              <a:off x="8972931" y="4346575"/>
+              <a:ext cx="701676" cy="352044"/>
             </a:xfrm>
             <a:prstGeom prst="rect">
               <a:avLst/>
@@ -2875,27 +3411,111 @@
               <a:r>
                 <a:rPr lang="ja-JP" sz="1800" dirty="0">
                   <a:solidFill>
+                    <a:srgbClr val="21654C"/>
+                  </a:solidFill>
+                  <a:latin typeface="+mn-lt"/>
+                  <a:ea typeface="+mn-ea"/>
+                  <a:cs typeface="+mn-cs"/>
+                </a:rPr>
+                <a:t>3 / 5</a:t>
+              </a:r>
+            </a:p>
+          </p:txBody>
+        </p:sp>
+        <p:sp>
+          <p:nvSpPr>
+            <p:cNvPr id="29" name="Rectangle 29"/>
+            <p:cNvSpPr/>
+            <p:nvPr/>
+          </p:nvSpPr>
+          <p:spPr>
+            <a:xfrm>
+              <a:off x="609600" y="4705350"/>
+              <a:ext cx="10953750" cy="9525"/>
+            </a:xfrm>
+            <a:prstGeom prst="rect">
+              <a:avLst/>
+            </a:prstGeom>
+            <a:solidFill>
+              <a:srgbClr val="CAD5CC"/>
+            </a:solidFill>
+            <a:ln>
+              <a:noFill/>
+            </a:ln>
+          </p:spPr>
+        </p:sp>
+        <p:sp>
+          <p:nvSpPr>
+            <p:cNvPr id="30" name="Rectangle 30"/>
+            <p:cNvSpPr/>
+            <p:nvPr/>
+          </p:nvSpPr>
+          <p:spPr>
+            <a:xfrm>
+              <a:off x="609600" y="4714875"/>
+              <a:ext cx="10953750" cy="457200"/>
+            </a:xfrm>
+            <a:prstGeom prst="rect">
+              <a:avLst/>
+            </a:prstGeom>
+            <a:solidFill>
+              <a:srgbClr val="F7F5EE"/>
+            </a:solidFill>
+            <a:ln>
+              <a:noFill/>
+            </a:ln>
+          </p:spPr>
+        </p:sp>
+        <p:sp>
+          <p:nvSpPr>
+            <p:cNvPr id="31" name="TextBox 31"/>
+            <p:cNvSpPr txBox="1"/>
+            <p:nvPr/>
+          </p:nvSpPr>
+          <p:spPr>
+            <a:xfrm>
+              <a:off x="772668" y="4816475"/>
+              <a:ext cx="2049189" cy="322707"/>
+            </a:xfrm>
+            <a:prstGeom prst="rect">
+              <a:avLst/>
+            </a:prstGeom>
+            <a:noFill/>
+            <a:ln>
+              <a:noFill/>
+            </a:ln>
+          </p:spPr>
+          <p:txBody>
+            <a:bodyPr wrap="none" lIns="0" tIns="0" rIns="0" bIns="0" anchor="t" anchorCtr="0">
+              <a:spAutoFit/>
+            </a:bodyPr>
+            <a:lstStyle/>
+            <a:p>
+              <a:pPr algn="l"/>
+              <a:r>
+                <a:rPr lang="ja-JP" sz="1650" dirty="0">
+                  <a:solidFill>
                     <a:srgbClr val="202C29"/>
                   </a:solidFill>
                   <a:latin typeface="+mn-lt"/>
                   <a:ea typeface="+mn-ea"/>
                   <a:cs typeface="+mn-cs"/>
                 </a:rPr>
-                <a:t>A 駅前</a:t>
-              </a:r>
-            </a:p>
-          </p:txBody>
-        </p:sp>
-        <p:sp>
-          <p:nvSpPr>
-            <p:cNvPr id="13" name="TextBox 13"/>
-            <p:cNvSpPr txBox="1"/>
-            <p:nvPr/>
-          </p:nvSpPr>
-          <p:spPr>
-            <a:xfrm>
-              <a:off x="6277356" y="2994025"/>
-              <a:ext cx="563499" cy="352044"/>
+                <a:t>運営のしやすさ 10%</a:t>
+              </a:r>
+            </a:p>
+          </p:txBody>
+        </p:sp>
+        <p:sp>
+          <p:nvSpPr>
+            <p:cNvPr id="32" name="TextBox 32"/>
+            <p:cNvSpPr txBox="1"/>
+            <p:nvPr/>
+          </p:nvSpPr>
+          <p:spPr>
+            <a:xfrm>
+              <a:off x="6229731" y="4803775"/>
+              <a:ext cx="701676" cy="352044"/>
             </a:xfrm>
             <a:prstGeom prst="rect">
               <a:avLst/>
@@ -2928,14 +3548,14 @@
         </p:sp>
         <p:sp>
           <p:nvSpPr>
-            <p:cNvPr id="14" name="TextBox 14"/>
-            <p:cNvSpPr txBox="1"/>
-            <p:nvPr/>
-          </p:nvSpPr>
-          <p:spPr>
-            <a:xfrm>
-              <a:off x="6277356" y="3422650"/>
-              <a:ext cx="563499" cy="352044"/>
+            <p:cNvPr id="33" name="TextBox 33"/>
+            <p:cNvSpPr txBox="1"/>
+            <p:nvPr/>
+          </p:nvSpPr>
+          <p:spPr>
+            <a:xfrm>
+              <a:off x="8972931" y="4803775"/>
+              <a:ext cx="701676" cy="352044"/>
             </a:xfrm>
             <a:prstGeom prst="rect">
               <a:avLst/>
@@ -2955,412 +3575,74 @@
               <a:r>
                 <a:rPr lang="ja-JP" sz="1800" dirty="0">
                   <a:solidFill>
+                    <a:srgbClr val="21654C"/>
+                  </a:solidFill>
+                  <a:latin typeface="+mn-lt"/>
+                  <a:ea typeface="+mn-ea"/>
+                  <a:cs typeface="+mn-cs"/>
+                </a:rPr>
+                <a:t>4 / 5</a:t>
+              </a:r>
+            </a:p>
+          </p:txBody>
+        </p:sp>
+        <p:sp>
+          <p:nvSpPr>
+            <p:cNvPr id="34" name="Rectangle 34"/>
+            <p:cNvSpPr/>
+            <p:nvPr/>
+          </p:nvSpPr>
+          <p:spPr>
+            <a:xfrm>
+              <a:off x="609600" y="5162550"/>
+              <a:ext cx="10953750" cy="9525"/>
+            </a:xfrm>
+            <a:prstGeom prst="rect">
+              <a:avLst/>
+            </a:prstGeom>
+            <a:solidFill>
+              <a:srgbClr val="CAD5CC"/>
+            </a:solidFill>
+            <a:ln>
+              <a:noFill/>
+            </a:ln>
+          </p:spPr>
+        </p:sp>
+        <p:sp>
+          <p:nvSpPr>
+            <p:cNvPr id="35" name="TextBox 35"/>
+            <p:cNvSpPr txBox="1"/>
+            <p:nvPr/>
+          </p:nvSpPr>
+          <p:spPr>
+            <a:xfrm>
+              <a:off x="6229350" y="5429250"/>
+              <a:ext cx="2254251" cy="367665"/>
+            </a:xfrm>
+            <a:prstGeom prst="rect">
+              <a:avLst/>
+            </a:prstGeom>
+            <a:noFill/>
+            <a:ln>
+              <a:noFill/>
+            </a:ln>
+          </p:spPr>
+          <p:txBody>
+            <a:bodyPr wrap="none" lIns="0" tIns="0" rIns="0" bIns="0" anchor="t" anchorCtr="0">
+              <a:spAutoFit/>
+            </a:bodyPr>
+            <a:lstStyle/>
+            <a:p>
+              <a:pPr algn="l"/>
+              <a:r>
+                <a:rPr lang="ja-JP" sz="1880" b="1" dirty="0">
+                  <a:solidFill>
                     <a:srgbClr val="202C29"/>
                   </a:solidFill>
                   <a:latin typeface="+mn-lt"/>
                   <a:ea typeface="+mn-ea"/>
                   <a:cs typeface="+mn-cs"/>
                 </a:rPr>
-                <a:t>5 / 5</a:t>
-              </a:r>
-            </a:p>
-          </p:txBody>
-        </p:sp>
-        <p:sp>
-          <p:nvSpPr>
-            <p:cNvPr id="15" name="TextBox 15"/>
-            <p:cNvSpPr txBox="1"/>
-            <p:nvPr/>
-          </p:nvSpPr>
-          <p:spPr>
-            <a:xfrm>
-              <a:off x="6277356" y="3851275"/>
-              <a:ext cx="563499" cy="352044"/>
-            </a:xfrm>
-            <a:prstGeom prst="rect">
-              <a:avLst/>
-            </a:prstGeom>
-            <a:noFill/>
-            <a:ln>
-              <a:noFill/>
-            </a:ln>
-          </p:spPr>
-          <p:txBody>
-            <a:bodyPr wrap="none" lIns="0" tIns="0" rIns="0" bIns="0" anchor="t" anchorCtr="0">
-              <a:spAutoFit/>
-            </a:bodyPr>
-            <a:lstStyle/>
-            <a:p>
-              <a:pPr algn="l"/>
-              <a:r>
-                <a:rPr lang="ja-JP" sz="1800" dirty="0">
-                  <a:solidFill>
-                    <a:srgbClr val="202C29"/>
-                  </a:solidFill>
-                  <a:latin typeface="+mn-lt"/>
-                  <a:ea typeface="+mn-ea"/>
-                  <a:cs typeface="+mn-cs"/>
-                </a:rPr>
-                <a:t>3 / 5</a:t>
-              </a:r>
-            </a:p>
-          </p:txBody>
-        </p:sp>
-        <p:sp>
-          <p:nvSpPr>
-            <p:cNvPr id="16" name="TextBox 16"/>
-            <p:cNvSpPr txBox="1"/>
-            <p:nvPr/>
-          </p:nvSpPr>
-          <p:spPr>
-            <a:xfrm>
-              <a:off x="6277356" y="4279900"/>
-              <a:ext cx="563499" cy="352044"/>
-            </a:xfrm>
-            <a:prstGeom prst="rect">
-              <a:avLst/>
-            </a:prstGeom>
-            <a:noFill/>
-            <a:ln>
-              <a:noFill/>
-            </a:ln>
-          </p:spPr>
-          <p:txBody>
-            <a:bodyPr wrap="none" lIns="0" tIns="0" rIns="0" bIns="0" anchor="t" anchorCtr="0">
-              <a:spAutoFit/>
-            </a:bodyPr>
-            <a:lstStyle/>
-            <a:p>
-              <a:pPr algn="l"/>
-              <a:r>
-                <a:rPr lang="ja-JP" sz="1800" dirty="0">
-                  <a:solidFill>
-                    <a:srgbClr val="202C29"/>
-                  </a:solidFill>
-                  <a:latin typeface="+mn-lt"/>
-                  <a:ea typeface="+mn-ea"/>
-                  <a:cs typeface="+mn-cs"/>
-                </a:rPr>
-                <a:t>4 / 5</a:t>
-              </a:r>
-            </a:p>
-          </p:txBody>
-        </p:sp>
-        <p:sp>
-          <p:nvSpPr>
-            <p:cNvPr id="17" name="TextBox 17"/>
-            <p:cNvSpPr txBox="1"/>
-            <p:nvPr/>
-          </p:nvSpPr>
-          <p:spPr>
-            <a:xfrm>
-              <a:off x="6277356" y="4708525"/>
-              <a:ext cx="563499" cy="352044"/>
-            </a:xfrm>
-            <a:prstGeom prst="rect">
-              <a:avLst/>
-            </a:prstGeom>
-            <a:noFill/>
-            <a:ln>
-              <a:noFill/>
-            </a:ln>
-          </p:spPr>
-          <p:txBody>
-            <a:bodyPr wrap="none" lIns="0" tIns="0" rIns="0" bIns="0" anchor="t" anchorCtr="0">
-              <a:spAutoFit/>
-            </a:bodyPr>
-            <a:lstStyle/>
-            <a:p>
-              <a:pPr algn="l"/>
-              <a:r>
-                <a:rPr lang="ja-JP" sz="1800" dirty="0">
-                  <a:solidFill>
-                    <a:srgbClr val="202C29"/>
-                  </a:solidFill>
-                  <a:latin typeface="+mn-lt"/>
-                  <a:ea typeface="+mn-ea"/>
-                  <a:cs typeface="+mn-cs"/>
-                </a:rPr>
-                <a:t>4 / 5</a:t>
-              </a:r>
-            </a:p>
-          </p:txBody>
-        </p:sp>
-        <p:sp>
-          <p:nvSpPr>
-            <p:cNvPr id="18" name="TextBox 18"/>
-            <p:cNvSpPr txBox="1"/>
-            <p:nvPr/>
-          </p:nvSpPr>
-          <p:spPr>
-            <a:xfrm>
-              <a:off x="9011031" y="2565400"/>
-              <a:ext cx="1205179" cy="352044"/>
-            </a:xfrm>
-            <a:prstGeom prst="rect">
-              <a:avLst/>
-            </a:prstGeom>
-            <a:noFill/>
-            <a:ln>
-              <a:noFill/>
-            </a:ln>
-          </p:spPr>
-          <p:txBody>
-            <a:bodyPr wrap="none" lIns="0" tIns="0" rIns="0" bIns="0" anchor="t" anchorCtr="0">
-              <a:spAutoFit/>
-            </a:bodyPr>
-            <a:lstStyle/>
-            <a:p>
-              <a:pPr algn="l"/>
-              <a:r>
-                <a:rPr lang="ja-JP" sz="1800" dirty="0">
-                  <a:solidFill>
-                    <a:srgbClr val="21654C"/>
-                  </a:solidFill>
-                  <a:latin typeface="+mn-lt"/>
-                  <a:ea typeface="+mn-ea"/>
-                  <a:cs typeface="+mn-cs"/>
-                </a:rPr>
-                <a:t>B 運河沿い</a:t>
-              </a:r>
-            </a:p>
-          </p:txBody>
-        </p:sp>
-        <p:sp>
-          <p:nvSpPr>
-            <p:cNvPr id="19" name="TextBox 19"/>
-            <p:cNvSpPr txBox="1"/>
-            <p:nvPr/>
-          </p:nvSpPr>
-          <p:spPr>
-            <a:xfrm>
-              <a:off x="9011031" y="2994025"/>
-              <a:ext cx="563499" cy="352044"/>
-            </a:xfrm>
-            <a:prstGeom prst="rect">
-              <a:avLst/>
-            </a:prstGeom>
-            <a:noFill/>
-            <a:ln>
-              <a:noFill/>
-            </a:ln>
-          </p:spPr>
-          <p:txBody>
-            <a:bodyPr wrap="none" lIns="0" tIns="0" rIns="0" bIns="0" anchor="t" anchorCtr="0">
-              <a:spAutoFit/>
-            </a:bodyPr>
-            <a:lstStyle/>
-            <a:p>
-              <a:pPr algn="l"/>
-              <a:r>
-                <a:rPr lang="ja-JP" sz="1800" dirty="0">
-                  <a:solidFill>
-                    <a:srgbClr val="21654C"/>
-                  </a:solidFill>
-                  <a:latin typeface="+mn-lt"/>
-                  <a:ea typeface="+mn-ea"/>
-                  <a:cs typeface="+mn-cs"/>
-                </a:rPr>
-                <a:t>5 / 5</a:t>
-              </a:r>
-            </a:p>
-          </p:txBody>
-        </p:sp>
-        <p:sp>
-          <p:nvSpPr>
-            <p:cNvPr id="20" name="TextBox 20"/>
-            <p:cNvSpPr txBox="1"/>
-            <p:nvPr/>
-          </p:nvSpPr>
-          <p:spPr>
-            <a:xfrm>
-              <a:off x="9011031" y="3422650"/>
-              <a:ext cx="563499" cy="352044"/>
-            </a:xfrm>
-            <a:prstGeom prst="rect">
-              <a:avLst/>
-            </a:prstGeom>
-            <a:noFill/>
-            <a:ln>
-              <a:noFill/>
-            </a:ln>
-          </p:spPr>
-          <p:txBody>
-            <a:bodyPr wrap="none" lIns="0" tIns="0" rIns="0" bIns="0" anchor="t" anchorCtr="0">
-              <a:spAutoFit/>
-            </a:bodyPr>
-            <a:lstStyle/>
-            <a:p>
-              <a:pPr algn="l"/>
-              <a:r>
-                <a:rPr lang="ja-JP" sz="1800" dirty="0">
-                  <a:solidFill>
-                    <a:srgbClr val="21654C"/>
-                  </a:solidFill>
-                  <a:latin typeface="+mn-lt"/>
-                  <a:ea typeface="+mn-ea"/>
-                  <a:cs typeface="+mn-cs"/>
-                </a:rPr>
-                <a:t>3 / 5</a:t>
-              </a:r>
-            </a:p>
-          </p:txBody>
-        </p:sp>
-        <p:sp>
-          <p:nvSpPr>
-            <p:cNvPr id="21" name="TextBox 21"/>
-            <p:cNvSpPr txBox="1"/>
-            <p:nvPr/>
-          </p:nvSpPr>
-          <p:spPr>
-            <a:xfrm>
-              <a:off x="9011031" y="3851275"/>
-              <a:ext cx="563499" cy="352044"/>
-            </a:xfrm>
-            <a:prstGeom prst="rect">
-              <a:avLst/>
-            </a:prstGeom>
-            <a:noFill/>
-            <a:ln>
-              <a:noFill/>
-            </a:ln>
-          </p:spPr>
-          <p:txBody>
-            <a:bodyPr wrap="none" lIns="0" tIns="0" rIns="0" bIns="0" anchor="t" anchorCtr="0">
-              <a:spAutoFit/>
-            </a:bodyPr>
-            <a:lstStyle/>
-            <a:p>
-              <a:pPr algn="l"/>
-              <a:r>
-                <a:rPr lang="ja-JP" sz="1800" dirty="0">
-                  <a:solidFill>
-                    <a:srgbClr val="21654C"/>
-                  </a:solidFill>
-                  <a:latin typeface="+mn-lt"/>
-                  <a:ea typeface="+mn-ea"/>
-                  <a:cs typeface="+mn-cs"/>
-                </a:rPr>
-                <a:t>5 / 5</a:t>
-              </a:r>
-            </a:p>
-          </p:txBody>
-        </p:sp>
-        <p:sp>
-          <p:nvSpPr>
-            <p:cNvPr id="22" name="TextBox 22"/>
-            <p:cNvSpPr txBox="1"/>
-            <p:nvPr/>
-          </p:nvSpPr>
-          <p:spPr>
-            <a:xfrm>
-              <a:off x="9011031" y="4279900"/>
-              <a:ext cx="563499" cy="352044"/>
-            </a:xfrm>
-            <a:prstGeom prst="rect">
-              <a:avLst/>
-            </a:prstGeom>
-            <a:noFill/>
-            <a:ln>
-              <a:noFill/>
-            </a:ln>
-          </p:spPr>
-          <p:txBody>
-            <a:bodyPr wrap="none" lIns="0" tIns="0" rIns="0" bIns="0" anchor="t" anchorCtr="0">
-              <a:spAutoFit/>
-            </a:bodyPr>
-            <a:lstStyle/>
-            <a:p>
-              <a:pPr algn="l"/>
-              <a:r>
-                <a:rPr lang="ja-JP" sz="1800" dirty="0">
-                  <a:solidFill>
-                    <a:srgbClr val="21654C"/>
-                  </a:solidFill>
-                  <a:latin typeface="+mn-lt"/>
-                  <a:ea typeface="+mn-ea"/>
-                  <a:cs typeface="+mn-cs"/>
-                </a:rPr>
-                <a:t>3 / 5</a:t>
-              </a:r>
-            </a:p>
-          </p:txBody>
-        </p:sp>
-        <p:sp>
-          <p:nvSpPr>
-            <p:cNvPr id="23" name="TextBox 23"/>
-            <p:cNvSpPr txBox="1"/>
-            <p:nvPr/>
-          </p:nvSpPr>
-          <p:spPr>
-            <a:xfrm>
-              <a:off x="9011031" y="4708525"/>
-              <a:ext cx="563499" cy="352044"/>
-            </a:xfrm>
-            <a:prstGeom prst="rect">
-              <a:avLst/>
-            </a:prstGeom>
-            <a:noFill/>
-            <a:ln>
-              <a:noFill/>
-            </a:ln>
-          </p:spPr>
-          <p:txBody>
-            <a:bodyPr wrap="none" lIns="0" tIns="0" rIns="0" bIns="0" anchor="t" anchorCtr="0">
-              <a:spAutoFit/>
-            </a:bodyPr>
-            <a:lstStyle/>
-            <a:p>
-              <a:pPr algn="l"/>
-              <a:r>
-                <a:rPr lang="ja-JP" sz="1800" dirty="0">
-                  <a:solidFill>
-                    <a:srgbClr val="21654C"/>
-                  </a:solidFill>
-                  <a:latin typeface="+mn-lt"/>
-                  <a:ea typeface="+mn-ea"/>
-                  <a:cs typeface="+mn-cs"/>
-                </a:rPr>
-                <a:t>4 / 5</a:t>
-              </a:r>
-            </a:p>
-          </p:txBody>
-        </p:sp>
-        <p:sp>
-          <p:nvSpPr>
-            <p:cNvPr id="24" name="TextBox 24"/>
-            <p:cNvSpPr txBox="1"/>
-            <p:nvPr/>
-          </p:nvSpPr>
-          <p:spPr>
-            <a:xfrm>
-              <a:off x="6276213" y="5492750"/>
-              <a:ext cx="2336758" cy="396050"/>
-            </a:xfrm>
-            <a:prstGeom prst="rect">
-              <a:avLst/>
-            </a:prstGeom>
-            <a:noFill/>
-            <a:ln>
-              <a:noFill/>
-            </a:ln>
-          </p:spPr>
-          <p:txBody>
-            <a:bodyPr wrap="none" lIns="0" tIns="0" rIns="0" bIns="0" anchor="t" anchorCtr="0">
-              <a:spAutoFit/>
-            </a:bodyPr>
-            <a:lstStyle/>
-            <a:p>
-              <a:pPr algn="l"/>
-              <a:r>
-                <a:rPr lang="ja-JP" sz="2020" b="1" dirty="0">
-                  <a:solidFill>
-                    <a:srgbClr val="202C29"/>
-                  </a:solidFill>
-                  <a:latin typeface="+mn-lt"/>
-                  <a:ea typeface="+mn-ea"/>
-                  <a:cs typeface="+mn-cs"/>
-                </a:rPr>
                 <a:t>81点 / 賃料28万円</a:t>
               </a:r>
             </a:p>
@@ -3368,14 +3650,14 @@
         </p:sp>
         <p:sp>
           <p:nvSpPr>
-            <p:cNvPr id="25" name="TextBox 25"/>
-            <p:cNvSpPr txBox="1"/>
-            <p:nvPr/>
-          </p:nvSpPr>
-          <p:spPr>
-            <a:xfrm>
-              <a:off x="9010650" y="5505450"/>
-              <a:ext cx="2174707" cy="367665"/>
+            <p:cNvPr id="36" name="TextBox 36"/>
+            <p:cNvSpPr txBox="1"/>
+            <p:nvPr/>
+          </p:nvSpPr>
+          <p:spPr>
+            <a:xfrm>
+              <a:off x="8972550" y="5429250"/>
+              <a:ext cx="2254251" cy="367665"/>
             </a:xfrm>
             <a:prstGeom prst="rect">
               <a:avLst/>
@@ -3409,7 +3691,7 @@
       </p:grpSp>
       <p:grpSp>
         <p:nvGrpSpPr>
-          <p:cNvPr id="29" name="footer"/>
+          <p:cNvPr id="40" name="footer"/>
           <p:cNvGrpSpPr/>
           <p:nvPr/>
         </p:nvGrpSpPr>
@@ -3423,7 +3705,7 @@
         </p:grpSpPr>
         <p:sp>
           <p:nvSpPr>
-            <p:cNvPr id="27" name="TextBox 27"/>
+            <p:cNvPr id="38" name="TextBox 38"/>
             <p:cNvSpPr txBox="1"/>
             <p:nvPr/>
           </p:nvSpPr>
@@ -3463,14 +3745,14 @@
         </p:sp>
         <p:sp>
           <p:nvSpPr>
-            <p:cNvPr id="28" name="TextBox 28"/>
+            <p:cNvPr id="39" name="TextBox 39"/>
             <p:cNvSpPr txBox="1"/>
             <p:nvPr/>
           </p:nvSpPr>
           <p:spPr>
             <a:xfrm>
               <a:off x="10614279" y="6315075"/>
-              <a:ext cx="553364" cy="234696"/>
+              <a:ext cx="704851" cy="234696"/>
             </a:xfrm>
             <a:prstGeom prst="rect">
               <a:avLst/>
@@ -3561,7 +3843,7 @@
           <p:spPr>
             <a:xfrm>
               <a:off x="603504" y="523875"/>
-              <a:ext cx="1472855" cy="234696"/>
+              <a:ext cx="1630364" cy="234696"/>
             </a:xfrm>
             <a:prstGeom prst="rect">
               <a:avLst/>
@@ -3656,7 +3938,7 @@
           <p:spPr>
             <a:xfrm>
               <a:off x="590550" y="1927225"/>
-              <a:ext cx="1763996" cy="1076325"/>
+              <a:ext cx="2085975" cy="1076325"/>
             </a:xfrm>
             <a:prstGeom prst="rect">
               <a:avLst/>
@@ -3736,7 +4018,7 @@
           <p:spPr>
             <a:xfrm>
               <a:off x="599694" y="2997200"/>
-              <a:ext cx="2539898" cy="381381"/>
+              <a:ext cx="2684464" cy="381381"/>
             </a:xfrm>
             <a:prstGeom prst="rect">
               <a:avLst/>
@@ -3776,7 +4058,7 @@
           <p:spPr>
             <a:xfrm>
               <a:off x="599694" y="3549650"/>
-              <a:ext cx="2133009" cy="381381"/>
+              <a:ext cx="2247901" cy="381381"/>
             </a:xfrm>
             <a:prstGeom prst="rect">
               <a:avLst/>
@@ -3816,7 +4098,7 @@
           <p:spPr>
             <a:xfrm>
               <a:off x="599694" y="4102100"/>
-              <a:ext cx="1844250" cy="381381"/>
+              <a:ext cx="1916114" cy="381381"/>
             </a:xfrm>
             <a:prstGeom prst="rect">
               <a:avLst/>
@@ -3856,7 +4138,7 @@
           <p:spPr>
             <a:xfrm>
               <a:off x="6324981" y="2270125"/>
-              <a:ext cx="3265322" cy="352044"/>
+              <a:ext cx="3663950" cy="352044"/>
             </a:xfrm>
             <a:prstGeom prst="rect">
               <a:avLst/>
@@ -3896,7 +4178,7 @@
           <p:spPr>
             <a:xfrm>
               <a:off x="6324981" y="2860675"/>
-              <a:ext cx="1714500" cy="352044"/>
+              <a:ext cx="1922464" cy="352044"/>
             </a:xfrm>
             <a:prstGeom prst="rect">
               <a:avLst/>
@@ -3936,7 +4218,7 @@
           <p:spPr>
             <a:xfrm>
               <a:off x="6324981" y="3451225"/>
-              <a:ext cx="2877617" cy="352044"/>
+              <a:ext cx="3186114" cy="352044"/>
             </a:xfrm>
             <a:prstGeom prst="rect">
               <a:avLst/>
@@ -3976,7 +4258,7 @@
           <p:spPr>
             <a:xfrm>
               <a:off x="6324981" y="4041775"/>
-              <a:ext cx="2562606" cy="352044"/>
+              <a:ext cx="2662239" cy="352044"/>
             </a:xfrm>
             <a:prstGeom prst="rect">
               <a:avLst/>
@@ -4151,7 +4433,7 @@
           <p:spPr>
             <a:xfrm>
               <a:off x="10614279" y="6315075"/>
-              <a:ext cx="553364" cy="234696"/>
+              <a:ext cx="704851" cy="234696"/>
             </a:xfrm>
             <a:prstGeom prst="rect">
               <a:avLst/>
@@ -4242,7 +4524,7 @@
           <p:spPr>
             <a:xfrm>
               <a:off x="603504" y="523875"/>
-              <a:ext cx="1472855" cy="234696"/>
+              <a:ext cx="1630364" cy="234696"/>
             </a:xfrm>
             <a:prstGeom prst="rect">
               <a:avLst/>
@@ -4316,28 +4598,392 @@
       </p:grpSp>
       <p:grpSp>
         <p:nvGrpSpPr>
-          <p:cNvPr id="17" name="content"/>
+          <p:cNvPr id="24" name="content"/>
           <p:cNvGrpSpPr/>
           <p:nvPr/>
         </p:nvGrpSpPr>
         <p:grpSpPr>
           <a:xfrm>
-            <a:off x="598170" y="1952625"/>
-            <a:ext cx="10698480" cy="1635951"/>
-            <a:chOff x="598170" y="1952625"/>
-            <a:chExt cx="10698480" cy="1635951"/>
+            <a:off x="601218" y="1885950"/>
+            <a:ext cx="10962132" cy="4072382"/>
+            <a:chOff x="601218" y="1885950"/>
+            <a:chExt cx="10962132" cy="4072382"/>
           </a:xfrm>
         </p:grpSpPr>
         <p:sp>
           <p:nvSpPr>
-            <p:cNvPr id="5" name="Rectangle 5"/>
+            <p:cNvPr id="5" name="TextBox 5"/>
+            <p:cNvSpPr txBox="1"/>
+            <p:nvPr/>
+          </p:nvSpPr>
+          <p:spPr>
+            <a:xfrm>
+              <a:off x="601599" y="1885950"/>
+              <a:ext cx="6396990" cy="308991"/>
+            </a:xfrm>
+            <a:prstGeom prst="rect">
+              <a:avLst/>
+            </a:prstGeom>
+            <a:noFill/>
+            <a:ln>
+              <a:noFill/>
+            </a:ln>
+          </p:spPr>
+          <p:txBody>
+            <a:bodyPr wrap="none" lIns="0" tIns="0" rIns="0" bIns="0" anchor="t" anchorCtr="0">
+              <a:spAutoFit/>
+            </a:bodyPr>
+            <a:lstStyle/>
+            <a:p>
+              <a:pPr algn="l"/>
+              <a:r>
+                <a:rPr lang="ja-JP" sz="1580" dirty="0">
+                  <a:solidFill>
+                    <a:srgbClr val="53675E"/>
+                  </a:solidFill>
+                  <a:latin typeface="+mn-lt"/>
+                  <a:ea typeface="+mn-ea"/>
+                  <a:cs typeface="+mn-cs"/>
+                </a:rPr>
+                <a:t>運営体制の提案。仕込みの量・移送時間・繁忙時の負荷は未確認。</a:t>
+              </a:r>
+            </a:p>
+          </p:txBody>
+        </p:sp>
+        <p:sp>
+          <p:nvSpPr>
+            <p:cNvPr id="6" name="Rectangle 6"/>
             <p:cNvSpPr/>
             <p:nvPr/>
           </p:nvSpPr>
           <p:spPr>
             <a:xfrm>
-              <a:off x="609600" y="1952625"/>
-              <a:ext cx="3257550" cy="28575"/>
+              <a:off x="609600" y="2419350"/>
+              <a:ext cx="4095750" cy="1581150"/>
+            </a:xfrm>
+            <a:prstGeom prst="rect">
+              <a:avLst/>
+            </a:prstGeom>
+            <a:solidFill>
+              <a:srgbClr val="E5EEE7"/>
+            </a:solidFill>
+            <a:ln>
+              <a:noFill/>
+            </a:ln>
+          </p:spPr>
+        </p:sp>
+        <p:sp>
+          <p:nvSpPr>
+            <p:cNvPr id="7" name="TextBox 7"/>
+            <p:cNvSpPr txBox="1"/>
+            <p:nvPr/>
+          </p:nvSpPr>
+          <p:spPr>
+            <a:xfrm>
+              <a:off x="826770" y="2520950"/>
+              <a:ext cx="1887179" cy="440055"/>
+            </a:xfrm>
+            <a:prstGeom prst="rect">
+              <a:avLst/>
+            </a:prstGeom>
+            <a:noFill/>
+            <a:ln>
+              <a:noFill/>
+            </a:ln>
+          </p:spPr>
+          <p:txBody>
+            <a:bodyPr wrap="none" lIns="0" tIns="0" rIns="0" bIns="0" anchor="t" anchorCtr="0">
+              <a:spAutoFit/>
+            </a:bodyPr>
+            <a:lstStyle/>
+            <a:p>
+              <a:pPr algn="l"/>
+              <a:r>
+                <a:rPr lang="ja-JP" sz="2250" b="1" dirty="0">
+                  <a:solidFill>
+                    <a:srgbClr val="21654C"/>
+                  </a:solidFill>
+                  <a:latin typeface="+mn-lt"/>
+                  <a:ea typeface="+mn-ea"/>
+                  <a:cs typeface="+mn-cs"/>
+                </a:rPr>
+                <a:t>既存店：24席</a:t>
+              </a:r>
+            </a:p>
+          </p:txBody>
+        </p:sp>
+        <p:sp>
+          <p:nvSpPr>
+            <p:cNvPr id="8" name="TextBox 8"/>
+            <p:cNvSpPr txBox="1"/>
+            <p:nvPr/>
+          </p:nvSpPr>
+          <p:spPr>
+            <a:xfrm>
+              <a:off x="829056" y="3003550"/>
+              <a:ext cx="2441448" cy="352044"/>
+            </a:xfrm>
+            <a:prstGeom prst="rect">
+              <a:avLst/>
+            </a:prstGeom>
+            <a:noFill/>
+            <a:ln>
+              <a:noFill/>
+            </a:ln>
+          </p:spPr>
+          <p:txBody>
+            <a:bodyPr wrap="none" lIns="0" tIns="0" rIns="0" bIns="0" anchor="t" anchorCtr="0">
+              <a:spAutoFit/>
+            </a:bodyPr>
+            <a:lstStyle/>
+            <a:p>
+              <a:pPr algn="l"/>
+              <a:r>
+                <a:rPr lang="ja-JP" sz="1800" dirty="0">
+                  <a:solidFill>
+                    <a:srgbClr val="202C29"/>
+                  </a:solidFill>
+                  <a:latin typeface="+mn-lt"/>
+                  <a:ea typeface="+mn-ea"/>
+                  <a:cs typeface="+mn-cs"/>
+                </a:rPr>
+                <a:t>日常使いの営業を維持</a:t>
+              </a:r>
+            </a:p>
+          </p:txBody>
+        </p:sp>
+        <p:sp>
+          <p:nvSpPr>
+            <p:cNvPr id="9" name="TextBox 9"/>
+            <p:cNvSpPr txBox="1"/>
+            <p:nvPr/>
+          </p:nvSpPr>
+          <p:spPr>
+            <a:xfrm>
+              <a:off x="829056" y="3413125"/>
+              <a:ext cx="2441448" cy="352044"/>
+            </a:xfrm>
+            <a:prstGeom prst="rect">
+              <a:avLst/>
+            </a:prstGeom>
+            <a:noFill/>
+            <a:ln>
+              <a:noFill/>
+            </a:ln>
+          </p:spPr>
+          <p:txBody>
+            <a:bodyPr wrap="none" lIns="0" tIns="0" rIns="0" bIns="0" anchor="t" anchorCtr="0">
+              <a:spAutoFit/>
+            </a:bodyPr>
+            <a:lstStyle/>
+            <a:p>
+              <a:pPr algn="l"/>
+              <a:r>
+                <a:rPr lang="ja-JP" sz="1800" dirty="0">
+                  <a:solidFill>
+                    <a:srgbClr val="202C29"/>
+                  </a:solidFill>
+                  <a:latin typeface="+mn-lt"/>
+                  <a:ea typeface="+mn-ea"/>
+                  <a:cs typeface="+mn-cs"/>
+                </a:rPr>
+                <a:t>仕込みの一部を支える</a:t>
+              </a:r>
+            </a:p>
+          </p:txBody>
+        </p:sp>
+        <p:sp>
+          <p:nvSpPr>
+            <p:cNvPr id="10" name="Rectangle 10"/>
+            <p:cNvSpPr/>
+            <p:nvPr/>
+          </p:nvSpPr>
+          <p:spPr>
+            <a:xfrm>
+              <a:off x="7467600" y="2419350"/>
+              <a:ext cx="4095750" cy="1581150"/>
+            </a:xfrm>
+            <a:prstGeom prst="rect">
+              <a:avLst/>
+            </a:prstGeom>
+            <a:solidFill>
+              <a:srgbClr val="E5EEE7"/>
+            </a:solidFill>
+            <a:ln>
+              <a:noFill/>
+            </a:ln>
+          </p:spPr>
+        </p:sp>
+        <p:sp>
+          <p:nvSpPr>
+            <p:cNvPr id="11" name="TextBox 11"/>
+            <p:cNvSpPr txBox="1"/>
+            <p:nvPr/>
+          </p:nvSpPr>
+          <p:spPr>
+            <a:xfrm>
+              <a:off x="7684770" y="2520950"/>
+              <a:ext cx="1584284" cy="440055"/>
+            </a:xfrm>
+            <a:prstGeom prst="rect">
+              <a:avLst/>
+            </a:prstGeom>
+            <a:noFill/>
+            <a:ln>
+              <a:noFill/>
+            </a:ln>
+          </p:spPr>
+          <p:txBody>
+            <a:bodyPr wrap="none" lIns="0" tIns="0" rIns="0" bIns="0" anchor="t" anchorCtr="0">
+              <a:spAutoFit/>
+            </a:bodyPr>
+            <a:lstStyle/>
+            <a:p>
+              <a:pPr algn="l"/>
+              <a:r>
+                <a:rPr lang="ja-JP" sz="2250" b="1" dirty="0">
+                  <a:solidFill>
+                    <a:srgbClr val="21654C"/>
+                  </a:solidFill>
+                  <a:latin typeface="+mn-lt"/>
+                  <a:ea typeface="+mn-ea"/>
+                  <a:cs typeface="+mn-cs"/>
+                </a:rPr>
+                <a:t>新店：32席</a:t>
+              </a:r>
+            </a:p>
+          </p:txBody>
+        </p:sp>
+        <p:sp>
+          <p:nvSpPr>
+            <p:cNvPr id="12" name="TextBox 12"/>
+            <p:cNvSpPr txBox="1"/>
+            <p:nvPr/>
+          </p:nvSpPr>
+          <p:spPr>
+            <a:xfrm>
+              <a:off x="7687056" y="3003550"/>
+              <a:ext cx="2683764" cy="352044"/>
+            </a:xfrm>
+            <a:prstGeom prst="rect">
+              <a:avLst/>
+            </a:prstGeom>
+            <a:noFill/>
+            <a:ln>
+              <a:noFill/>
+            </a:ln>
+          </p:spPr>
+          <p:txBody>
+            <a:bodyPr wrap="none" lIns="0" tIns="0" rIns="0" bIns="0" anchor="t" anchorCtr="0">
+              <a:spAutoFit/>
+            </a:bodyPr>
+            <a:lstStyle/>
+            <a:p>
+              <a:pPr algn="l"/>
+              <a:r>
+                <a:rPr lang="ja-JP" sz="1800" dirty="0">
+                  <a:solidFill>
+                    <a:srgbClr val="202C29"/>
+                  </a:solidFill>
+                  <a:latin typeface="+mn-lt"/>
+                  <a:ea typeface="+mn-ea"/>
+                  <a:cs typeface="+mn-cs"/>
+                </a:rPr>
+                <a:t>落ち着いて滞在する店舗</a:t>
+              </a:r>
+            </a:p>
+          </p:txBody>
+        </p:sp>
+        <p:sp>
+          <p:nvSpPr>
+            <p:cNvPr id="13" name="TextBox 13"/>
+            <p:cNvSpPr txBox="1"/>
+            <p:nvPr/>
+          </p:nvSpPr>
+          <p:spPr>
+            <a:xfrm>
+              <a:off x="7687056" y="3413125"/>
+              <a:ext cx="2441448" cy="352044"/>
+            </a:xfrm>
+            <a:prstGeom prst="rect">
+              <a:avLst/>
+            </a:prstGeom>
+            <a:noFill/>
+            <a:ln>
+              <a:noFill/>
+            </a:ln>
+          </p:spPr>
+          <p:txBody>
+            <a:bodyPr wrap="none" lIns="0" tIns="0" rIns="0" bIns="0" anchor="t" anchorCtr="0">
+              <a:spAutoFit/>
+            </a:bodyPr>
+            <a:lstStyle/>
+            <a:p>
+              <a:pPr algn="l"/>
+              <a:r>
+                <a:rPr lang="ja-JP" sz="1800" dirty="0">
+                  <a:solidFill>
+                    <a:srgbClr val="202C29"/>
+                  </a:solidFill>
+                  <a:latin typeface="+mn-lt"/>
+                  <a:ea typeface="+mn-ea"/>
+                  <a:cs typeface="+mn-cs"/>
+                </a:rPr>
+                <a:t>店長候補の配置を先行</a:t>
+              </a:r>
+            </a:p>
+          </p:txBody>
+        </p:sp>
+        <p:sp>
+          <p:nvSpPr>
+            <p:cNvPr id="14" name="TextBox 14"/>
+            <p:cNvSpPr txBox="1"/>
+            <p:nvPr/>
+          </p:nvSpPr>
+          <p:spPr>
+            <a:xfrm>
+              <a:off x="5135118" y="2673350"/>
+              <a:ext cx="1349502" cy="322707"/>
+            </a:xfrm>
+            <a:prstGeom prst="rect">
+              <a:avLst/>
+            </a:prstGeom>
+            <a:noFill/>
+            <a:ln>
+              <a:noFill/>
+            </a:ln>
+          </p:spPr>
+          <p:txBody>
+            <a:bodyPr wrap="none" lIns="0" tIns="0" rIns="0" bIns="0" anchor="t" anchorCtr="0">
+              <a:spAutoFit/>
+            </a:bodyPr>
+            <a:lstStyle/>
+            <a:p>
+              <a:pPr algn="l"/>
+              <a:r>
+                <a:rPr lang="ja-JP" sz="1650" b="1" dirty="0">
+                  <a:solidFill>
+                    <a:srgbClr val="21654C"/>
+                  </a:solidFill>
+                  <a:latin typeface="+mn-lt"/>
+                  <a:ea typeface="+mn-ea"/>
+                  <a:cs typeface="+mn-cs"/>
+                </a:rPr>
+                <a:t>一部の仕込み</a:t>
+              </a:r>
+            </a:p>
+          </p:txBody>
+        </p:sp>
+        <p:sp>
+          <p:nvSpPr>
+            <p:cNvPr id="15" name="Rectangle 15"/>
+            <p:cNvSpPr/>
+            <p:nvPr/>
+          </p:nvSpPr>
+          <p:spPr>
+            <a:xfrm>
+              <a:off x="4914900" y="3171825"/>
+              <a:ext cx="2276475" cy="28575"/>
             </a:xfrm>
             <a:prstGeom prst="rect">
               <a:avLst/>
@@ -4352,32 +4998,32 @@
         </p:sp>
         <p:sp>
           <p:nvSpPr>
-            <p:cNvPr id="6" name="TextBox 6"/>
-            <p:cNvSpPr txBox="1"/>
-            <p:nvPr/>
-          </p:nvSpPr>
-          <p:spPr>
-            <a:xfrm>
-              <a:off x="598170" y="2178050"/>
-              <a:ext cx="628650" cy="440055"/>
-            </a:xfrm>
-            <a:prstGeom prst="rect">
-              <a:avLst/>
-            </a:prstGeom>
-            <a:noFill/>
-            <a:ln>
-              <a:noFill/>
-            </a:ln>
-          </p:spPr>
-          <p:txBody>
-            <a:bodyPr wrap="none" lIns="0" tIns="0" rIns="0" bIns="0" anchor="t" anchorCtr="0">
-              <a:spAutoFit/>
-            </a:bodyPr>
-            <a:lstStyle/>
-            <a:p>
-              <a:pPr algn="l"/>
-              <a:r>
-                <a:rPr lang="ja-JP" sz="2250" b="1" dirty="0">
+            <p:cNvPr id="16" name="TextBox 16"/>
+            <p:cNvSpPr txBox="1"/>
+            <p:nvPr/>
+          </p:nvSpPr>
+          <p:spPr>
+            <a:xfrm>
+              <a:off x="7016496" y="3000375"/>
+              <a:ext cx="444500" cy="498729"/>
+            </a:xfrm>
+            <a:prstGeom prst="rect">
+              <a:avLst/>
+            </a:prstGeom>
+            <a:noFill/>
+            <a:ln>
+              <a:noFill/>
+            </a:ln>
+          </p:spPr>
+          <p:txBody>
+            <a:bodyPr wrap="none" lIns="0" tIns="0" rIns="0" bIns="0" anchor="t" anchorCtr="0">
+              <a:spAutoFit/>
+            </a:bodyPr>
+            <a:lstStyle/>
+            <a:p>
+              <a:pPr algn="l"/>
+              <a:r>
+                <a:rPr lang="ja-JP" sz="2550" b="1" dirty="0">
                   <a:solidFill>
                     <a:srgbClr val="21654C"/>
                   </a:solidFill>
@@ -4385,101 +5031,61 @@
                   <a:ea typeface="+mn-ea"/>
                   <a:cs typeface="+mn-cs"/>
                 </a:rPr>
-                <a:t>新店</a:t>
-              </a:r>
-            </a:p>
-          </p:txBody>
-        </p:sp>
-        <p:sp>
-          <p:nvSpPr>
-            <p:cNvPr id="7" name="TextBox 7"/>
-            <p:cNvSpPr txBox="1"/>
-            <p:nvPr/>
-          </p:nvSpPr>
-          <p:spPr>
-            <a:xfrm>
-              <a:off x="600837" y="2822575"/>
-              <a:ext cx="2124598" cy="337376"/>
-            </a:xfrm>
-            <a:prstGeom prst="rect">
-              <a:avLst/>
-            </a:prstGeom>
-            <a:noFill/>
-            <a:ln>
-              <a:noFill/>
-            </a:ln>
-          </p:spPr>
-          <p:txBody>
-            <a:bodyPr wrap="none" lIns="0" tIns="0" rIns="0" bIns="0" anchor="t" anchorCtr="0">
-              <a:spAutoFit/>
-            </a:bodyPr>
-            <a:lstStyle/>
-            <a:p>
-              <a:pPr algn="l"/>
-              <a:r>
-                <a:rPr lang="ja-JP" sz="1720" dirty="0">
-                  <a:solidFill>
-                    <a:srgbClr val="202C29"/>
-                  </a:solidFill>
-                  <a:latin typeface="+mn-lt"/>
-                  <a:ea typeface="+mn-ea"/>
-                  <a:cs typeface="+mn-cs"/>
-                </a:rPr>
-                <a:t>32席の滞在型店舗。</a:t>
-              </a:r>
-            </a:p>
-          </p:txBody>
-        </p:sp>
-        <p:sp>
-          <p:nvSpPr>
-            <p:cNvPr id="8" name="TextBox 8"/>
-            <p:cNvSpPr txBox="1"/>
-            <p:nvPr/>
-          </p:nvSpPr>
-          <p:spPr>
-            <a:xfrm>
-              <a:off x="600837" y="3251200"/>
-              <a:ext cx="2564536" cy="337376"/>
-            </a:xfrm>
-            <a:prstGeom prst="rect">
-              <a:avLst/>
-            </a:prstGeom>
-            <a:noFill/>
-            <a:ln>
-              <a:noFill/>
-            </a:ln>
-          </p:spPr>
-          <p:txBody>
-            <a:bodyPr wrap="none" lIns="0" tIns="0" rIns="0" bIns="0" anchor="t" anchorCtr="0">
-              <a:spAutoFit/>
-            </a:bodyPr>
-            <a:lstStyle/>
-            <a:p>
-              <a:pPr algn="l"/>
-              <a:r>
-                <a:rPr lang="ja-JP" sz="1720" dirty="0">
-                  <a:solidFill>
-                    <a:srgbClr val="202C29"/>
-                  </a:solidFill>
-                  <a:latin typeface="+mn-lt"/>
-                  <a:ea typeface="+mn-ea"/>
-                  <a:cs typeface="+mn-cs"/>
-                </a:rPr>
-                <a:t>店長候補の配置を先行。</a:t>
-              </a:r>
-            </a:p>
-          </p:txBody>
-        </p:sp>
-        <p:sp>
-          <p:nvSpPr>
-            <p:cNvPr id="9" name="Rectangle 9"/>
+                <a:t>→</a:t>
+              </a:r>
+            </a:p>
+          </p:txBody>
+        </p:sp>
+        <p:sp>
+          <p:nvSpPr>
+            <p:cNvPr id="17" name="TextBox 17"/>
+            <p:cNvSpPr txBox="1"/>
+            <p:nvPr/>
+          </p:nvSpPr>
+          <p:spPr>
+            <a:xfrm>
+              <a:off x="4964811" y="3536950"/>
+              <a:ext cx="1926082" cy="278702"/>
+            </a:xfrm>
+            <a:prstGeom prst="rect">
+              <a:avLst/>
+            </a:prstGeom>
+            <a:noFill/>
+            <a:ln>
+              <a:noFill/>
+            </a:ln>
+          </p:spPr>
+          <p:txBody>
+            <a:bodyPr wrap="none" lIns="0" tIns="0" rIns="0" bIns="0" anchor="t" anchorCtr="0">
+              <a:spAutoFit/>
+            </a:bodyPr>
+            <a:lstStyle/>
+            <a:p>
+              <a:pPr algn="l"/>
+              <a:r>
+                <a:rPr lang="ja-JP" sz="1420" dirty="0">
+                  <a:solidFill>
+                    <a:srgbClr val="53675E"/>
+                  </a:solidFill>
+                  <a:latin typeface="+mn-lt"/>
+                  <a:ea typeface="+mn-ea"/>
+                  <a:cs typeface="+mn-cs"/>
+                </a:rPr>
+                <a:t>支援できる量を調べる</a:t>
+              </a:r>
+            </a:p>
+          </p:txBody>
+        </p:sp>
+        <p:sp>
+          <p:nvSpPr>
+            <p:cNvPr id="18" name="Rectangle 18"/>
             <p:cNvSpPr/>
             <p:nvPr/>
           </p:nvSpPr>
           <p:spPr>
             <a:xfrm>
-              <a:off x="4324350" y="1952625"/>
-              <a:ext cx="3257550" cy="28575"/>
+              <a:off x="2638425" y="4000500"/>
+              <a:ext cx="28575" cy="438150"/>
             </a:xfrm>
             <a:prstGeom prst="rect">
               <a:avLst/>
@@ -4494,134 +5100,14 @@
         </p:sp>
         <p:sp>
           <p:nvSpPr>
-            <p:cNvPr id="10" name="TextBox 10"/>
-            <p:cNvSpPr txBox="1"/>
-            <p:nvPr/>
-          </p:nvSpPr>
-          <p:spPr>
-            <a:xfrm>
-              <a:off x="4312920" y="2178050"/>
-              <a:ext cx="931545" cy="440055"/>
-            </a:xfrm>
-            <a:prstGeom prst="rect">
-              <a:avLst/>
-            </a:prstGeom>
-            <a:noFill/>
-            <a:ln>
-              <a:noFill/>
-            </a:ln>
-          </p:spPr>
-          <p:txBody>
-            <a:bodyPr wrap="none" lIns="0" tIns="0" rIns="0" bIns="0" anchor="t" anchorCtr="0">
-              <a:spAutoFit/>
-            </a:bodyPr>
-            <a:lstStyle/>
-            <a:p>
-              <a:pPr algn="l"/>
-              <a:r>
-                <a:rPr lang="ja-JP" sz="2250" b="1" dirty="0">
-                  <a:solidFill>
-                    <a:srgbClr val="21654C"/>
-                  </a:solidFill>
-                  <a:latin typeface="+mn-lt"/>
-                  <a:ea typeface="+mn-ea"/>
-                  <a:cs typeface="+mn-cs"/>
-                </a:rPr>
-                <a:t>既存店</a:t>
-              </a:r>
-            </a:p>
-          </p:txBody>
-        </p:sp>
-        <p:sp>
-          <p:nvSpPr>
-            <p:cNvPr id="11" name="TextBox 11"/>
-            <p:cNvSpPr txBox="1"/>
-            <p:nvPr/>
-          </p:nvSpPr>
-          <p:spPr>
-            <a:xfrm>
-              <a:off x="4315587" y="2822575"/>
-              <a:ext cx="2564536" cy="337376"/>
-            </a:xfrm>
-            <a:prstGeom prst="rect">
-              <a:avLst/>
-            </a:prstGeom>
-            <a:noFill/>
-            <a:ln>
-              <a:noFill/>
-            </a:ln>
-          </p:spPr>
-          <p:txBody>
-            <a:bodyPr wrap="none" lIns="0" tIns="0" rIns="0" bIns="0" anchor="t" anchorCtr="0">
-              <a:spAutoFit/>
-            </a:bodyPr>
-            <a:lstStyle/>
-            <a:p>
-              <a:pPr algn="l"/>
-              <a:r>
-                <a:rPr lang="ja-JP" sz="1720" dirty="0">
-                  <a:solidFill>
-                    <a:srgbClr val="202C29"/>
-                  </a:solidFill>
-                  <a:latin typeface="+mn-lt"/>
-                  <a:ea typeface="+mn-ea"/>
-                  <a:cs typeface="+mn-cs"/>
-                </a:rPr>
-                <a:t>仕込みの一部を支える。</a:t>
-              </a:r>
-            </a:p>
-          </p:txBody>
-        </p:sp>
-        <p:sp>
-          <p:nvSpPr>
-            <p:cNvPr id="12" name="TextBox 12"/>
-            <p:cNvSpPr txBox="1"/>
-            <p:nvPr/>
-          </p:nvSpPr>
-          <p:spPr>
-            <a:xfrm>
-              <a:off x="4315587" y="3251200"/>
-              <a:ext cx="2564536" cy="337376"/>
-            </a:xfrm>
-            <a:prstGeom prst="rect">
-              <a:avLst/>
-            </a:prstGeom>
-            <a:noFill/>
-            <a:ln>
-              <a:noFill/>
-            </a:ln>
-          </p:spPr>
-          <p:txBody>
-            <a:bodyPr wrap="none" lIns="0" tIns="0" rIns="0" bIns="0" anchor="t" anchorCtr="0">
-              <a:spAutoFit/>
-            </a:bodyPr>
-            <a:lstStyle/>
-            <a:p>
-              <a:pPr algn="l"/>
-              <a:r>
-                <a:rPr lang="ja-JP" sz="1720" dirty="0">
-                  <a:solidFill>
-                    <a:srgbClr val="202C29"/>
-                  </a:solidFill>
-                  <a:latin typeface="+mn-lt"/>
-                  <a:ea typeface="+mn-ea"/>
-                  <a:cs typeface="+mn-cs"/>
-                </a:rPr>
-                <a:t>繁忙時間の負荷を確認。</a:t>
-              </a:r>
-            </a:p>
-          </p:txBody>
-        </p:sp>
-        <p:sp>
-          <p:nvSpPr>
-            <p:cNvPr id="13" name="Rectangle 13"/>
+            <p:cNvPr id="19" name="Rectangle 19"/>
             <p:cNvSpPr/>
             <p:nvPr/>
           </p:nvSpPr>
           <p:spPr>
             <a:xfrm>
-              <a:off x="8039100" y="1952625"/>
-              <a:ext cx="3257550" cy="28575"/>
+              <a:off x="9496425" y="4000500"/>
+              <a:ext cx="28575" cy="438150"/>
             </a:xfrm>
             <a:prstGeom prst="rect">
               <a:avLst/>
@@ -4636,120 +5122,142 @@
         </p:sp>
         <p:sp>
           <p:nvSpPr>
-            <p:cNvPr id="14" name="TextBox 14"/>
-            <p:cNvSpPr txBox="1"/>
-            <p:nvPr/>
-          </p:nvSpPr>
-          <p:spPr>
-            <a:xfrm>
-              <a:off x="8027670" y="2178050"/>
-              <a:ext cx="931545" cy="440055"/>
-            </a:xfrm>
-            <a:prstGeom prst="rect">
-              <a:avLst/>
-            </a:prstGeom>
-            <a:noFill/>
-            <a:ln>
-              <a:noFill/>
-            </a:ln>
-          </p:spPr>
-          <p:txBody>
-            <a:bodyPr wrap="none" lIns="0" tIns="0" rIns="0" bIns="0" anchor="t" anchorCtr="0">
-              <a:spAutoFit/>
-            </a:bodyPr>
-            <a:lstStyle/>
-            <a:p>
-              <a:pPr algn="l"/>
-              <a:r>
-                <a:rPr lang="ja-JP" sz="2250" b="1" dirty="0">
-                  <a:solidFill>
-                    <a:srgbClr val="21654C"/>
-                  </a:solidFill>
-                  <a:latin typeface="+mn-lt"/>
-                  <a:ea typeface="+mn-ea"/>
-                  <a:cs typeface="+mn-cs"/>
-                </a:rPr>
-                <a:t>共通化</a:t>
-              </a:r>
-            </a:p>
-          </p:txBody>
-        </p:sp>
-        <p:sp>
-          <p:nvSpPr>
-            <p:cNvPr id="15" name="TextBox 15"/>
-            <p:cNvSpPr txBox="1"/>
-            <p:nvPr/>
-          </p:nvSpPr>
-          <p:spPr>
-            <a:xfrm>
-              <a:off x="8030337" y="2822575"/>
-              <a:ext cx="2564536" cy="337376"/>
-            </a:xfrm>
-            <a:prstGeom prst="rect">
-              <a:avLst/>
-            </a:prstGeom>
-            <a:noFill/>
-            <a:ln>
-              <a:noFill/>
-            </a:ln>
-          </p:spPr>
-          <p:txBody>
-            <a:bodyPr wrap="none" lIns="0" tIns="0" rIns="0" bIns="0" anchor="t" anchorCtr="0">
-              <a:spAutoFit/>
-            </a:bodyPr>
-            <a:lstStyle/>
-            <a:p>
-              <a:pPr algn="l"/>
-              <a:r>
-                <a:rPr lang="ja-JP" sz="1720" dirty="0">
-                  <a:solidFill>
-                    <a:srgbClr val="202C29"/>
-                  </a:solidFill>
-                  <a:latin typeface="+mn-lt"/>
-                  <a:ea typeface="+mn-ea"/>
-                  <a:cs typeface="+mn-cs"/>
-                </a:rPr>
-                <a:t>材料の購買をまとめる。</a:t>
-              </a:r>
-            </a:p>
-          </p:txBody>
-        </p:sp>
-        <p:sp>
-          <p:nvSpPr>
-            <p:cNvPr id="16" name="TextBox 16"/>
-            <p:cNvSpPr txBox="1"/>
-            <p:nvPr/>
-          </p:nvSpPr>
-          <p:spPr>
-            <a:xfrm>
-              <a:off x="8030337" y="3251200"/>
-              <a:ext cx="2796083" cy="337376"/>
-            </a:xfrm>
-            <a:prstGeom prst="rect">
-              <a:avLst/>
-            </a:prstGeom>
-            <a:noFill/>
-            <a:ln>
-              <a:noFill/>
-            </a:ln>
-          </p:spPr>
-          <p:txBody>
-            <a:bodyPr wrap="none" lIns="0" tIns="0" rIns="0" bIns="0" anchor="t" anchorCtr="0">
-              <a:spAutoFit/>
-            </a:bodyPr>
-            <a:lstStyle/>
-            <a:p>
-              <a:pPr algn="l"/>
-              <a:r>
-                <a:rPr lang="ja-JP" sz="1720" dirty="0">
-                  <a:solidFill>
-                    <a:srgbClr val="202C29"/>
-                  </a:solidFill>
-                  <a:latin typeface="+mn-lt"/>
-                  <a:ea typeface="+mn-ea"/>
-                  <a:cs typeface="+mn-cs"/>
-                </a:rPr>
-                <a:t>品質基準と日報を揃える。</a:t>
+            <p:cNvPr id="20" name="Rectangle 20"/>
+            <p:cNvSpPr/>
+            <p:nvPr/>
+          </p:nvSpPr>
+          <p:spPr>
+            <a:xfrm>
+              <a:off x="609600" y="4438650"/>
+              <a:ext cx="10953750" cy="1038225"/>
+            </a:xfrm>
+            <a:prstGeom prst="rect">
+              <a:avLst/>
+            </a:prstGeom>
+            <a:solidFill>
+              <a:srgbClr val="21654C"/>
+            </a:solidFill>
+            <a:ln>
+              <a:noFill/>
+            </a:ln>
+          </p:spPr>
+        </p:sp>
+        <p:sp>
+          <p:nvSpPr>
+            <p:cNvPr id="21" name="TextBox 21"/>
+            <p:cNvSpPr txBox="1"/>
+            <p:nvPr/>
+          </p:nvSpPr>
+          <p:spPr>
+            <a:xfrm>
+              <a:off x="827913" y="4549775"/>
+              <a:ext cx="2467966" cy="396050"/>
+            </a:xfrm>
+            <a:prstGeom prst="rect">
+              <a:avLst/>
+            </a:prstGeom>
+            <a:noFill/>
+            <a:ln>
+              <a:noFill/>
+            </a:ln>
+          </p:spPr>
+          <p:txBody>
+            <a:bodyPr wrap="none" lIns="0" tIns="0" rIns="0" bIns="0" anchor="t" anchorCtr="0">
+              <a:spAutoFit/>
+            </a:bodyPr>
+            <a:lstStyle/>
+            <a:p>
+              <a:pPr algn="l"/>
+              <a:r>
+                <a:rPr lang="ja-JP" sz="2020" b="1" dirty="0">
+                  <a:solidFill>
+                    <a:srgbClr val="FFFFFF"/>
+                  </a:solidFill>
+                  <a:latin typeface="+mn-lt"/>
+                  <a:ea typeface="+mn-ea"/>
+                  <a:cs typeface="+mn-cs"/>
+                </a:rPr>
+                <a:t>両店でそろえるもの</a:t>
+              </a:r>
+            </a:p>
+          </p:txBody>
+        </p:sp>
+        <p:sp>
+          <p:nvSpPr>
+            <p:cNvPr id="22" name="TextBox 22"/>
+            <p:cNvSpPr txBox="1"/>
+            <p:nvPr/>
+          </p:nvSpPr>
+          <p:spPr>
+            <a:xfrm>
+              <a:off x="828675" y="4972050"/>
+              <a:ext cx="4321505" cy="367665"/>
+            </a:xfrm>
+            <a:prstGeom prst="rect">
+              <a:avLst/>
+            </a:prstGeom>
+            <a:noFill/>
+            <a:ln>
+              <a:noFill/>
+            </a:ln>
+          </p:spPr>
+          <p:txBody>
+            <a:bodyPr wrap="none" lIns="0" tIns="0" rIns="0" bIns="0" anchor="t" anchorCtr="0">
+              <a:spAutoFit/>
+            </a:bodyPr>
+            <a:lstStyle/>
+            <a:p>
+              <a:pPr algn="l"/>
+              <a:r>
+                <a:rPr lang="ja-JP" sz="1880" dirty="0">
+                  <a:solidFill>
+                    <a:srgbClr val="FFFFFF"/>
+                  </a:solidFill>
+                  <a:latin typeface="+mn-lt"/>
+                  <a:ea typeface="+mn-ea"/>
+                  <a:cs typeface="+mn-cs"/>
+                </a:rPr>
+                <a:t>材料の購買　／　品質基準　／　日報</a:t>
+              </a:r>
+            </a:p>
+          </p:txBody>
+        </p:sp>
+        <p:sp>
+          <p:nvSpPr>
+            <p:cNvPr id="23" name="TextBox 23"/>
+            <p:cNvSpPr txBox="1"/>
+            <p:nvPr/>
+          </p:nvSpPr>
+          <p:spPr>
+            <a:xfrm>
+              <a:off x="601218" y="5635625"/>
+              <a:ext cx="6014085" cy="322707"/>
+            </a:xfrm>
+            <a:prstGeom prst="rect">
+              <a:avLst/>
+            </a:prstGeom>
+            <a:noFill/>
+            <a:ln>
+              <a:noFill/>
+            </a:ln>
+          </p:spPr>
+          <p:txBody>
+            <a:bodyPr wrap="none" lIns="0" tIns="0" rIns="0" bIns="0" anchor="t" anchorCtr="0">
+              <a:spAutoFit/>
+            </a:bodyPr>
+            <a:lstStyle/>
+            <a:p>
+              <a:pPr algn="l"/>
+              <a:r>
+                <a:rPr lang="ja-JP" sz="1650" dirty="0">
+                  <a:solidFill>
+                    <a:srgbClr val="53675E"/>
+                  </a:solidFill>
+                  <a:latin typeface="+mn-lt"/>
+                  <a:ea typeface="+mn-ea"/>
+                  <a:cs typeface="+mn-cs"/>
+                </a:rPr>
+                <a:t>共通化の前に、既存店の営業を圧迫しないことを確かめる。</a:t>
               </a:r>
             </a:p>
           </p:txBody>
@@ -4757,7 +5265,7 @@
       </p:grpSp>
       <p:grpSp>
         <p:nvGrpSpPr>
-          <p:cNvPr id="20" name="footer"/>
+          <p:cNvPr id="27" name="footer"/>
           <p:cNvGrpSpPr/>
           <p:nvPr/>
         </p:nvGrpSpPr>
@@ -4771,7 +5279,7 @@
         </p:grpSpPr>
         <p:sp>
           <p:nvSpPr>
-            <p:cNvPr id="18" name="TextBox 18"/>
+            <p:cNvPr id="25" name="TextBox 25"/>
             <p:cNvSpPr txBox="1"/>
             <p:nvPr/>
           </p:nvSpPr>
@@ -4811,14 +5319,14 @@
         </p:sp>
         <p:sp>
           <p:nvSpPr>
-            <p:cNvPr id="19" name="TextBox 19"/>
+            <p:cNvPr id="26" name="TextBox 26"/>
             <p:cNvSpPr txBox="1"/>
             <p:nvPr/>
           </p:nvSpPr>
           <p:spPr>
             <a:xfrm>
               <a:off x="10614279" y="6315075"/>
-              <a:ext cx="553364" cy="234696"/>
+              <a:ext cx="704851" cy="234696"/>
             </a:xfrm>
             <a:prstGeom prst="rect">
               <a:avLst/>
@@ -4909,7 +5417,7 @@
           <p:spPr>
             <a:xfrm>
               <a:off x="603504" y="523875"/>
-              <a:ext cx="1472855" cy="234696"/>
+              <a:ext cx="1630364" cy="234696"/>
             </a:xfrm>
             <a:prstGeom prst="rect">
               <a:avLst/>
@@ -4983,448 +5491,991 @@
       </p:grpSp>
       <p:grpSp>
         <p:nvGrpSpPr>
-          <p:cNvPr id="17" name="content"/>
+          <p:cNvPr id="33" name="content"/>
           <p:cNvGrpSpPr/>
           <p:nvPr/>
         </p:nvGrpSpPr>
         <p:grpSpPr>
           <a:xfrm>
-            <a:off x="598170" y="1952625"/>
-            <a:ext cx="10698480" cy="1635951"/>
-            <a:chOff x="598170" y="1952625"/>
-            <a:chExt cx="10698480" cy="1635951"/>
+            <a:off x="601218" y="1866900"/>
+            <a:ext cx="10962132" cy="4234307"/>
+            <a:chOff x="601218" y="1866900"/>
+            <a:chExt cx="10962132" cy="4234307"/>
           </a:xfrm>
         </p:grpSpPr>
-        <p:sp>
-          <p:nvSpPr>
-            <p:cNvPr id="5" name="Rectangle 5"/>
-            <p:cNvSpPr/>
-            <p:nvPr/>
-          </p:nvSpPr>
-          <p:spPr>
-            <a:xfrm>
-              <a:off x="609600" y="1952625"/>
-              <a:ext cx="3257550" cy="28575"/>
-            </a:xfrm>
-            <a:prstGeom prst="rect">
-              <a:avLst/>
-            </a:prstGeom>
-            <a:solidFill>
-              <a:srgbClr val="21654C"/>
-            </a:solidFill>
-            <a:ln>
-              <a:noFill/>
-            </a:ln>
-          </p:spPr>
-        </p:sp>
-        <p:sp>
-          <p:nvSpPr>
-            <p:cNvPr id="6" name="TextBox 6"/>
-            <p:cNvSpPr txBox="1"/>
-            <p:nvPr/>
-          </p:nvSpPr>
-          <p:spPr>
-            <a:xfrm>
-              <a:off x="598170" y="2178050"/>
-              <a:ext cx="628650" cy="440055"/>
-            </a:xfrm>
-            <a:prstGeom prst="rect">
-              <a:avLst/>
-            </a:prstGeom>
-            <a:noFill/>
-            <a:ln>
-              <a:noFill/>
-            </a:ln>
-          </p:spPr>
-          <p:txBody>
-            <a:bodyPr wrap="none" lIns="0" tIns="0" rIns="0" bIns="0" anchor="t" anchorCtr="0">
-              <a:spAutoFit/>
-            </a:bodyPr>
-            <a:lstStyle/>
-            <a:p>
-              <a:pPr algn="l"/>
-              <a:r>
-                <a:rPr lang="ja-JP" sz="2250" b="1" dirty="0">
-                  <a:solidFill>
-                    <a:srgbClr val="21654C"/>
-                  </a:solidFill>
-                  <a:latin typeface="+mn-lt"/>
-                  <a:ea typeface="+mn-ea"/>
-                  <a:cs typeface="+mn-cs"/>
-                </a:rPr>
-                <a:t>客数</a:t>
-              </a:r>
-            </a:p>
-          </p:txBody>
-        </p:sp>
-        <p:sp>
-          <p:nvSpPr>
-            <p:cNvPr id="7" name="TextBox 7"/>
-            <p:cNvSpPr txBox="1"/>
-            <p:nvPr/>
-          </p:nvSpPr>
-          <p:spPr>
-            <a:xfrm>
-              <a:off x="600837" y="2822575"/>
-              <a:ext cx="2228794" cy="337376"/>
-            </a:xfrm>
-            <a:prstGeom prst="rect">
-              <a:avLst/>
-            </a:prstGeom>
-            <a:noFill/>
-            <a:ln>
-              <a:noFill/>
-            </a:ln>
-          </p:spPr>
-          <p:txBody>
-            <a:bodyPr wrap="none" lIns="0" tIns="0" rIns="0" bIns="0" anchor="t" anchorCtr="0">
-              <a:spAutoFit/>
-            </a:bodyPr>
-            <a:lstStyle/>
-            <a:p>
-              <a:pPr algn="l"/>
-              <a:r>
-                <a:rPr lang="ja-JP" sz="1720" dirty="0">
-                  <a:solidFill>
-                    <a:srgbClr val="202C29"/>
-                  </a:solidFill>
-                  <a:latin typeface="+mn-lt"/>
-                  <a:ea typeface="+mn-ea"/>
-                  <a:cs typeface="+mn-cs"/>
-                </a:rPr>
-                <a:t>通行量を2週間調査。</a:t>
-              </a:r>
-            </a:p>
-          </p:txBody>
-        </p:sp>
-        <p:sp>
-          <p:nvSpPr>
-            <p:cNvPr id="8" name="TextBox 8"/>
-            <p:cNvSpPr txBox="1"/>
-            <p:nvPr/>
-          </p:nvSpPr>
-          <p:spPr>
-            <a:xfrm>
-              <a:off x="600837" y="3251200"/>
-              <a:ext cx="2564536" cy="337376"/>
-            </a:xfrm>
-            <a:prstGeom prst="rect">
-              <a:avLst/>
-            </a:prstGeom>
-            <a:noFill/>
-            <a:ln>
-              <a:noFill/>
-            </a:ln>
-          </p:spPr>
-          <p:txBody>
-            <a:bodyPr wrap="none" lIns="0" tIns="0" rIns="0" bIns="0" anchor="t" anchorCtr="0">
-              <a:spAutoFit/>
-            </a:bodyPr>
-            <a:lstStyle/>
-            <a:p>
-              <a:pPr algn="l"/>
-              <a:r>
-                <a:rPr lang="ja-JP" sz="1720" dirty="0">
-                  <a:solidFill>
-                    <a:srgbClr val="202C29"/>
-                  </a:solidFill>
-                  <a:latin typeface="+mn-lt"/>
-                  <a:ea typeface="+mn-ea"/>
-                  <a:cs typeface="+mn-cs"/>
-                </a:rPr>
-                <a:t>試験販売で単価を確認。</a:t>
-              </a:r>
-            </a:p>
-          </p:txBody>
-        </p:sp>
-        <p:sp>
-          <p:nvSpPr>
-            <p:cNvPr id="9" name="Rectangle 9"/>
-            <p:cNvSpPr/>
-            <p:nvPr/>
-          </p:nvSpPr>
-          <p:spPr>
-            <a:xfrm>
-              <a:off x="4324350" y="1952625"/>
-              <a:ext cx="3257550" cy="28575"/>
-            </a:xfrm>
-            <a:prstGeom prst="rect">
-              <a:avLst/>
-            </a:prstGeom>
-            <a:solidFill>
-              <a:srgbClr val="21654C"/>
-            </a:solidFill>
-            <a:ln>
-              <a:noFill/>
-            </a:ln>
-          </p:spPr>
-        </p:sp>
-        <p:sp>
-          <p:nvSpPr>
-            <p:cNvPr id="10" name="TextBox 10"/>
-            <p:cNvSpPr txBox="1"/>
-            <p:nvPr/>
-          </p:nvSpPr>
-          <p:spPr>
-            <a:xfrm>
-              <a:off x="4312920" y="2178050"/>
-              <a:ext cx="931545" cy="440055"/>
-            </a:xfrm>
-            <a:prstGeom prst="rect">
-              <a:avLst/>
-            </a:prstGeom>
-            <a:noFill/>
-            <a:ln>
-              <a:noFill/>
-            </a:ln>
-          </p:spPr>
-          <p:txBody>
-            <a:bodyPr wrap="none" lIns="0" tIns="0" rIns="0" bIns="0" anchor="t" anchorCtr="0">
-              <a:spAutoFit/>
-            </a:bodyPr>
-            <a:lstStyle/>
-            <a:p>
-              <a:pPr algn="l"/>
-              <a:r>
-                <a:rPr lang="ja-JP" sz="2250" b="1" dirty="0">
-                  <a:solidFill>
-                    <a:srgbClr val="21654C"/>
-                  </a:solidFill>
-                  <a:latin typeface="+mn-lt"/>
-                  <a:ea typeface="+mn-ea"/>
-                  <a:cs typeface="+mn-cs"/>
-                </a:rPr>
-                <a:t>工事額</a:t>
-              </a:r>
-            </a:p>
-          </p:txBody>
-        </p:sp>
-        <p:sp>
-          <p:nvSpPr>
-            <p:cNvPr id="11" name="TextBox 11"/>
-            <p:cNvSpPr txBox="1"/>
-            <p:nvPr/>
-          </p:nvSpPr>
-          <p:spPr>
-            <a:xfrm>
-              <a:off x="4315587" y="2822575"/>
-              <a:ext cx="2460341" cy="337376"/>
-            </a:xfrm>
-            <a:prstGeom prst="rect">
-              <a:avLst/>
-            </a:prstGeom>
-            <a:noFill/>
-            <a:ln>
-              <a:noFill/>
-            </a:ln>
-          </p:spPr>
-          <p:txBody>
-            <a:bodyPr wrap="none" lIns="0" tIns="0" rIns="0" bIns="0" anchor="t" anchorCtr="0">
-              <a:spAutoFit/>
-            </a:bodyPr>
-            <a:lstStyle/>
-            <a:p>
-              <a:pPr algn="l"/>
-              <a:r>
-                <a:rPr lang="ja-JP" sz="1720" dirty="0">
-                  <a:solidFill>
-                    <a:srgbClr val="202C29"/>
-                  </a:solidFill>
-                  <a:latin typeface="+mn-lt"/>
-                  <a:ea typeface="+mn-ea"/>
-                  <a:cs typeface="+mn-cs"/>
-                </a:rPr>
-                <a:t>3社へ同じ条件で見積。</a:t>
-              </a:r>
-            </a:p>
-          </p:txBody>
-        </p:sp>
-        <p:sp>
-          <p:nvSpPr>
-            <p:cNvPr id="12" name="TextBox 12"/>
-            <p:cNvSpPr txBox="1"/>
-            <p:nvPr/>
-          </p:nvSpPr>
-          <p:spPr>
-            <a:xfrm>
-              <a:off x="4315587" y="3251200"/>
-              <a:ext cx="2564536" cy="337376"/>
-            </a:xfrm>
-            <a:prstGeom prst="rect">
-              <a:avLst/>
-            </a:prstGeom>
-            <a:noFill/>
-            <a:ln>
-              <a:noFill/>
-            </a:ln>
-          </p:spPr>
-          <p:txBody>
-            <a:bodyPr wrap="none" lIns="0" tIns="0" rIns="0" bIns="0" anchor="t" anchorCtr="0">
-              <a:spAutoFit/>
-            </a:bodyPr>
-            <a:lstStyle/>
-            <a:p>
-              <a:pPr algn="l"/>
-              <a:r>
-                <a:rPr lang="ja-JP" sz="1720" dirty="0">
-                  <a:solidFill>
-                    <a:srgbClr val="202C29"/>
-                  </a:solidFill>
-                  <a:latin typeface="+mn-lt"/>
-                  <a:ea typeface="+mn-ea"/>
-                  <a:cs typeface="+mn-cs"/>
-                </a:rPr>
-                <a:t>予備費と上限を決める。</a:t>
-              </a:r>
-            </a:p>
-          </p:txBody>
-        </p:sp>
-        <p:sp>
-          <p:nvSpPr>
-            <p:cNvPr id="13" name="Rectangle 13"/>
-            <p:cNvSpPr/>
-            <p:nvPr/>
-          </p:nvSpPr>
-          <p:spPr>
-            <a:xfrm>
-              <a:off x="8039100" y="1952625"/>
-              <a:ext cx="3257550" cy="28575"/>
-            </a:xfrm>
-            <a:prstGeom prst="rect">
-              <a:avLst/>
-            </a:prstGeom>
-            <a:solidFill>
-              <a:srgbClr val="21654C"/>
-            </a:solidFill>
-            <a:ln>
-              <a:noFill/>
-            </a:ln>
-          </p:spPr>
-        </p:sp>
-        <p:sp>
-          <p:nvSpPr>
-            <p:cNvPr id="14" name="TextBox 14"/>
-            <p:cNvSpPr txBox="1"/>
-            <p:nvPr/>
-          </p:nvSpPr>
-          <p:spPr>
-            <a:xfrm>
-              <a:off x="8027670" y="2178050"/>
-              <a:ext cx="1234440" cy="440055"/>
-            </a:xfrm>
-            <a:prstGeom prst="rect">
-              <a:avLst/>
-            </a:prstGeom>
-            <a:noFill/>
-            <a:ln>
-              <a:noFill/>
-            </a:ln>
-          </p:spPr>
-          <p:txBody>
-            <a:bodyPr wrap="none" lIns="0" tIns="0" rIns="0" bIns="0" anchor="t" anchorCtr="0">
-              <a:spAutoFit/>
-            </a:bodyPr>
-            <a:lstStyle/>
-            <a:p>
-              <a:pPr algn="l"/>
-              <a:r>
-                <a:rPr lang="ja-JP" sz="2250" b="1" dirty="0">
-                  <a:solidFill>
-                    <a:srgbClr val="21654C"/>
-                  </a:solidFill>
-                  <a:latin typeface="+mn-lt"/>
-                  <a:ea typeface="+mn-ea"/>
-                  <a:cs typeface="+mn-cs"/>
-                </a:rPr>
-                <a:t>店長配置</a:t>
-              </a:r>
-            </a:p>
-          </p:txBody>
-        </p:sp>
-        <p:sp>
-          <p:nvSpPr>
-            <p:cNvPr id="15" name="TextBox 15"/>
-            <p:cNvSpPr txBox="1"/>
-            <p:nvPr/>
-          </p:nvSpPr>
-          <p:spPr>
-            <a:xfrm>
-              <a:off x="8030337" y="2822575"/>
-              <a:ext cx="2332990" cy="337376"/>
-            </a:xfrm>
-            <a:prstGeom prst="rect">
-              <a:avLst/>
-            </a:prstGeom>
-            <a:noFill/>
-            <a:ln>
-              <a:noFill/>
-            </a:ln>
-          </p:spPr>
-          <p:txBody>
-            <a:bodyPr wrap="none" lIns="0" tIns="0" rIns="0" bIns="0" anchor="t" anchorCtr="0">
-              <a:spAutoFit/>
-            </a:bodyPr>
-            <a:lstStyle/>
-            <a:p>
-              <a:pPr algn="l"/>
-              <a:r>
-                <a:rPr lang="ja-JP" sz="1720" dirty="0">
-                  <a:solidFill>
-                    <a:srgbClr val="202C29"/>
-                  </a:solidFill>
-                  <a:latin typeface="+mn-lt"/>
-                  <a:ea typeface="+mn-ea"/>
-                  <a:cs typeface="+mn-cs"/>
-                </a:rPr>
-                <a:t>候補者の意向を確認。</a:t>
-              </a:r>
-            </a:p>
-          </p:txBody>
-        </p:sp>
-        <p:sp>
-          <p:nvSpPr>
-            <p:cNvPr id="16" name="TextBox 16"/>
-            <p:cNvSpPr txBox="1"/>
-            <p:nvPr/>
-          </p:nvSpPr>
-          <p:spPr>
-            <a:xfrm>
-              <a:off x="8030337" y="3251200"/>
-              <a:ext cx="2796083" cy="337376"/>
-            </a:xfrm>
-            <a:prstGeom prst="rect">
-              <a:avLst/>
-            </a:prstGeom>
-            <a:noFill/>
-            <a:ln>
-              <a:noFill/>
-            </a:ln>
-          </p:spPr>
-          <p:txBody>
-            <a:bodyPr wrap="none" lIns="0" tIns="0" rIns="0" bIns="0" anchor="t" anchorCtr="0">
-              <a:spAutoFit/>
-            </a:bodyPr>
-            <a:lstStyle/>
-            <a:p>
-              <a:pPr algn="l"/>
-              <a:r>
-                <a:rPr lang="ja-JP" sz="1720" dirty="0">
-                  <a:solidFill>
-                    <a:srgbClr val="202C29"/>
-                  </a:solidFill>
-                  <a:latin typeface="+mn-lt"/>
-                  <a:ea typeface="+mn-ea"/>
-                  <a:cs typeface="+mn-cs"/>
-                </a:rPr>
-                <a:t>採用と育成の日程を確定。</a:t>
-              </a:r>
-            </a:p>
-          </p:txBody>
-        </p:sp>
+        <p:grpSp>
+          <p:nvGrpSpPr>
+            <p:cNvPr id="32" name="risk-confirmation"/>
+            <p:cNvGrpSpPr/>
+            <p:nvPr/>
+          </p:nvGrpSpPr>
+          <p:grpSpPr>
+            <a:xfrm>
+              <a:off x="601218" y="1866900"/>
+              <a:ext cx="10962132" cy="4234307"/>
+              <a:chOff x="601218" y="1866900"/>
+              <a:chExt cx="10962132" cy="4234307"/>
+            </a:xfrm>
+          </p:grpSpPr>
+          <p:sp>
+            <p:nvSpPr>
+              <p:cNvPr id="5" name="TextBox 5"/>
+              <p:cNvSpPr txBox="1"/>
+              <p:nvPr/>
+            </p:nvSpPr>
+            <p:spPr>
+              <a:xfrm>
+                <a:off x="601599" y="1866900"/>
+                <a:ext cx="5333492" cy="308991"/>
+              </a:xfrm>
+              <a:prstGeom prst="rect">
+                <a:avLst/>
+              </a:prstGeom>
+              <a:noFill/>
+              <a:ln>
+                <a:noFill/>
+              </a:ln>
+            </p:spPr>
+            <p:txBody>
+              <a:bodyPr wrap="none" lIns="0" tIns="0" rIns="0" bIns="0" anchor="t" anchorCtr="0">
+                <a:spAutoFit/>
+              </a:bodyPr>
+              <a:lstStyle/>
+              <a:p>
+                <a:pPr algn="l"/>
+                <a:r>
+                  <a:rPr lang="ja-JP" sz="1580" dirty="0">
+                    <a:solidFill>
+                      <a:srgbClr val="53675E"/>
+                    </a:solidFill>
+                    <a:latin typeface="+mn-lt"/>
+                    <a:ea typeface="+mn-ea"/>
+                    <a:cs typeface="+mn-cs"/>
+                  </a:rPr>
+                  <a:t>検証前の確認表。仮定が崩れた場合は計画を修正する。</a:t>
+                </a:r>
+              </a:p>
+            </p:txBody>
+          </p:sp>
+          <p:sp>
+            <p:nvSpPr>
+              <p:cNvPr id="6" name="Rectangle 6"/>
+              <p:cNvSpPr/>
+              <p:nvPr/>
+            </p:nvSpPr>
+            <p:spPr>
+              <a:xfrm>
+                <a:off x="609600" y="2333625"/>
+                <a:ext cx="10953750" cy="495300"/>
+              </a:xfrm>
+              <a:prstGeom prst="rect">
+                <a:avLst/>
+              </a:prstGeom>
+              <a:solidFill>
+                <a:srgbClr val="21654C"/>
+              </a:solidFill>
+              <a:ln>
+                <a:noFill/>
+              </a:ln>
+            </p:spPr>
+          </p:sp>
+          <p:sp>
+            <p:nvSpPr>
+              <p:cNvPr id="7" name="TextBox 7"/>
+              <p:cNvSpPr txBox="1"/>
+              <p:nvPr/>
+            </p:nvSpPr>
+            <p:spPr>
+              <a:xfrm>
+                <a:off x="771906" y="2441575"/>
+                <a:ext cx="745236" cy="352044"/>
+              </a:xfrm>
+              <a:prstGeom prst="rect">
+                <a:avLst/>
+              </a:prstGeom>
+              <a:noFill/>
+              <a:ln>
+                <a:noFill/>
+              </a:ln>
+            </p:spPr>
+            <p:txBody>
+              <a:bodyPr wrap="none" lIns="0" tIns="0" rIns="0" bIns="0" anchor="t" anchorCtr="0">
+                <a:spAutoFit/>
+              </a:bodyPr>
+              <a:lstStyle/>
+              <a:p>
+                <a:pPr algn="l"/>
+                <a:r>
+                  <a:rPr lang="ja-JP" sz="1800" b="1" dirty="0">
+                    <a:solidFill>
+                      <a:srgbClr val="FFFFFF"/>
+                    </a:solidFill>
+                    <a:latin typeface="+mn-lt"/>
+                    <a:ea typeface="+mn-ea"/>
+                    <a:cs typeface="+mn-cs"/>
+                  </a:rPr>
+                  <a:t>リスク</a:t>
+                </a:r>
+              </a:p>
+            </p:txBody>
+          </p:sp>
+          <p:sp>
+            <p:nvSpPr>
+              <p:cNvPr id="8" name="TextBox 8"/>
+              <p:cNvSpPr txBox="1"/>
+              <p:nvPr/>
+            </p:nvSpPr>
+            <p:spPr>
+              <a:xfrm>
+                <a:off x="3705606" y="2441575"/>
+                <a:ext cx="1472184" cy="352044"/>
+              </a:xfrm>
+              <a:prstGeom prst="rect">
+                <a:avLst/>
+              </a:prstGeom>
+              <a:noFill/>
+              <a:ln>
+                <a:noFill/>
+              </a:ln>
+            </p:spPr>
+            <p:txBody>
+              <a:bodyPr wrap="none" lIns="0" tIns="0" rIns="0" bIns="0" anchor="t" anchorCtr="0">
+                <a:spAutoFit/>
+              </a:bodyPr>
+              <a:lstStyle/>
+              <a:p>
+                <a:pPr algn="l"/>
+                <a:r>
+                  <a:rPr lang="ja-JP" sz="1800" b="1" dirty="0">
+                    <a:solidFill>
+                      <a:srgbClr val="FFFFFF"/>
+                    </a:solidFill>
+                    <a:latin typeface="+mn-lt"/>
+                    <a:ea typeface="+mn-ea"/>
+                    <a:cs typeface="+mn-cs"/>
+                  </a:rPr>
+                  <a:t>確認すること</a:t>
+                </a:r>
+              </a:p>
+            </p:txBody>
+          </p:sp>
+          <p:sp>
+            <p:nvSpPr>
+              <p:cNvPr id="9" name="TextBox 9"/>
+              <p:cNvSpPr txBox="1"/>
+              <p:nvPr/>
+            </p:nvSpPr>
+            <p:spPr>
+              <a:xfrm>
+                <a:off x="8010906" y="2441575"/>
+                <a:ext cx="2199132" cy="352044"/>
+              </a:xfrm>
+              <a:prstGeom prst="rect">
+                <a:avLst/>
+              </a:prstGeom>
+              <a:noFill/>
+              <a:ln>
+                <a:noFill/>
+              </a:ln>
+            </p:spPr>
+            <p:txBody>
+              <a:bodyPr wrap="none" lIns="0" tIns="0" rIns="0" bIns="0" anchor="t" anchorCtr="0">
+                <a:spAutoFit/>
+              </a:bodyPr>
+              <a:lstStyle/>
+              <a:p>
+                <a:pPr algn="l"/>
+                <a:r>
+                  <a:rPr lang="ja-JP" sz="1800" b="1" dirty="0">
+                    <a:solidFill>
+                      <a:srgbClr val="FFFFFF"/>
+                    </a:solidFill>
+                    <a:latin typeface="+mn-lt"/>
+                    <a:ea typeface="+mn-ea"/>
+                    <a:cs typeface="+mn-cs"/>
+                  </a:rPr>
+                  <a:t>次の判断に出す材料</a:t>
+                </a:r>
+              </a:p>
+            </p:txBody>
+          </p:sp>
+          <p:sp>
+            <p:nvSpPr>
+              <p:cNvPr id="10" name="Rectangle 10"/>
+              <p:cNvSpPr/>
+              <p:nvPr/>
+            </p:nvSpPr>
+            <p:spPr>
+              <a:xfrm>
+                <a:off x="609600" y="2828925"/>
+                <a:ext cx="10953750" cy="933450"/>
+              </a:xfrm>
+              <a:prstGeom prst="rect">
+                <a:avLst/>
+              </a:prstGeom>
+              <a:solidFill>
+                <a:srgbClr val="E5EEE7"/>
+              </a:solidFill>
+              <a:ln>
+                <a:noFill/>
+              </a:ln>
+            </p:spPr>
+          </p:sp>
+          <p:sp>
+            <p:nvSpPr>
+              <p:cNvPr id="11" name="TextBox 11"/>
+              <p:cNvSpPr txBox="1"/>
+              <p:nvPr/>
+            </p:nvSpPr>
+            <p:spPr>
+              <a:xfrm>
+                <a:off x="771525" y="2990850"/>
+                <a:ext cx="1284478" cy="367665"/>
+              </a:xfrm>
+              <a:prstGeom prst="rect">
+                <a:avLst/>
+              </a:prstGeom>
+              <a:noFill/>
+              <a:ln>
+                <a:noFill/>
+              </a:ln>
+            </p:spPr>
+            <p:txBody>
+              <a:bodyPr wrap="none" lIns="0" tIns="0" rIns="0" bIns="0" anchor="t" anchorCtr="0">
+                <a:spAutoFit/>
+              </a:bodyPr>
+              <a:lstStyle/>
+              <a:p>
+                <a:pPr algn="l"/>
+                <a:r>
+                  <a:rPr lang="ja-JP" sz="1880" b="1" dirty="0">
+                    <a:solidFill>
+                      <a:srgbClr val="21654C"/>
+                    </a:solidFill>
+                    <a:latin typeface="+mn-lt"/>
+                    <a:ea typeface="+mn-ea"/>
+                    <a:cs typeface="+mn-cs"/>
+                  </a:rPr>
+                  <a:t>客数が不足</a:t>
+                </a:r>
+              </a:p>
+            </p:txBody>
+          </p:sp>
+          <p:sp>
+            <p:nvSpPr>
+              <p:cNvPr id="12" name="TextBox 12"/>
+              <p:cNvSpPr txBox="1"/>
+              <p:nvPr/>
+            </p:nvSpPr>
+            <p:spPr>
+              <a:xfrm>
+                <a:off x="3705987" y="2946400"/>
+                <a:ext cx="1997248" cy="337376"/>
+              </a:xfrm>
+              <a:prstGeom prst="rect">
+                <a:avLst/>
+              </a:prstGeom>
+              <a:noFill/>
+              <a:ln>
+                <a:noFill/>
+              </a:ln>
+            </p:spPr>
+            <p:txBody>
+              <a:bodyPr wrap="none" lIns="0" tIns="0" rIns="0" bIns="0" anchor="t" anchorCtr="0">
+                <a:spAutoFit/>
+              </a:bodyPr>
+              <a:lstStyle/>
+              <a:p>
+                <a:pPr algn="l"/>
+                <a:r>
+                  <a:rPr lang="ja-JP" sz="1720" dirty="0">
+                    <a:solidFill>
+                      <a:srgbClr val="202C29"/>
+                    </a:solidFill>
+                    <a:latin typeface="+mn-lt"/>
+                    <a:ea typeface="+mn-ea"/>
+                    <a:cs typeface="+mn-cs"/>
+                  </a:rPr>
+                  <a:t>2週間の通行量調査</a:t>
+                </a:r>
+              </a:p>
+            </p:txBody>
+          </p:sp>
+          <p:sp>
+            <p:nvSpPr>
+              <p:cNvPr id="13" name="TextBox 13"/>
+              <p:cNvSpPr txBox="1"/>
+              <p:nvPr/>
+            </p:nvSpPr>
+            <p:spPr>
+              <a:xfrm>
+                <a:off x="3705987" y="3298825"/>
+                <a:ext cx="2564536" cy="337376"/>
+              </a:xfrm>
+              <a:prstGeom prst="rect">
+                <a:avLst/>
+              </a:prstGeom>
+              <a:noFill/>
+              <a:ln>
+                <a:noFill/>
+              </a:ln>
+            </p:spPr>
+            <p:txBody>
+              <a:bodyPr wrap="none" lIns="0" tIns="0" rIns="0" bIns="0" anchor="t" anchorCtr="0">
+                <a:spAutoFit/>
+              </a:bodyPr>
+              <a:lstStyle/>
+              <a:p>
+                <a:pPr algn="l"/>
+                <a:r>
+                  <a:rPr lang="ja-JP" sz="1720" dirty="0">
+                    <a:solidFill>
+                      <a:srgbClr val="202C29"/>
+                    </a:solidFill>
+                    <a:latin typeface="+mn-lt"/>
+                    <a:ea typeface="+mn-ea"/>
+                    <a:cs typeface="+mn-cs"/>
+                  </a:rPr>
+                  <a:t>試験販売で客単価を確認</a:t>
+                </a:r>
+              </a:p>
+            </p:txBody>
+          </p:sp>
+          <p:sp>
+            <p:nvSpPr>
+              <p:cNvPr id="14" name="TextBox 14"/>
+              <p:cNvSpPr txBox="1"/>
+              <p:nvPr/>
+            </p:nvSpPr>
+            <p:spPr>
+              <a:xfrm>
+                <a:off x="8011287" y="2946400"/>
+                <a:ext cx="2298258" cy="337376"/>
+              </a:xfrm>
+              <a:prstGeom prst="rect">
+                <a:avLst/>
+              </a:prstGeom>
+              <a:noFill/>
+              <a:ln>
+                <a:noFill/>
+              </a:ln>
+            </p:spPr>
+            <p:txBody>
+              <a:bodyPr wrap="none" lIns="0" tIns="0" rIns="0" bIns="0" anchor="t" anchorCtr="0">
+                <a:spAutoFit/>
+              </a:bodyPr>
+              <a:lstStyle/>
+              <a:p>
+                <a:pPr algn="l"/>
+                <a:r>
+                  <a:rPr lang="ja-JP" sz="1720" dirty="0">
+                    <a:solidFill>
+                      <a:srgbClr val="202C29"/>
+                    </a:solidFill>
+                    <a:latin typeface="+mn-lt"/>
+                    <a:ea typeface="+mn-ea"/>
+                    <a:cs typeface="+mn-cs"/>
+                  </a:rPr>
+                  <a:t>計画82人・1,100円に</a:t>
+                </a:r>
+              </a:p>
+            </p:txBody>
+          </p:sp>
+          <p:sp>
+            <p:nvSpPr>
+              <p:cNvPr id="15" name="TextBox 15"/>
+              <p:cNvSpPr txBox="1"/>
+              <p:nvPr/>
+            </p:nvSpPr>
+            <p:spPr>
+              <a:xfrm>
+                <a:off x="8011287" y="3298825"/>
+                <a:ext cx="1406804" cy="337376"/>
+              </a:xfrm>
+              <a:prstGeom prst="rect">
+                <a:avLst/>
+              </a:prstGeom>
+              <a:noFill/>
+              <a:ln>
+                <a:noFill/>
+              </a:ln>
+            </p:spPr>
+            <p:txBody>
+              <a:bodyPr wrap="none" lIns="0" tIns="0" rIns="0" bIns="0" anchor="t" anchorCtr="0">
+                <a:spAutoFit/>
+              </a:bodyPr>
+              <a:lstStyle/>
+              <a:p>
+                <a:pPr algn="l"/>
+                <a:r>
+                  <a:rPr lang="ja-JP" sz="1720" dirty="0">
+                    <a:solidFill>
+                      <a:srgbClr val="202C29"/>
+                    </a:solidFill>
+                    <a:latin typeface="+mn-lt"/>
+                    <a:ea typeface="+mn-ea"/>
+                    <a:cs typeface="+mn-cs"/>
+                  </a:rPr>
+                  <a:t>根拠があるか</a:t>
+                </a:r>
+              </a:p>
+            </p:txBody>
+          </p:sp>
+          <p:sp>
+            <p:nvSpPr>
+              <p:cNvPr id="16" name="Rectangle 16"/>
+              <p:cNvSpPr/>
+              <p:nvPr/>
+            </p:nvSpPr>
+            <p:spPr>
+              <a:xfrm>
+                <a:off x="609600" y="3752850"/>
+                <a:ext cx="10953750" cy="9525"/>
+              </a:xfrm>
+              <a:prstGeom prst="rect">
+                <a:avLst/>
+              </a:prstGeom>
+              <a:solidFill>
+                <a:srgbClr val="CAD5CC"/>
+              </a:solidFill>
+              <a:ln>
+                <a:noFill/>
+              </a:ln>
+            </p:spPr>
+          </p:sp>
+          <p:sp>
+            <p:nvSpPr>
+              <p:cNvPr id="17" name="Rectangle 17"/>
+              <p:cNvSpPr/>
+              <p:nvPr/>
+            </p:nvSpPr>
+            <p:spPr>
+              <a:xfrm>
+                <a:off x="609600" y="3762375"/>
+                <a:ext cx="10953750" cy="933450"/>
+              </a:xfrm>
+              <a:prstGeom prst="rect">
+                <a:avLst/>
+              </a:prstGeom>
+              <a:solidFill>
+                <a:srgbClr val="F7F5EE"/>
+              </a:solidFill>
+              <a:ln>
+                <a:noFill/>
+              </a:ln>
+            </p:spPr>
+          </p:sp>
+          <p:sp>
+            <p:nvSpPr>
+              <p:cNvPr id="18" name="TextBox 18"/>
+              <p:cNvSpPr txBox="1"/>
+              <p:nvPr/>
+            </p:nvSpPr>
+            <p:spPr>
+              <a:xfrm>
+                <a:off x="771525" y="3924300"/>
+                <a:ext cx="1790649" cy="367665"/>
+              </a:xfrm>
+              <a:prstGeom prst="rect">
+                <a:avLst/>
+              </a:prstGeom>
+              <a:noFill/>
+              <a:ln>
+                <a:noFill/>
+              </a:ln>
+            </p:spPr>
+            <p:txBody>
+              <a:bodyPr wrap="none" lIns="0" tIns="0" rIns="0" bIns="0" anchor="t" anchorCtr="0">
+                <a:spAutoFit/>
+              </a:bodyPr>
+              <a:lstStyle/>
+              <a:p>
+                <a:pPr algn="l"/>
+                <a:r>
+                  <a:rPr lang="ja-JP" sz="1880" b="1" dirty="0">
+                    <a:solidFill>
+                      <a:srgbClr val="21654C"/>
+                    </a:solidFill>
+                    <a:latin typeface="+mn-lt"/>
+                    <a:ea typeface="+mn-ea"/>
+                    <a:cs typeface="+mn-cs"/>
+                  </a:rPr>
+                  <a:t>工事額が上振れ</a:t>
+                </a:r>
+              </a:p>
+            </p:txBody>
+          </p:sp>
+          <p:sp>
+            <p:nvSpPr>
+              <p:cNvPr id="19" name="TextBox 19"/>
+              <p:cNvSpPr txBox="1"/>
+              <p:nvPr/>
+            </p:nvSpPr>
+            <p:spPr>
+              <a:xfrm>
+                <a:off x="3705987" y="3879850"/>
+                <a:ext cx="2228794" cy="337376"/>
+              </a:xfrm>
+              <a:prstGeom prst="rect">
+                <a:avLst/>
+              </a:prstGeom>
+              <a:noFill/>
+              <a:ln>
+                <a:noFill/>
+              </a:ln>
+            </p:spPr>
+            <p:txBody>
+              <a:bodyPr wrap="none" lIns="0" tIns="0" rIns="0" bIns="0" anchor="t" anchorCtr="0">
+                <a:spAutoFit/>
+              </a:bodyPr>
+              <a:lstStyle/>
+              <a:p>
+                <a:pPr algn="l"/>
+                <a:r>
+                  <a:rPr lang="ja-JP" sz="1720" dirty="0">
+                    <a:solidFill>
+                      <a:srgbClr val="202C29"/>
+                    </a:solidFill>
+                    <a:latin typeface="+mn-lt"/>
+                    <a:ea typeface="+mn-ea"/>
+                    <a:cs typeface="+mn-cs"/>
+                  </a:rPr>
+                  <a:t>同じ条件で3社へ見積</a:t>
+                </a:r>
+              </a:p>
+            </p:txBody>
+          </p:sp>
+          <p:sp>
+            <p:nvSpPr>
+              <p:cNvPr id="20" name="TextBox 20"/>
+              <p:cNvSpPr txBox="1"/>
+              <p:nvPr/>
+            </p:nvSpPr>
+            <p:spPr>
+              <a:xfrm>
+                <a:off x="3705987" y="4232275"/>
+                <a:ext cx="2101444" cy="337376"/>
+              </a:xfrm>
+              <a:prstGeom prst="rect">
+                <a:avLst/>
+              </a:prstGeom>
+              <a:noFill/>
+              <a:ln>
+                <a:noFill/>
+              </a:ln>
+            </p:spPr>
+            <p:txBody>
+              <a:bodyPr wrap="none" lIns="0" tIns="0" rIns="0" bIns="0" anchor="t" anchorCtr="0">
+                <a:spAutoFit/>
+              </a:bodyPr>
+              <a:lstStyle/>
+              <a:p>
+                <a:pPr algn="l"/>
+                <a:r>
+                  <a:rPr lang="ja-JP" sz="1720" dirty="0">
+                    <a:solidFill>
+                      <a:srgbClr val="202C29"/>
+                    </a:solidFill>
+                    <a:latin typeface="+mn-lt"/>
+                    <a:ea typeface="+mn-ea"/>
+                    <a:cs typeface="+mn-cs"/>
+                  </a:rPr>
+                  <a:t>予備費と上限を確認</a:t>
+                </a:r>
+              </a:p>
+            </p:txBody>
+          </p:sp>
+          <p:sp>
+            <p:nvSpPr>
+              <p:cNvPr id="21" name="TextBox 21"/>
+              <p:cNvSpPr txBox="1"/>
+              <p:nvPr/>
+            </p:nvSpPr>
+            <p:spPr>
+              <a:xfrm>
+                <a:off x="8011287" y="3879850"/>
+                <a:ext cx="2332990" cy="337376"/>
+              </a:xfrm>
+              <a:prstGeom prst="rect">
+                <a:avLst/>
+              </a:prstGeom>
+              <a:noFill/>
+              <a:ln>
+                <a:noFill/>
+              </a:ln>
+            </p:spPr>
+            <p:txBody>
+              <a:bodyPr wrap="none" lIns="0" tIns="0" rIns="0" bIns="0" anchor="t" anchorCtr="0">
+                <a:spAutoFit/>
+              </a:bodyPr>
+              <a:lstStyle/>
+              <a:p>
+                <a:pPr algn="l"/>
+                <a:r>
+                  <a:rPr lang="ja-JP" sz="1720" dirty="0">
+                    <a:solidFill>
+                      <a:srgbClr val="202C29"/>
+                    </a:solidFill>
+                    <a:latin typeface="+mn-lt"/>
+                    <a:ea typeface="+mn-ea"/>
+                    <a:cs typeface="+mn-cs"/>
+                  </a:rPr>
+                  <a:t>見積額と予備費を含む</a:t>
+                </a:r>
+              </a:p>
+            </p:txBody>
+          </p:sp>
+          <p:sp>
+            <p:nvSpPr>
+              <p:cNvPr id="22" name="TextBox 22"/>
+              <p:cNvSpPr txBox="1"/>
+              <p:nvPr/>
+            </p:nvSpPr>
+            <p:spPr>
+              <a:xfrm>
+                <a:off x="8011287" y="4232275"/>
+                <a:ext cx="943712" cy="337376"/>
+              </a:xfrm>
+              <a:prstGeom prst="rect">
+                <a:avLst/>
+              </a:prstGeom>
+              <a:noFill/>
+              <a:ln>
+                <a:noFill/>
+              </a:ln>
+            </p:spPr>
+            <p:txBody>
+              <a:bodyPr wrap="none" lIns="0" tIns="0" rIns="0" bIns="0" anchor="t" anchorCtr="0">
+                <a:spAutoFit/>
+              </a:bodyPr>
+              <a:lstStyle/>
+              <a:p>
+                <a:pPr algn="l"/>
+                <a:r>
+                  <a:rPr lang="ja-JP" sz="1720" dirty="0">
+                    <a:solidFill>
+                      <a:srgbClr val="202C29"/>
+                    </a:solidFill>
+                    <a:latin typeface="+mn-lt"/>
+                    <a:ea typeface="+mn-ea"/>
+                    <a:cs typeface="+mn-cs"/>
+                  </a:rPr>
+                  <a:t>必要資金</a:t>
+                </a:r>
+              </a:p>
+            </p:txBody>
+          </p:sp>
+          <p:sp>
+            <p:nvSpPr>
+              <p:cNvPr id="23" name="Rectangle 23"/>
+              <p:cNvSpPr/>
+              <p:nvPr/>
+            </p:nvSpPr>
+            <p:spPr>
+              <a:xfrm>
+                <a:off x="609600" y="4686300"/>
+                <a:ext cx="10953750" cy="9525"/>
+              </a:xfrm>
+              <a:prstGeom prst="rect">
+                <a:avLst/>
+              </a:prstGeom>
+              <a:solidFill>
+                <a:srgbClr val="CAD5CC"/>
+              </a:solidFill>
+              <a:ln>
+                <a:noFill/>
+              </a:ln>
+            </p:spPr>
+          </p:sp>
+          <p:sp>
+            <p:nvSpPr>
+              <p:cNvPr id="24" name="Rectangle 24"/>
+              <p:cNvSpPr/>
+              <p:nvPr/>
+            </p:nvSpPr>
+            <p:spPr>
+              <a:xfrm>
+                <a:off x="609600" y="4695825"/>
+                <a:ext cx="10953750" cy="933450"/>
+              </a:xfrm>
+              <a:prstGeom prst="rect">
+                <a:avLst/>
+              </a:prstGeom>
+              <a:solidFill>
+                <a:srgbClr val="E5EEE7"/>
+              </a:solidFill>
+              <a:ln>
+                <a:noFill/>
+              </a:ln>
+            </p:spPr>
+          </p:sp>
+          <p:sp>
+            <p:nvSpPr>
+              <p:cNvPr id="25" name="TextBox 25"/>
+              <p:cNvSpPr txBox="1"/>
+              <p:nvPr/>
+            </p:nvSpPr>
+            <p:spPr>
+              <a:xfrm>
+                <a:off x="771525" y="4857750"/>
+                <a:ext cx="1284478" cy="367665"/>
+              </a:xfrm>
+              <a:prstGeom prst="rect">
+                <a:avLst/>
+              </a:prstGeom>
+              <a:noFill/>
+              <a:ln>
+                <a:noFill/>
+              </a:ln>
+            </p:spPr>
+            <p:txBody>
+              <a:bodyPr wrap="none" lIns="0" tIns="0" rIns="0" bIns="0" anchor="t" anchorCtr="0">
+                <a:spAutoFit/>
+              </a:bodyPr>
+              <a:lstStyle/>
+              <a:p>
+                <a:pPr algn="l"/>
+                <a:r>
+                  <a:rPr lang="ja-JP" sz="1880" b="1" dirty="0">
+                    <a:solidFill>
+                      <a:srgbClr val="21654C"/>
+                    </a:solidFill>
+                    <a:latin typeface="+mn-lt"/>
+                    <a:ea typeface="+mn-ea"/>
+                    <a:cs typeface="+mn-cs"/>
+                  </a:rPr>
+                  <a:t>店長が不足</a:t>
+                </a:r>
+              </a:p>
+            </p:txBody>
+          </p:sp>
+          <p:sp>
+            <p:nvSpPr>
+              <p:cNvPr id="26" name="TextBox 26"/>
+              <p:cNvSpPr txBox="1"/>
+              <p:nvPr/>
+            </p:nvSpPr>
+            <p:spPr>
+              <a:xfrm>
+                <a:off x="3705987" y="4813300"/>
+                <a:ext cx="2796083" cy="337376"/>
+              </a:xfrm>
+              <a:prstGeom prst="rect">
+                <a:avLst/>
+              </a:prstGeom>
+              <a:noFill/>
+              <a:ln>
+                <a:noFill/>
+              </a:ln>
+            </p:spPr>
+            <p:txBody>
+              <a:bodyPr wrap="none" lIns="0" tIns="0" rIns="0" bIns="0" anchor="t" anchorCtr="0">
+                <a:spAutoFit/>
+              </a:bodyPr>
+              <a:lstStyle/>
+              <a:p>
+                <a:pPr algn="l"/>
+                <a:r>
+                  <a:rPr lang="ja-JP" sz="1720" dirty="0">
+                    <a:solidFill>
+                      <a:srgbClr val="202C29"/>
+                    </a:solidFill>
+                    <a:latin typeface="+mn-lt"/>
+                    <a:ea typeface="+mn-ea"/>
+                    <a:cs typeface="+mn-cs"/>
+                  </a:rPr>
+                  <a:t>候補者の意向と配置を確認</a:t>
+                </a:r>
+              </a:p>
+            </p:txBody>
+          </p:sp>
+          <p:sp>
+            <p:nvSpPr>
+              <p:cNvPr id="27" name="TextBox 27"/>
+              <p:cNvSpPr txBox="1"/>
+              <p:nvPr/>
+            </p:nvSpPr>
+            <p:spPr>
+              <a:xfrm>
+                <a:off x="3705987" y="5165725"/>
+                <a:ext cx="2564536" cy="337376"/>
+              </a:xfrm>
+              <a:prstGeom prst="rect">
+                <a:avLst/>
+              </a:prstGeom>
+              <a:noFill/>
+              <a:ln>
+                <a:noFill/>
+              </a:ln>
+            </p:spPr>
+            <p:txBody>
+              <a:bodyPr wrap="none" lIns="0" tIns="0" rIns="0" bIns="0" anchor="t" anchorCtr="0">
+                <a:spAutoFit/>
+              </a:bodyPr>
+              <a:lstStyle/>
+              <a:p>
+                <a:pPr algn="l"/>
+                <a:r>
+                  <a:rPr lang="ja-JP" sz="1720" dirty="0">
+                    <a:solidFill>
+                      <a:srgbClr val="202C29"/>
+                    </a:solidFill>
+                    <a:latin typeface="+mn-lt"/>
+                    <a:ea typeface="+mn-ea"/>
+                    <a:cs typeface="+mn-cs"/>
+                  </a:rPr>
+                  <a:t>採用・育成の日程を確定</a:t>
+                </a:r>
+              </a:p>
+            </p:txBody>
+          </p:sp>
+          <p:sp>
+            <p:nvSpPr>
+              <p:cNvPr id="28" name="TextBox 28"/>
+              <p:cNvSpPr txBox="1"/>
+              <p:nvPr/>
+            </p:nvSpPr>
+            <p:spPr>
+              <a:xfrm>
+                <a:off x="8011287" y="4813300"/>
+                <a:ext cx="1638351" cy="337376"/>
+              </a:xfrm>
+              <a:prstGeom prst="rect">
+                <a:avLst/>
+              </a:prstGeom>
+              <a:noFill/>
+              <a:ln>
+                <a:noFill/>
+              </a:ln>
+            </p:spPr>
+            <p:txBody>
+              <a:bodyPr wrap="none" lIns="0" tIns="0" rIns="0" bIns="0" anchor="t" anchorCtr="0">
+                <a:spAutoFit/>
+              </a:bodyPr>
+              <a:lstStyle/>
+              <a:p>
+                <a:pPr algn="l"/>
+                <a:r>
+                  <a:rPr lang="ja-JP" sz="1720" dirty="0">
+                    <a:solidFill>
+                      <a:srgbClr val="202C29"/>
+                    </a:solidFill>
+                    <a:latin typeface="+mn-lt"/>
+                    <a:ea typeface="+mn-ea"/>
+                    <a:cs typeface="+mn-cs"/>
+                  </a:rPr>
+                  <a:t>配置の見通しと</a:t>
+                </a:r>
+              </a:p>
+            </p:txBody>
+          </p:sp>
+          <p:sp>
+            <p:nvSpPr>
+              <p:cNvPr id="29" name="TextBox 29"/>
+              <p:cNvSpPr txBox="1"/>
+              <p:nvPr/>
+            </p:nvSpPr>
+            <p:spPr>
+              <a:xfrm>
+                <a:off x="8011287" y="5165725"/>
+                <a:ext cx="1869897" cy="337376"/>
+              </a:xfrm>
+              <a:prstGeom prst="rect">
+                <a:avLst/>
+              </a:prstGeom>
+              <a:noFill/>
+              <a:ln>
+                <a:noFill/>
+              </a:ln>
+            </p:spPr>
+            <p:txBody>
+              <a:bodyPr wrap="none" lIns="0" tIns="0" rIns="0" bIns="0" anchor="t" anchorCtr="0">
+                <a:spAutoFit/>
+              </a:bodyPr>
+              <a:lstStyle/>
+              <a:p>
+                <a:pPr algn="l"/>
+                <a:r>
+                  <a:rPr lang="ja-JP" sz="1720" dirty="0">
+                    <a:solidFill>
+                      <a:srgbClr val="202C29"/>
+                    </a:solidFill>
+                    <a:latin typeface="+mn-lt"/>
+                    <a:ea typeface="+mn-ea"/>
+                    <a:cs typeface="+mn-cs"/>
+                  </a:rPr>
+                  <a:t>育成に必要な期間</a:t>
+                </a:r>
+              </a:p>
+            </p:txBody>
+          </p:sp>
+          <p:sp>
+            <p:nvSpPr>
+              <p:cNvPr id="30" name="Rectangle 30"/>
+              <p:cNvSpPr/>
+              <p:nvPr/>
+            </p:nvSpPr>
+            <p:spPr>
+              <a:xfrm>
+                <a:off x="609600" y="5619750"/>
+                <a:ext cx="10953750" cy="9525"/>
+              </a:xfrm>
+              <a:prstGeom prst="rect">
+                <a:avLst/>
+              </a:prstGeom>
+              <a:solidFill>
+                <a:srgbClr val="CAD5CC"/>
+              </a:solidFill>
+              <a:ln>
+                <a:noFill/>
+              </a:ln>
+            </p:spPr>
+          </p:sp>
+          <p:sp>
+            <p:nvSpPr>
+              <p:cNvPr id="31" name="TextBox 31"/>
+              <p:cNvSpPr txBox="1"/>
+              <p:nvPr/>
+            </p:nvSpPr>
+            <p:spPr>
+              <a:xfrm>
+                <a:off x="601218" y="5778500"/>
+                <a:ext cx="6458331" cy="322707"/>
+              </a:xfrm>
+              <a:prstGeom prst="rect">
+                <a:avLst/>
+              </a:prstGeom>
+              <a:noFill/>
+              <a:ln>
+                <a:noFill/>
+              </a:ln>
+            </p:spPr>
+            <p:txBody>
+              <a:bodyPr wrap="none" lIns="0" tIns="0" rIns="0" bIns="0" anchor="t" anchorCtr="0">
+                <a:spAutoFit/>
+              </a:bodyPr>
+              <a:lstStyle/>
+              <a:p>
+                <a:pPr algn="l"/>
+                <a:r>
+                  <a:rPr lang="ja-JP" sz="1650" dirty="0">
+                    <a:solidFill>
+                      <a:srgbClr val="53675E"/>
+                    </a:solidFill>
+                    <a:latin typeface="+mn-lt"/>
+                    <a:ea typeface="+mn-ea"/>
+                    <a:cs typeface="+mn-cs"/>
+                  </a:rPr>
+                  <a:t>契約が前提ではない。確認結果と追加資金を、投資決裁へ出す。</a:t>
+                </a:r>
+              </a:p>
+            </p:txBody>
+          </p:sp>
+        </p:grpSp>
       </p:grpSp>
       <p:grpSp>
         <p:nvGrpSpPr>
-          <p:cNvPr id="20" name="footer"/>
+          <p:cNvPr id="36" name="footer"/>
           <p:cNvGrpSpPr/>
           <p:nvPr/>
         </p:nvGrpSpPr>
@@ -5438,7 +6489,7 @@
         </p:grpSpPr>
         <p:sp>
           <p:nvSpPr>
-            <p:cNvPr id="18" name="TextBox 18"/>
+            <p:cNvPr id="34" name="TextBox 34"/>
             <p:cNvSpPr txBox="1"/>
             <p:nvPr/>
           </p:nvSpPr>
@@ -5478,14 +6529,14 @@
         </p:sp>
         <p:sp>
           <p:nvSpPr>
-            <p:cNvPr id="19" name="TextBox 19"/>
+            <p:cNvPr id="35" name="TextBox 35"/>
             <p:cNvSpPr txBox="1"/>
             <p:nvPr/>
           </p:nvSpPr>
           <p:spPr>
             <a:xfrm>
               <a:off x="10614279" y="6315075"/>
-              <a:ext cx="553364" cy="234696"/>
+              <a:ext cx="704851" cy="234696"/>
             </a:xfrm>
             <a:prstGeom prst="rect">
               <a:avLst/>
@@ -5576,7 +6627,7 @@
           <p:spPr>
             <a:xfrm>
               <a:off x="603504" y="523875"/>
-              <a:ext cx="1472855" cy="234696"/>
+              <a:ext cx="1630364" cy="234696"/>
             </a:xfrm>
             <a:prstGeom prst="rect">
               <a:avLst/>
@@ -5650,34 +6701,949 @@
       </p:grpSp>
       <p:grpSp>
         <p:nvGrpSpPr>
-          <p:cNvPr id="14" name="content"/>
+          <p:cNvPr id="35" name="content"/>
           <p:cNvGrpSpPr/>
           <p:nvPr/>
         </p:nvGrpSpPr>
         <p:grpSpPr>
           <a:xfrm>
-            <a:off x="598932" y="2032000"/>
-            <a:ext cx="10069068" cy="3356356"/>
-            <a:chOff x="598932" y="2032000"/>
-            <a:chExt cx="10069068" cy="3356356"/>
+            <a:off x="600075" y="1838325"/>
+            <a:ext cx="11018627" cy="4253865"/>
+            <a:chOff x="600075" y="1838325"/>
+            <a:chExt cx="11018627" cy="4253865"/>
           </a:xfrm>
         </p:grpSpPr>
         <p:sp>
           <p:nvSpPr>
-            <p:cNvPr id="5" name="Rectangle 5"/>
+            <p:cNvPr id="5" name="TextBox 5"/>
+            <p:cNvSpPr txBox="1"/>
+            <p:nvPr/>
+          </p:nvSpPr>
+          <p:spPr>
+            <a:xfrm>
+              <a:off x="601599" y="1838325"/>
+              <a:ext cx="6822389" cy="308991"/>
+            </a:xfrm>
+            <a:prstGeom prst="rect">
+              <a:avLst/>
+            </a:prstGeom>
+            <a:noFill/>
+            <a:ln>
+              <a:noFill/>
+            </a:ln>
+          </p:spPr>
+          <p:txBody>
+            <a:bodyPr wrap="none" lIns="0" tIns="0" rIns="0" bIns="0" anchor="t" anchorCtr="0">
+              <a:spAutoFit/>
+            </a:bodyPr>
+            <a:lstStyle/>
+            <a:p>
+              <a:pPr algn="l"/>
+              <a:r>
+                <a:rPr lang="ja-JP" sz="1580" dirty="0">
+                  <a:solidFill>
+                    <a:srgbClr val="53675E"/>
+                  </a:solidFill>
+                  <a:latin typeface="+mn-lt"/>
+                  <a:ea typeface="+mn-ea"/>
+                  <a:cs typeface="+mn-cs"/>
+                </a:rPr>
+                <a:t>仮日程：各週の終わりを目盛りにする。資料が不足すれば決裁は延期。</a:t>
+              </a:r>
+            </a:p>
+          </p:txBody>
+        </p:sp>
+        <p:sp>
+          <p:nvSpPr>
+            <p:cNvPr id="6" name="TextBox 6"/>
+            <p:cNvSpPr txBox="1"/>
+            <p:nvPr/>
+          </p:nvSpPr>
+          <p:spPr>
+            <a:xfrm>
+              <a:off x="600075" y="2667000"/>
+              <a:ext cx="1031392" cy="367665"/>
+            </a:xfrm>
+            <a:prstGeom prst="rect">
+              <a:avLst/>
+            </a:prstGeom>
+            <a:noFill/>
+            <a:ln>
+              <a:noFill/>
+            </a:ln>
+          </p:spPr>
+          <p:txBody>
+            <a:bodyPr wrap="none" lIns="0" tIns="0" rIns="0" bIns="0" anchor="t" anchorCtr="0">
+              <a:spAutoFit/>
+            </a:bodyPr>
+            <a:lstStyle/>
+            <a:p>
+              <a:pPr algn="l"/>
+              <a:r>
+                <a:rPr lang="ja-JP" sz="1880" b="1" dirty="0">
+                  <a:solidFill>
+                    <a:srgbClr val="202C29"/>
+                  </a:solidFill>
+                  <a:latin typeface="+mn-lt"/>
+                  <a:ea typeface="+mn-ea"/>
+                  <a:cs typeface="+mn-cs"/>
+                </a:rPr>
+                <a:t>現地調査</a:t>
+              </a:r>
+            </a:p>
+          </p:txBody>
+        </p:sp>
+        <p:sp>
+          <p:nvSpPr>
+            <p:cNvPr id="7" name="TextBox 7"/>
+            <p:cNvSpPr txBox="1"/>
+            <p:nvPr/>
+          </p:nvSpPr>
+          <p:spPr>
+            <a:xfrm>
+              <a:off x="601980" y="3003550"/>
+              <a:ext cx="722313" cy="293370"/>
+            </a:xfrm>
+            <a:prstGeom prst="rect">
+              <a:avLst/>
+            </a:prstGeom>
+            <a:noFill/>
+            <a:ln>
+              <a:noFill/>
+            </a:ln>
+          </p:spPr>
+          <p:txBody>
+            <a:bodyPr wrap="none" lIns="0" tIns="0" rIns="0" bIns="0" anchor="t" anchorCtr="0">
+              <a:spAutoFit/>
+            </a:bodyPr>
+            <a:lstStyle/>
+            <a:p>
+              <a:pPr algn="l"/>
+              <a:r>
+                <a:rPr lang="ja-JP" sz="1500" dirty="0">
+                  <a:solidFill>
+                    <a:srgbClr val="53675E"/>
+                  </a:solidFill>
+                  <a:latin typeface="+mn-lt"/>
+                  <a:ea typeface="+mn-ea"/>
+                  <a:cs typeface="+mn-cs"/>
+                </a:rPr>
+                <a:t>1〜2週</a:t>
+              </a:r>
+            </a:p>
+          </p:txBody>
+        </p:sp>
+        <p:sp>
+          <p:nvSpPr>
+            <p:cNvPr id="8" name="TextBox 8"/>
+            <p:cNvSpPr txBox="1"/>
+            <p:nvPr/>
+          </p:nvSpPr>
+          <p:spPr>
+            <a:xfrm>
+              <a:off x="600075" y="3543300"/>
+              <a:ext cx="1790649" cy="367665"/>
+            </a:xfrm>
+            <a:prstGeom prst="rect">
+              <a:avLst/>
+            </a:prstGeom>
+            <a:noFill/>
+            <a:ln>
+              <a:noFill/>
+            </a:ln>
+          </p:spPr>
+          <p:txBody>
+            <a:bodyPr wrap="none" lIns="0" tIns="0" rIns="0" bIns="0" anchor="t" anchorCtr="0">
+              <a:spAutoFit/>
+            </a:bodyPr>
+            <a:lstStyle/>
+            <a:p>
+              <a:pPr algn="l"/>
+              <a:r>
+                <a:rPr lang="ja-JP" sz="1880" b="1" dirty="0">
+                  <a:solidFill>
+                    <a:srgbClr val="202C29"/>
+                  </a:solidFill>
+                  <a:latin typeface="+mn-lt"/>
+                  <a:ea typeface="+mn-ea"/>
+                  <a:cs typeface="+mn-cs"/>
+                </a:rPr>
+                <a:t>見積・条件交渉</a:t>
+              </a:r>
+            </a:p>
+          </p:txBody>
+        </p:sp>
+        <p:sp>
+          <p:nvSpPr>
+            <p:cNvPr id="9" name="TextBox 9"/>
+            <p:cNvSpPr txBox="1"/>
+            <p:nvPr/>
+          </p:nvSpPr>
+          <p:spPr>
+            <a:xfrm>
+              <a:off x="601980" y="3879850"/>
+              <a:ext cx="746125" cy="293370"/>
+            </a:xfrm>
+            <a:prstGeom prst="rect">
+              <a:avLst/>
+            </a:prstGeom>
+            <a:noFill/>
+            <a:ln>
+              <a:noFill/>
+            </a:ln>
+          </p:spPr>
+          <p:txBody>
+            <a:bodyPr wrap="none" lIns="0" tIns="0" rIns="0" bIns="0" anchor="t" anchorCtr="0">
+              <a:spAutoFit/>
+            </a:bodyPr>
+            <a:lstStyle/>
+            <a:p>
+              <a:pPr algn="l"/>
+              <a:r>
+                <a:rPr lang="ja-JP" sz="1500" dirty="0">
+                  <a:solidFill>
+                    <a:srgbClr val="53675E"/>
+                  </a:solidFill>
+                  <a:latin typeface="+mn-lt"/>
+                  <a:ea typeface="+mn-ea"/>
+                  <a:cs typeface="+mn-cs"/>
+                </a:rPr>
+                <a:t>3〜4週</a:t>
+              </a:r>
+            </a:p>
+          </p:txBody>
+        </p:sp>
+        <p:sp>
+          <p:nvSpPr>
+            <p:cNvPr id="10" name="TextBox 10"/>
+            <p:cNvSpPr txBox="1"/>
+            <p:nvPr/>
+          </p:nvSpPr>
+          <p:spPr>
+            <a:xfrm>
+              <a:off x="600075" y="4419600"/>
+              <a:ext cx="1031392" cy="367665"/>
+            </a:xfrm>
+            <a:prstGeom prst="rect">
+              <a:avLst/>
+            </a:prstGeom>
+            <a:noFill/>
+            <a:ln>
+              <a:noFill/>
+            </a:ln>
+          </p:spPr>
+          <p:txBody>
+            <a:bodyPr wrap="none" lIns="0" tIns="0" rIns="0" bIns="0" anchor="t" anchorCtr="0">
+              <a:spAutoFit/>
+            </a:bodyPr>
+            <a:lstStyle/>
+            <a:p>
+              <a:pPr algn="l"/>
+              <a:r>
+                <a:rPr lang="ja-JP" sz="1880" b="1" dirty="0">
+                  <a:solidFill>
+                    <a:srgbClr val="202C29"/>
+                  </a:solidFill>
+                  <a:latin typeface="+mn-lt"/>
+                  <a:ea typeface="+mn-ea"/>
+                  <a:cs typeface="+mn-cs"/>
+                </a:rPr>
+                <a:t>投資決裁</a:t>
+              </a:r>
+            </a:p>
+          </p:txBody>
+        </p:sp>
+        <p:sp>
+          <p:nvSpPr>
+            <p:cNvPr id="11" name="TextBox 11"/>
+            <p:cNvSpPr txBox="1"/>
+            <p:nvPr/>
+          </p:nvSpPr>
+          <p:spPr>
+            <a:xfrm>
+              <a:off x="601980" y="4756150"/>
+              <a:ext cx="411164" cy="293370"/>
+            </a:xfrm>
+            <a:prstGeom prst="rect">
+              <a:avLst/>
+            </a:prstGeom>
+            <a:noFill/>
+            <a:ln>
+              <a:noFill/>
+            </a:ln>
+          </p:spPr>
+          <p:txBody>
+            <a:bodyPr wrap="none" lIns="0" tIns="0" rIns="0" bIns="0" anchor="t" anchorCtr="0">
+              <a:spAutoFit/>
+            </a:bodyPr>
+            <a:lstStyle/>
+            <a:p>
+              <a:pPr algn="l"/>
+              <a:r>
+                <a:rPr lang="ja-JP" sz="1500" dirty="0">
+                  <a:solidFill>
+                    <a:srgbClr val="53675E"/>
+                  </a:solidFill>
+                  <a:latin typeface="+mn-lt"/>
+                  <a:ea typeface="+mn-ea"/>
+                  <a:cs typeface="+mn-cs"/>
+                </a:rPr>
+                <a:t>5週</a:t>
+              </a:r>
+            </a:p>
+          </p:txBody>
+        </p:sp>
+        <p:grpSp>
+          <p:nvGrpSpPr>
+            <p:cNvPr id="31" name="decision-schedule-chartArea"/>
+            <p:cNvGrpSpPr/>
+            <p:nvPr/>
+          </p:nvGrpSpPr>
+          <p:grpSpPr>
+            <a:xfrm>
+              <a:off x="2870073" y="2133600"/>
+              <a:ext cx="8748629" cy="2800350"/>
+              <a:chOff x="2870073" y="2133600"/>
+              <a:chExt cx="8748629" cy="2800350"/>
+            </a:xfrm>
+          </p:grpSpPr>
+          <p:sp>
+            <p:nvSpPr>
+              <p:cNvPr id="12" name="Rectangle 12"/>
+              <p:cNvSpPr/>
+              <p:nvPr/>
+            </p:nvSpPr>
+            <p:spPr>
+              <a:xfrm>
+                <a:off x="2952750" y="2381250"/>
+                <a:ext cx="8429625" cy="19050"/>
+              </a:xfrm>
+              <a:prstGeom prst="rect">
+                <a:avLst/>
+              </a:prstGeom>
+              <a:solidFill>
+                <a:srgbClr val="53675E"/>
+              </a:solidFill>
+              <a:ln>
+                <a:noFill/>
+              </a:ln>
+            </p:spPr>
+          </p:sp>
+          <p:sp>
+            <p:nvSpPr>
+              <p:cNvPr id="13" name="Rectangle 13"/>
+              <p:cNvSpPr/>
+              <p:nvPr/>
+            </p:nvSpPr>
+            <p:spPr>
+              <a:xfrm>
+                <a:off x="2952750" y="2381250"/>
+                <a:ext cx="9525" cy="2476500"/>
+              </a:xfrm>
+              <a:prstGeom prst="rect">
+                <a:avLst/>
+              </a:prstGeom>
+              <a:solidFill>
+                <a:srgbClr val="CAD5CC"/>
+              </a:solidFill>
+              <a:ln>
+                <a:noFill/>
+              </a:ln>
+            </p:spPr>
+          </p:sp>
+          <p:sp>
+            <p:nvSpPr>
+              <p:cNvPr id="14" name="TextBox 14"/>
+              <p:cNvSpPr txBox="1"/>
+              <p:nvPr/>
+            </p:nvSpPr>
+            <p:spPr>
+              <a:xfrm>
+                <a:off x="2870073" y="2133600"/>
+                <a:ext cx="390525" cy="250317"/>
+              </a:xfrm>
+              <a:prstGeom prst="rect">
+                <a:avLst/>
+              </a:prstGeom>
+              <a:noFill/>
+              <a:ln>
+                <a:noFill/>
+              </a:ln>
+            </p:spPr>
+            <p:txBody>
+              <a:bodyPr wrap="none" lIns="0" tIns="0" rIns="0" bIns="0" anchor="t" anchorCtr="0">
+                <a:spAutoFit/>
+              </a:bodyPr>
+              <a:lstStyle/>
+              <a:p>
+                <a:pPr algn="l"/>
+                <a:r>
+                  <a:rPr lang="ja-JP" sz="1280" dirty="0">
+                    <a:solidFill>
+                      <a:srgbClr val="53675E"/>
+                    </a:solidFill>
+                    <a:latin typeface="+mn-lt"/>
+                    <a:ea typeface="+mn-ea"/>
+                    <a:cs typeface="+mn-cs"/>
+                  </a:rPr>
+                  <a:t>開始</a:t>
+                </a:r>
+              </a:p>
+            </p:txBody>
+          </p:sp>
+          <p:sp>
+            <p:nvSpPr>
+              <p:cNvPr id="15" name="Rectangle 15"/>
+              <p:cNvSpPr/>
+              <p:nvPr/>
+            </p:nvSpPr>
+            <p:spPr>
+              <a:xfrm>
+                <a:off x="4638675" y="2381250"/>
+                <a:ext cx="9525" cy="2476500"/>
+              </a:xfrm>
+              <a:prstGeom prst="rect">
+                <a:avLst/>
+              </a:prstGeom>
+              <a:solidFill>
+                <a:srgbClr val="CAD5CC"/>
+              </a:solidFill>
+              <a:ln>
+                <a:noFill/>
+              </a:ln>
+            </p:spPr>
+          </p:sp>
+          <p:sp>
+            <p:nvSpPr>
+              <p:cNvPr id="16" name="TextBox 16"/>
+              <p:cNvSpPr txBox="1"/>
+              <p:nvPr/>
+            </p:nvSpPr>
+            <p:spPr>
+              <a:xfrm>
+                <a:off x="4422648" y="2133600"/>
+                <a:ext cx="493714" cy="250317"/>
+              </a:xfrm>
+              <a:prstGeom prst="rect">
+                <a:avLst/>
+              </a:prstGeom>
+              <a:noFill/>
+              <a:ln>
+                <a:noFill/>
+              </a:ln>
+            </p:spPr>
+            <p:txBody>
+              <a:bodyPr wrap="none" lIns="0" tIns="0" rIns="0" bIns="0" anchor="t" anchorCtr="0">
+                <a:spAutoFit/>
+              </a:bodyPr>
+              <a:lstStyle/>
+              <a:p>
+                <a:pPr algn="l"/>
+                <a:r>
+                  <a:rPr lang="ja-JP" sz="1280" dirty="0">
+                    <a:solidFill>
+                      <a:srgbClr val="53675E"/>
+                    </a:solidFill>
+                    <a:latin typeface="+mn-lt"/>
+                    <a:ea typeface="+mn-ea"/>
+                    <a:cs typeface="+mn-cs"/>
+                  </a:rPr>
+                  <a:t>1週末</a:t>
+                </a:r>
+              </a:p>
+            </p:txBody>
+          </p:sp>
+          <p:sp>
+            <p:nvSpPr>
+              <p:cNvPr id="17" name="Rectangle 17"/>
+              <p:cNvSpPr/>
+              <p:nvPr/>
+            </p:nvSpPr>
+            <p:spPr>
+              <a:xfrm>
+                <a:off x="6324600" y="2381250"/>
+                <a:ext cx="9525" cy="2476500"/>
+              </a:xfrm>
+              <a:prstGeom prst="rect">
+                <a:avLst/>
+              </a:prstGeom>
+              <a:solidFill>
+                <a:srgbClr val="CAD5CC"/>
+              </a:solidFill>
+              <a:ln>
+                <a:noFill/>
+              </a:ln>
+            </p:spPr>
+          </p:sp>
+          <p:sp>
+            <p:nvSpPr>
+              <p:cNvPr id="18" name="TextBox 18"/>
+              <p:cNvSpPr txBox="1"/>
+              <p:nvPr/>
+            </p:nvSpPr>
+            <p:spPr>
+              <a:xfrm>
+                <a:off x="6108573" y="2133600"/>
+                <a:ext cx="514351" cy="250317"/>
+              </a:xfrm>
+              <a:prstGeom prst="rect">
+                <a:avLst/>
+              </a:prstGeom>
+              <a:noFill/>
+              <a:ln>
+                <a:noFill/>
+              </a:ln>
+            </p:spPr>
+            <p:txBody>
+              <a:bodyPr wrap="none" lIns="0" tIns="0" rIns="0" bIns="0" anchor="t" anchorCtr="0">
+                <a:spAutoFit/>
+              </a:bodyPr>
+              <a:lstStyle/>
+              <a:p>
+                <a:pPr algn="l"/>
+                <a:r>
+                  <a:rPr lang="ja-JP" sz="1280" dirty="0">
+                    <a:solidFill>
+                      <a:srgbClr val="53675E"/>
+                    </a:solidFill>
+                    <a:latin typeface="+mn-lt"/>
+                    <a:ea typeface="+mn-ea"/>
+                    <a:cs typeface="+mn-cs"/>
+                  </a:rPr>
+                  <a:t>2週末</a:t>
+                </a:r>
+              </a:p>
+            </p:txBody>
+          </p:sp>
+          <p:sp>
+            <p:nvSpPr>
+              <p:cNvPr id="19" name="Rectangle 19"/>
+              <p:cNvSpPr/>
+              <p:nvPr/>
+            </p:nvSpPr>
+            <p:spPr>
+              <a:xfrm>
+                <a:off x="8010525" y="2381250"/>
+                <a:ext cx="9525" cy="2476500"/>
+              </a:xfrm>
+              <a:prstGeom prst="rect">
+                <a:avLst/>
+              </a:prstGeom>
+              <a:solidFill>
+                <a:srgbClr val="CAD5CC"/>
+              </a:solidFill>
+              <a:ln>
+                <a:noFill/>
+              </a:ln>
+            </p:spPr>
+          </p:sp>
+          <p:sp>
+            <p:nvSpPr>
+              <p:cNvPr id="20" name="TextBox 20"/>
+              <p:cNvSpPr txBox="1"/>
+              <p:nvPr/>
+            </p:nvSpPr>
+            <p:spPr>
+              <a:xfrm>
+                <a:off x="7794498" y="2133600"/>
+                <a:ext cx="514351" cy="250317"/>
+              </a:xfrm>
+              <a:prstGeom prst="rect">
+                <a:avLst/>
+              </a:prstGeom>
+              <a:noFill/>
+              <a:ln>
+                <a:noFill/>
+              </a:ln>
+            </p:spPr>
+            <p:txBody>
+              <a:bodyPr wrap="none" lIns="0" tIns="0" rIns="0" bIns="0" anchor="t" anchorCtr="0">
+                <a:spAutoFit/>
+              </a:bodyPr>
+              <a:lstStyle/>
+              <a:p>
+                <a:pPr algn="l"/>
+                <a:r>
+                  <a:rPr lang="ja-JP" sz="1280" dirty="0">
+                    <a:solidFill>
+                      <a:srgbClr val="53675E"/>
+                    </a:solidFill>
+                    <a:latin typeface="+mn-lt"/>
+                    <a:ea typeface="+mn-ea"/>
+                    <a:cs typeface="+mn-cs"/>
+                  </a:rPr>
+                  <a:t>3週末</a:t>
+                </a:r>
+              </a:p>
+            </p:txBody>
+          </p:sp>
+          <p:sp>
+            <p:nvSpPr>
+              <p:cNvPr id="21" name="Rectangle 21"/>
+              <p:cNvSpPr/>
+              <p:nvPr/>
+            </p:nvSpPr>
+            <p:spPr>
+              <a:xfrm>
+                <a:off x="9696450" y="2381250"/>
+                <a:ext cx="9525" cy="2476500"/>
+              </a:xfrm>
+              <a:prstGeom prst="rect">
+                <a:avLst/>
+              </a:prstGeom>
+              <a:solidFill>
+                <a:srgbClr val="CAD5CC"/>
+              </a:solidFill>
+              <a:ln>
+                <a:noFill/>
+              </a:ln>
+            </p:spPr>
+          </p:sp>
+          <p:sp>
+            <p:nvSpPr>
+              <p:cNvPr id="22" name="TextBox 22"/>
+              <p:cNvSpPr txBox="1"/>
+              <p:nvPr/>
+            </p:nvSpPr>
+            <p:spPr>
+              <a:xfrm>
+                <a:off x="9480423" y="2133600"/>
+                <a:ext cx="514351" cy="250317"/>
+              </a:xfrm>
+              <a:prstGeom prst="rect">
+                <a:avLst/>
+              </a:prstGeom>
+              <a:noFill/>
+              <a:ln>
+                <a:noFill/>
+              </a:ln>
+            </p:spPr>
+            <p:txBody>
+              <a:bodyPr wrap="none" lIns="0" tIns="0" rIns="0" bIns="0" anchor="t" anchorCtr="0">
+                <a:spAutoFit/>
+              </a:bodyPr>
+              <a:lstStyle/>
+              <a:p>
+                <a:pPr algn="l"/>
+                <a:r>
+                  <a:rPr lang="ja-JP" sz="1280" dirty="0">
+                    <a:solidFill>
+                      <a:srgbClr val="53675E"/>
+                    </a:solidFill>
+                    <a:latin typeface="+mn-lt"/>
+                    <a:ea typeface="+mn-ea"/>
+                    <a:cs typeface="+mn-cs"/>
+                  </a:rPr>
+                  <a:t>4週末</a:t>
+                </a:r>
+              </a:p>
+            </p:txBody>
+          </p:sp>
+          <p:sp>
+            <p:nvSpPr>
+              <p:cNvPr id="23" name="Rectangle 23"/>
+              <p:cNvSpPr/>
+              <p:nvPr/>
+            </p:nvSpPr>
+            <p:spPr>
+              <a:xfrm>
+                <a:off x="11382375" y="2381250"/>
+                <a:ext cx="9525" cy="2476500"/>
+              </a:xfrm>
+              <a:prstGeom prst="rect">
+                <a:avLst/>
+              </a:prstGeom>
+              <a:solidFill>
+                <a:srgbClr val="CAD5CC"/>
+              </a:solidFill>
+              <a:ln>
+                <a:noFill/>
+              </a:ln>
+            </p:spPr>
+          </p:sp>
+          <p:sp>
+            <p:nvSpPr>
+              <p:cNvPr id="24" name="TextBox 24"/>
+              <p:cNvSpPr txBox="1"/>
+              <p:nvPr/>
+            </p:nvSpPr>
+            <p:spPr>
+              <a:xfrm>
+                <a:off x="11166348" y="2133600"/>
+                <a:ext cx="514351" cy="250317"/>
+              </a:xfrm>
+              <a:prstGeom prst="rect">
+                <a:avLst/>
+              </a:prstGeom>
+              <a:noFill/>
+              <a:ln>
+                <a:noFill/>
+              </a:ln>
+            </p:spPr>
+            <p:txBody>
+              <a:bodyPr wrap="none" lIns="0" tIns="0" rIns="0" bIns="0" anchor="t" anchorCtr="0">
+                <a:spAutoFit/>
+              </a:bodyPr>
+              <a:lstStyle/>
+              <a:p>
+                <a:pPr algn="l"/>
+                <a:r>
+                  <a:rPr lang="ja-JP" sz="1280" dirty="0">
+                    <a:solidFill>
+                      <a:srgbClr val="53675E"/>
+                    </a:solidFill>
+                    <a:latin typeface="+mn-lt"/>
+                    <a:ea typeface="+mn-ea"/>
+                    <a:cs typeface="+mn-cs"/>
+                  </a:rPr>
+                  <a:t>5週末</a:t>
+                </a:r>
+              </a:p>
+            </p:txBody>
+          </p:sp>
+          <p:sp>
+            <p:nvSpPr>
+              <p:cNvPr id="25" name="Rectangle 25"/>
+              <p:cNvSpPr/>
+              <p:nvPr/>
+            </p:nvSpPr>
+            <p:spPr>
+              <a:xfrm>
+                <a:off x="2952750" y="2762250"/>
+                <a:ext cx="3371850" cy="419100"/>
+              </a:xfrm>
+              <a:prstGeom prst="rect">
+                <a:avLst/>
+              </a:prstGeom>
+              <a:solidFill>
+                <a:srgbClr val="21654C"/>
+              </a:solidFill>
+              <a:ln>
+                <a:noFill/>
+              </a:ln>
+            </p:spPr>
+          </p:sp>
+          <p:sp>
+            <p:nvSpPr>
+              <p:cNvPr id="26" name="TextBox 26"/>
+              <p:cNvSpPr txBox="1"/>
+              <p:nvPr/>
+            </p:nvSpPr>
+            <p:spPr>
+              <a:xfrm>
+                <a:off x="3096387" y="2832100"/>
+                <a:ext cx="828675" cy="337376"/>
+              </a:xfrm>
+              <a:prstGeom prst="rect">
+                <a:avLst/>
+              </a:prstGeom>
+              <a:noFill/>
+              <a:ln>
+                <a:noFill/>
+              </a:ln>
+            </p:spPr>
+            <p:txBody>
+              <a:bodyPr wrap="none" lIns="0" tIns="0" rIns="0" bIns="0" anchor="t" anchorCtr="0">
+                <a:spAutoFit/>
+              </a:bodyPr>
+              <a:lstStyle/>
+              <a:p>
+                <a:pPr algn="l"/>
+                <a:r>
+                  <a:rPr lang="ja-JP" sz="1720" b="1" dirty="0">
+                    <a:solidFill>
+                      <a:srgbClr val="FFFFFF"/>
+                    </a:solidFill>
+                    <a:latin typeface="+mn-lt"/>
+                    <a:ea typeface="+mn-ea"/>
+                    <a:cs typeface="+mn-cs"/>
+                  </a:rPr>
+                  <a:t>1〜2週</a:t>
+                </a:r>
+              </a:p>
+            </p:txBody>
+          </p:sp>
+          <p:sp>
+            <p:nvSpPr>
+              <p:cNvPr id="27" name="Rectangle 27"/>
+              <p:cNvSpPr/>
+              <p:nvPr/>
+            </p:nvSpPr>
+            <p:spPr>
+              <a:xfrm>
+                <a:off x="6324600" y="3638550"/>
+                <a:ext cx="3371850" cy="419100"/>
+              </a:xfrm>
+              <a:prstGeom prst="rect">
+                <a:avLst/>
+              </a:prstGeom>
+              <a:solidFill>
+                <a:srgbClr val="21654C"/>
+              </a:solidFill>
+              <a:ln>
+                <a:noFill/>
+              </a:ln>
+            </p:spPr>
+          </p:sp>
+          <p:sp>
+            <p:nvSpPr>
+              <p:cNvPr id="28" name="TextBox 28"/>
+              <p:cNvSpPr txBox="1"/>
+              <p:nvPr/>
+            </p:nvSpPr>
+            <p:spPr>
+              <a:xfrm>
+                <a:off x="6468237" y="3708400"/>
+                <a:ext cx="857250" cy="337376"/>
+              </a:xfrm>
+              <a:prstGeom prst="rect">
+                <a:avLst/>
+              </a:prstGeom>
+              <a:noFill/>
+              <a:ln>
+                <a:noFill/>
+              </a:ln>
+            </p:spPr>
+            <p:txBody>
+              <a:bodyPr wrap="none" lIns="0" tIns="0" rIns="0" bIns="0" anchor="t" anchorCtr="0">
+                <a:spAutoFit/>
+              </a:bodyPr>
+              <a:lstStyle/>
+              <a:p>
+                <a:pPr algn="l"/>
+                <a:r>
+                  <a:rPr lang="ja-JP" sz="1720" b="1" dirty="0">
+                    <a:solidFill>
+                      <a:srgbClr val="FFFFFF"/>
+                    </a:solidFill>
+                    <a:latin typeface="+mn-lt"/>
+                    <a:ea typeface="+mn-ea"/>
+                    <a:cs typeface="+mn-cs"/>
+                  </a:rPr>
+                  <a:t>3〜4週</a:t>
+                </a:r>
+              </a:p>
+            </p:txBody>
+          </p:sp>
+          <p:sp>
+            <p:nvSpPr>
+              <p:cNvPr id="29" name="Rectangle 29"/>
+              <p:cNvSpPr/>
+              <p:nvPr/>
+            </p:nvSpPr>
+            <p:spPr>
+              <a:xfrm>
+                <a:off x="9696450" y="4514850"/>
+                <a:ext cx="1685925" cy="419100"/>
+              </a:xfrm>
+              <a:prstGeom prst="rect">
+                <a:avLst/>
+              </a:prstGeom>
+              <a:solidFill>
+                <a:srgbClr val="21654C"/>
+              </a:solidFill>
+              <a:ln>
+                <a:noFill/>
+              </a:ln>
+            </p:spPr>
+          </p:sp>
+          <p:sp>
+            <p:nvSpPr>
+              <p:cNvPr id="30" name="TextBox 30"/>
+              <p:cNvSpPr txBox="1"/>
+              <p:nvPr/>
+            </p:nvSpPr>
+            <p:spPr>
+              <a:xfrm>
+                <a:off x="9840087" y="4584700"/>
+                <a:ext cx="471488" cy="337376"/>
+              </a:xfrm>
+              <a:prstGeom prst="rect">
+                <a:avLst/>
+              </a:prstGeom>
+              <a:noFill/>
+              <a:ln>
+                <a:noFill/>
+              </a:ln>
+            </p:spPr>
+            <p:txBody>
+              <a:bodyPr wrap="none" lIns="0" tIns="0" rIns="0" bIns="0" anchor="t" anchorCtr="0">
+                <a:spAutoFit/>
+              </a:bodyPr>
+              <a:lstStyle/>
+              <a:p>
+                <a:pPr algn="l"/>
+                <a:r>
+                  <a:rPr lang="ja-JP" sz="1720" b="1" dirty="0">
+                    <a:solidFill>
+                      <a:srgbClr val="FFFFFF"/>
+                    </a:solidFill>
+                    <a:latin typeface="+mn-lt"/>
+                    <a:ea typeface="+mn-ea"/>
+                    <a:cs typeface="+mn-cs"/>
+                  </a:rPr>
+                  <a:t>5週</a:t>
+                </a:r>
+              </a:p>
+            </p:txBody>
+          </p:sp>
+        </p:grpSp>
+        <p:sp>
+          <p:nvSpPr>
+            <p:cNvPr id="32" name="TextBox 32"/>
+            <p:cNvSpPr txBox="1"/>
+            <p:nvPr/>
+          </p:nvSpPr>
+          <p:spPr>
+            <a:xfrm>
+              <a:off x="601218" y="5187950"/>
+              <a:ext cx="6680454" cy="322707"/>
+            </a:xfrm>
+            <a:prstGeom prst="rect">
+              <a:avLst/>
+            </a:prstGeom>
+            <a:noFill/>
+            <a:ln>
+              <a:noFill/>
+            </a:ln>
+          </p:spPr>
+          <p:txBody>
+            <a:bodyPr wrap="none" lIns="0" tIns="0" rIns="0" bIns="0" anchor="t" anchorCtr="0">
+              <a:spAutoFit/>
+            </a:bodyPr>
+            <a:lstStyle/>
+            <a:p>
+              <a:pPr algn="l"/>
+              <a:r>
+                <a:rPr lang="ja-JP" sz="1650" dirty="0">
+                  <a:solidFill>
+                    <a:srgbClr val="202C29"/>
+                  </a:solidFill>
+                  <a:latin typeface="+mn-lt"/>
+                  <a:ea typeface="+mn-ea"/>
+                  <a:cs typeface="+mn-cs"/>
+                </a:rPr>
+                <a:t>担当：調査は既存店長、運営設計は新店候補店長、決裁は経営者。</a:t>
+              </a:r>
+            </a:p>
+          </p:txBody>
+        </p:sp>
+        <p:sp>
+          <p:nvSpPr>
+            <p:cNvPr id="33" name="Rectangle 33"/>
             <p:cNvSpPr/>
             <p:nvPr/>
           </p:nvSpPr>
           <p:spPr>
             <a:xfrm>
-              <a:off x="1000125" y="3524250"/>
-              <a:ext cx="9667875" cy="38100"/>
+              <a:off x="609600" y="5591175"/>
+              <a:ext cx="10953750" cy="19050"/>
             </a:xfrm>
             <a:prstGeom prst="rect">
               <a:avLst/>
             </a:prstGeom>
             <a:solidFill>
-              <a:srgbClr val="21654C"/>
+              <a:srgbClr val="CAD5CC"/>
             </a:solidFill>
             <a:ln>
               <a:noFill/>
@@ -5686,320 +7652,40 @@
         </p:sp>
         <p:sp>
           <p:nvSpPr>
-            <p:cNvPr id="6" name="TextBox 6"/>
-            <p:cNvSpPr txBox="1"/>
-            <p:nvPr/>
-          </p:nvSpPr>
-          <p:spPr>
-            <a:xfrm>
-              <a:off x="598932" y="2032000"/>
-              <a:ext cx="897712" cy="410718"/>
-            </a:xfrm>
-            <a:prstGeom prst="rect">
-              <a:avLst/>
-            </a:prstGeom>
-            <a:noFill/>
-            <a:ln>
-              <a:noFill/>
-            </a:ln>
-          </p:spPr>
-          <p:txBody>
-            <a:bodyPr wrap="none" lIns="0" tIns="0" rIns="0" bIns="0" anchor="t" anchorCtr="0">
-              <a:spAutoFit/>
-            </a:bodyPr>
-            <a:lstStyle/>
-            <a:p>
-              <a:pPr algn="l"/>
-              <a:r>
-                <a:rPr lang="ja-JP" sz="2100" dirty="0">
-                  <a:solidFill>
-                    <a:srgbClr val="202C29"/>
-                  </a:solidFill>
-                  <a:latin typeface="+mn-lt"/>
-                  <a:ea typeface="+mn-ea"/>
-                  <a:cs typeface="+mn-cs"/>
-                </a:rPr>
-                <a:t>1〜2週</a:t>
-              </a:r>
-            </a:p>
-          </p:txBody>
-        </p:sp>
-        <p:sp>
-          <p:nvSpPr>
-            <p:cNvPr id="7" name="TextBox 7"/>
-            <p:cNvSpPr txBox="1"/>
-            <p:nvPr/>
-          </p:nvSpPr>
-          <p:spPr>
-            <a:xfrm>
-              <a:off x="598932" y="2517775"/>
-              <a:ext cx="1152144" cy="410718"/>
-            </a:xfrm>
-            <a:prstGeom prst="rect">
-              <a:avLst/>
-            </a:prstGeom>
-            <a:noFill/>
-            <a:ln>
-              <a:noFill/>
-            </a:ln>
-          </p:spPr>
-          <p:txBody>
-            <a:bodyPr wrap="none" lIns="0" tIns="0" rIns="0" bIns="0" anchor="t" anchorCtr="0">
-              <a:spAutoFit/>
-            </a:bodyPr>
-            <a:lstStyle/>
-            <a:p>
-              <a:pPr algn="l"/>
-              <a:r>
-                <a:rPr lang="ja-JP" sz="2100" dirty="0">
-                  <a:solidFill>
-                    <a:srgbClr val="202C29"/>
-                  </a:solidFill>
-                  <a:latin typeface="+mn-lt"/>
-                  <a:ea typeface="+mn-ea"/>
-                  <a:cs typeface="+mn-cs"/>
-                </a:rPr>
-                <a:t>現地調査</a:t>
-              </a:r>
-            </a:p>
-          </p:txBody>
-        </p:sp>
-        <p:sp>
-          <p:nvSpPr>
-            <p:cNvPr id="8" name="TextBox 8"/>
-            <p:cNvSpPr txBox="1"/>
-            <p:nvPr/>
-          </p:nvSpPr>
-          <p:spPr>
-            <a:xfrm>
-              <a:off x="3427857" y="2032000"/>
-              <a:ext cx="897712" cy="410718"/>
-            </a:xfrm>
-            <a:prstGeom prst="rect">
-              <a:avLst/>
-            </a:prstGeom>
-            <a:noFill/>
-            <a:ln>
-              <a:noFill/>
-            </a:ln>
-          </p:spPr>
-          <p:txBody>
-            <a:bodyPr wrap="none" lIns="0" tIns="0" rIns="0" bIns="0" anchor="t" anchorCtr="0">
-              <a:spAutoFit/>
-            </a:bodyPr>
-            <a:lstStyle/>
-            <a:p>
-              <a:pPr algn="l"/>
-              <a:r>
-                <a:rPr lang="ja-JP" sz="2100" dirty="0">
-                  <a:solidFill>
-                    <a:srgbClr val="202C29"/>
-                  </a:solidFill>
-                  <a:latin typeface="+mn-lt"/>
-                  <a:ea typeface="+mn-ea"/>
-                  <a:cs typeface="+mn-cs"/>
-                </a:rPr>
-                <a:t>3〜4週</a:t>
-              </a:r>
-            </a:p>
-          </p:txBody>
-        </p:sp>
-        <p:sp>
-          <p:nvSpPr>
-            <p:cNvPr id="9" name="TextBox 9"/>
-            <p:cNvSpPr txBox="1"/>
-            <p:nvPr/>
-          </p:nvSpPr>
-          <p:spPr>
-            <a:xfrm>
-              <a:off x="3427857" y="2517775"/>
-              <a:ext cx="2000250" cy="410718"/>
-            </a:xfrm>
-            <a:prstGeom prst="rect">
-              <a:avLst/>
-            </a:prstGeom>
-            <a:noFill/>
-            <a:ln>
-              <a:noFill/>
-            </a:ln>
-          </p:spPr>
-          <p:txBody>
-            <a:bodyPr wrap="none" lIns="0" tIns="0" rIns="0" bIns="0" anchor="t" anchorCtr="0">
-              <a:spAutoFit/>
-            </a:bodyPr>
-            <a:lstStyle/>
-            <a:p>
-              <a:pPr algn="l"/>
-              <a:r>
-                <a:rPr lang="ja-JP" sz="2100" dirty="0">
-                  <a:solidFill>
-                    <a:srgbClr val="202C29"/>
-                  </a:solidFill>
-                  <a:latin typeface="+mn-lt"/>
-                  <a:ea typeface="+mn-ea"/>
-                  <a:cs typeface="+mn-cs"/>
-                </a:rPr>
-                <a:t>見積・条件交渉</a:t>
-              </a:r>
-            </a:p>
-          </p:txBody>
-        </p:sp>
-        <p:sp>
-          <p:nvSpPr>
-            <p:cNvPr id="10" name="TextBox 10"/>
-            <p:cNvSpPr txBox="1"/>
-            <p:nvPr/>
-          </p:nvSpPr>
-          <p:spPr>
-            <a:xfrm>
-              <a:off x="6894957" y="2032000"/>
-              <a:ext cx="459524" cy="410718"/>
-            </a:xfrm>
-            <a:prstGeom prst="rect">
-              <a:avLst/>
-            </a:prstGeom>
-            <a:noFill/>
-            <a:ln>
-              <a:noFill/>
-            </a:ln>
-          </p:spPr>
-          <p:txBody>
-            <a:bodyPr wrap="none" lIns="0" tIns="0" rIns="0" bIns="0" anchor="t" anchorCtr="0">
-              <a:spAutoFit/>
-            </a:bodyPr>
-            <a:lstStyle/>
-            <a:p>
-              <a:pPr algn="l"/>
-              <a:r>
-                <a:rPr lang="ja-JP" sz="2100" dirty="0">
-                  <a:solidFill>
-                    <a:srgbClr val="202C29"/>
-                  </a:solidFill>
-                  <a:latin typeface="+mn-lt"/>
-                  <a:ea typeface="+mn-ea"/>
-                  <a:cs typeface="+mn-cs"/>
-                </a:rPr>
-                <a:t>5週</a:t>
-              </a:r>
-            </a:p>
-          </p:txBody>
-        </p:sp>
-        <p:sp>
-          <p:nvSpPr>
-            <p:cNvPr id="11" name="TextBox 11"/>
-            <p:cNvSpPr txBox="1"/>
-            <p:nvPr/>
-          </p:nvSpPr>
-          <p:spPr>
-            <a:xfrm>
-              <a:off x="6894957" y="2517775"/>
-              <a:ext cx="1152144" cy="410718"/>
-            </a:xfrm>
-            <a:prstGeom prst="rect">
-              <a:avLst/>
-            </a:prstGeom>
-            <a:noFill/>
-            <a:ln>
-              <a:noFill/>
-            </a:ln>
-          </p:spPr>
-          <p:txBody>
-            <a:bodyPr wrap="none" lIns="0" tIns="0" rIns="0" bIns="0" anchor="t" anchorCtr="0">
-              <a:spAutoFit/>
-            </a:bodyPr>
-            <a:lstStyle/>
-            <a:p>
-              <a:pPr algn="l"/>
-              <a:r>
-                <a:rPr lang="ja-JP" sz="2100" dirty="0">
-                  <a:solidFill>
-                    <a:srgbClr val="202C29"/>
-                  </a:solidFill>
-                  <a:latin typeface="+mn-lt"/>
-                  <a:ea typeface="+mn-ea"/>
-                  <a:cs typeface="+mn-cs"/>
-                </a:rPr>
-                <a:t>投資決裁</a:t>
-              </a:r>
-            </a:p>
-          </p:txBody>
-        </p:sp>
-        <p:sp>
-          <p:nvSpPr>
-            <p:cNvPr id="12" name="TextBox 12"/>
-            <p:cNvSpPr txBox="1"/>
-            <p:nvPr/>
-          </p:nvSpPr>
-          <p:spPr>
-            <a:xfrm>
-              <a:off x="599694" y="4378325"/>
-              <a:ext cx="3694938" cy="381381"/>
-            </a:xfrm>
-            <a:prstGeom prst="rect">
-              <a:avLst/>
-            </a:prstGeom>
-            <a:noFill/>
-            <a:ln>
-              <a:noFill/>
-            </a:ln>
-          </p:spPr>
-          <p:txBody>
-            <a:bodyPr wrap="none" lIns="0" tIns="0" rIns="0" bIns="0" anchor="t" anchorCtr="0">
-              <a:spAutoFit/>
-            </a:bodyPr>
-            <a:lstStyle/>
-            <a:p>
-              <a:pPr algn="l"/>
-              <a:r>
-                <a:rPr lang="ja-JP" sz="1950" dirty="0">
-                  <a:solidFill>
-                    <a:srgbClr val="202C29"/>
-                  </a:solidFill>
-                  <a:latin typeface="+mn-lt"/>
-                  <a:ea typeface="+mn-ea"/>
-                  <a:cs typeface="+mn-cs"/>
-                </a:rPr>
-                <a:t>決裁後：内装・採用・開業準備</a:t>
-              </a:r>
-            </a:p>
-          </p:txBody>
-        </p:sp>
-        <p:sp>
-          <p:nvSpPr>
-            <p:cNvPr id="13" name="TextBox 13"/>
-            <p:cNvSpPr txBox="1"/>
-            <p:nvPr/>
-          </p:nvSpPr>
-          <p:spPr>
-            <a:xfrm>
-              <a:off x="599694" y="5006975"/>
-              <a:ext cx="7632573" cy="381381"/>
-            </a:xfrm>
-            <a:prstGeom prst="rect">
-              <a:avLst/>
-            </a:prstGeom>
-            <a:noFill/>
-            <a:ln>
-              <a:noFill/>
-            </a:ln>
-          </p:spPr>
-          <p:txBody>
-            <a:bodyPr wrap="none" lIns="0" tIns="0" rIns="0" bIns="0" anchor="t" anchorCtr="0">
-              <a:spAutoFit/>
-            </a:bodyPr>
-            <a:lstStyle/>
-            <a:p>
-              <a:pPr algn="l"/>
-              <a:r>
-                <a:rPr lang="ja-JP" sz="1950" dirty="0">
-                  <a:solidFill>
-                    <a:srgbClr val="202C29"/>
-                  </a:solidFill>
-                  <a:latin typeface="+mn-lt"/>
-                  <a:ea typeface="+mn-ea"/>
-                  <a:cs typeface="+mn-cs"/>
-                </a:rPr>
-                <a:t>担当：既存店長が調査、新店候補店長が運営設計、経営者が決裁</a:t>
+            <p:cNvPr id="34" name="TextBox 34"/>
+            <p:cNvSpPr txBox="1"/>
+            <p:nvPr/>
+          </p:nvSpPr>
+          <p:spPr>
+            <a:xfrm>
+              <a:off x="600075" y="5724525"/>
+              <a:ext cx="7864704" cy="367665"/>
+            </a:xfrm>
+            <a:prstGeom prst="rect">
+              <a:avLst/>
+            </a:prstGeom>
+            <a:noFill/>
+            <a:ln>
+              <a:noFill/>
+            </a:ln>
+          </p:spPr>
+          <p:txBody>
+            <a:bodyPr wrap="none" lIns="0" tIns="0" rIns="0" bIns="0" anchor="t" anchorCtr="0">
+              <a:spAutoFit/>
+            </a:bodyPr>
+            <a:lstStyle/>
+            <a:p>
+              <a:pPr algn="l"/>
+              <a:r>
+                <a:rPr lang="ja-JP" sz="1880" b="1" dirty="0">
+                  <a:solidFill>
+                    <a:srgbClr val="21654C"/>
+                  </a:solidFill>
+                  <a:latin typeface="+mn-lt"/>
+                  <a:ea typeface="+mn-ea"/>
+                  <a:cs typeface="+mn-cs"/>
+                </a:rPr>
+                <a:t>決裁後：内装・採用・開業準備　／　開業日はここでは確定しない。</a:t>
               </a:r>
             </a:p>
           </p:txBody>
@@ -6007,7 +7693,7 @@
       </p:grpSp>
       <p:grpSp>
         <p:nvGrpSpPr>
-          <p:cNvPr id="17" name="footer"/>
+          <p:cNvPr id="38" name="footer"/>
           <p:cNvGrpSpPr/>
           <p:nvPr/>
         </p:nvGrpSpPr>
@@ -6021,7 +7707,7 @@
         </p:grpSpPr>
         <p:sp>
           <p:nvSpPr>
-            <p:cNvPr id="15" name="TextBox 15"/>
+            <p:cNvPr id="36" name="TextBox 36"/>
             <p:cNvSpPr txBox="1"/>
             <p:nvPr/>
           </p:nvSpPr>
@@ -6061,14 +7747,14 @@
         </p:sp>
         <p:sp>
           <p:nvSpPr>
-            <p:cNvPr id="16" name="TextBox 16"/>
+            <p:cNvPr id="37" name="TextBox 37"/>
             <p:cNvSpPr txBox="1"/>
             <p:nvPr/>
           </p:nvSpPr>
           <p:spPr>
             <a:xfrm>
               <a:off x="10614279" y="6315075"/>
-              <a:ext cx="553364" cy="234696"/>
+              <a:ext cx="704851" cy="234696"/>
             </a:xfrm>
             <a:prstGeom prst="rect">
               <a:avLst/>
@@ -6159,7 +7845,7 @@
           <p:spPr>
             <a:xfrm>
               <a:off x="603504" y="523875"/>
-              <a:ext cx="1472855" cy="234696"/>
+              <a:ext cx="1630364" cy="234696"/>
             </a:xfrm>
             <a:prstGeom prst="rect">
               <a:avLst/>
@@ -6233,46 +7919,188 @@
       </p:grpSp>
       <p:grpSp>
         <p:nvGrpSpPr>
-          <p:cNvPr id="9" name="content"/>
+          <p:cNvPr id="21" name="content"/>
           <p:cNvGrpSpPr/>
           <p:nvPr/>
         </p:nvGrpSpPr>
         <p:grpSpPr>
           <a:xfrm>
-            <a:off x="593979" y="2200275"/>
-            <a:ext cx="6590386" cy="2888425"/>
-            <a:chOff x="593979" y="2200275"/>
-            <a:chExt cx="6590386" cy="2888425"/>
+            <a:off x="599313" y="2190750"/>
+            <a:ext cx="10697337" cy="3424682"/>
+            <a:chOff x="599313" y="2190750"/>
+            <a:chExt cx="10697337" cy="3424682"/>
           </a:xfrm>
         </p:grpSpPr>
         <p:sp>
           <p:nvSpPr>
-            <p:cNvPr id="5" name="TextBox 5"/>
-            <p:cNvSpPr txBox="1"/>
-            <p:nvPr/>
-          </p:nvSpPr>
-          <p:spPr>
-            <a:xfrm>
-              <a:off x="593979" y="2200275"/>
-              <a:ext cx="3762908" cy="602361"/>
-            </a:xfrm>
-            <a:prstGeom prst="rect">
-              <a:avLst/>
-            </a:prstGeom>
-            <a:noFill/>
-            <a:ln>
-              <a:noFill/>
-            </a:ln>
-          </p:spPr>
-          <p:txBody>
-            <a:bodyPr wrap="none" lIns="0" tIns="0" rIns="0" bIns="0" anchor="t" anchorCtr="0">
-              <a:spAutoFit/>
-            </a:bodyPr>
-            <a:lstStyle/>
-            <a:p>
-              <a:pPr algn="l"/>
-              <a:r>
-                <a:rPr lang="ja-JP" sz="3080" b="1" dirty="0">
+            <p:cNvPr id="5" name="Rectangle 5"/>
+            <p:cNvSpPr/>
+            <p:nvPr/>
+          </p:nvSpPr>
+          <p:spPr>
+            <a:xfrm>
+              <a:off x="609600" y="2190750"/>
+              <a:ext cx="6667500" cy="1600200"/>
+            </a:xfrm>
+            <a:prstGeom prst="rect">
+              <a:avLst/>
+            </a:prstGeom>
+            <a:solidFill>
+              <a:srgbClr val="21654C"/>
+            </a:solidFill>
+            <a:ln>
+              <a:noFill/>
+            </a:ln>
+          </p:spPr>
+        </p:sp>
+        <p:sp>
+          <p:nvSpPr>
+            <p:cNvPr id="6" name="TextBox 6"/>
+            <p:cNvSpPr txBox="1"/>
+            <p:nvPr/>
+          </p:nvSpPr>
+          <p:spPr>
+            <a:xfrm>
+              <a:off x="838200" y="2352675"/>
+              <a:ext cx="3056077" cy="367665"/>
+            </a:xfrm>
+            <a:prstGeom prst="rect">
+              <a:avLst/>
+            </a:prstGeom>
+            <a:noFill/>
+            <a:ln>
+              <a:noFill/>
+            </a:ln>
+          </p:spPr>
+          <p:txBody>
+            <a:bodyPr wrap="none" lIns="0" tIns="0" rIns="0" bIns="0" anchor="t" anchorCtr="0">
+              <a:spAutoFit/>
+            </a:bodyPr>
+            <a:lstStyle/>
+            <a:p>
+              <a:pPr algn="l"/>
+              <a:r>
+                <a:rPr lang="ja-JP" sz="1880" b="1" dirty="0">
+                  <a:solidFill>
+                    <a:srgbClr val="FFFFFF"/>
+                  </a:solidFill>
+                  <a:latin typeface="+mn-lt"/>
+                  <a:ea typeface="+mn-ea"/>
+                  <a:cs typeface="+mn-cs"/>
+                </a:rPr>
+                <a:t>今日、判断してほしいこと</a:t>
+              </a:r>
+            </a:p>
+          </p:txBody>
+        </p:sp>
+        <p:sp>
+          <p:nvSpPr>
+            <p:cNvPr id="7" name="TextBox 7"/>
+            <p:cNvSpPr txBox="1"/>
+            <p:nvPr/>
+          </p:nvSpPr>
+          <p:spPr>
+            <a:xfrm>
+              <a:off x="836295" y="2787650"/>
+              <a:ext cx="4751108" cy="440055"/>
+            </a:xfrm>
+            <a:prstGeom prst="rect">
+              <a:avLst/>
+            </a:prstGeom>
+            <a:noFill/>
+            <a:ln>
+              <a:noFill/>
+            </a:ln>
+          </p:spPr>
+          <p:txBody>
+            <a:bodyPr wrap="none" lIns="0" tIns="0" rIns="0" bIns="0" anchor="t" anchorCtr="0">
+              <a:spAutoFit/>
+            </a:bodyPr>
+            <a:lstStyle/>
+            <a:p>
+              <a:pPr algn="l"/>
+              <a:r>
+                <a:rPr lang="ja-JP" sz="2250" b="1" dirty="0">
+                  <a:solidFill>
+                    <a:srgbClr val="FFFFFF"/>
+                  </a:solidFill>
+                  <a:latin typeface="+mn-lt"/>
+                  <a:ea typeface="+mn-ea"/>
+                  <a:cs typeface="+mn-cs"/>
+                </a:rPr>
+                <a:t>B案の現地調査・条件交渉を進める</a:t>
+              </a:r>
+            </a:p>
+          </p:txBody>
+        </p:sp>
+        <p:sp>
+          <p:nvSpPr>
+            <p:cNvPr id="8" name="TextBox 8"/>
+            <p:cNvSpPr txBox="1"/>
+            <p:nvPr/>
+          </p:nvSpPr>
+          <p:spPr>
+            <a:xfrm>
+              <a:off x="7677912" y="2308225"/>
+              <a:ext cx="2332990" cy="337376"/>
+            </a:xfrm>
+            <a:prstGeom prst="rect">
+              <a:avLst/>
+            </a:prstGeom>
+            <a:noFill/>
+            <a:ln>
+              <a:noFill/>
+            </a:ln>
+          </p:spPr>
+          <p:txBody>
+            <a:bodyPr wrap="none" lIns="0" tIns="0" rIns="0" bIns="0" anchor="t" anchorCtr="0">
+              <a:spAutoFit/>
+            </a:bodyPr>
+            <a:lstStyle/>
+            <a:p>
+              <a:pPr algn="l"/>
+              <a:r>
+                <a:rPr lang="ja-JP" sz="1720" b="1" dirty="0">
+                  <a:solidFill>
+                    <a:srgbClr val="53675E"/>
+                  </a:solidFill>
+                  <a:latin typeface="+mn-lt"/>
+                  <a:ea typeface="+mn-ea"/>
+                  <a:cs typeface="+mn-cs"/>
+                </a:rPr>
+                <a:t>調査後に判断すること</a:t>
+              </a:r>
+            </a:p>
+          </p:txBody>
+        </p:sp>
+        <p:sp>
+          <p:nvSpPr>
+            <p:cNvPr id="9" name="TextBox 9"/>
+            <p:cNvSpPr txBox="1"/>
+            <p:nvPr/>
+          </p:nvSpPr>
+          <p:spPr>
+            <a:xfrm>
+              <a:off x="7676007" y="2755900"/>
+              <a:ext cx="1434846" cy="410718"/>
+            </a:xfrm>
+            <a:prstGeom prst="rect">
+              <a:avLst/>
+            </a:prstGeom>
+            <a:noFill/>
+            <a:ln>
+              <a:noFill/>
+            </a:ln>
+          </p:spPr>
+          <p:txBody>
+            <a:bodyPr wrap="none" lIns="0" tIns="0" rIns="0" bIns="0" anchor="t" anchorCtr="0">
+              <a:spAutoFit/>
+            </a:bodyPr>
+            <a:lstStyle/>
+            <a:p>
+              <a:pPr algn="l"/>
+              <a:r>
+                <a:rPr lang="ja-JP" sz="2100" dirty="0">
                   <a:solidFill>
                     <a:srgbClr val="202C29"/>
                   </a:solidFill>
@@ -6280,39 +8108,39 @@
                   <a:ea typeface="+mn-ea"/>
                   <a:cs typeface="+mn-cs"/>
                 </a:rPr>
-                <a:t>承認してほしいこと</a:t>
-              </a:r>
-            </a:p>
-          </p:txBody>
-        </p:sp>
-        <p:sp>
-          <p:nvSpPr>
-            <p:cNvPr id="6" name="TextBox 6"/>
-            <p:cNvSpPr txBox="1"/>
-            <p:nvPr/>
-          </p:nvSpPr>
-          <p:spPr>
-            <a:xfrm>
-              <a:off x="593979" y="2943225"/>
-              <a:ext cx="4845170" cy="602361"/>
-            </a:xfrm>
-            <a:prstGeom prst="rect">
-              <a:avLst/>
-            </a:prstGeom>
-            <a:noFill/>
-            <a:ln>
-              <a:noFill/>
-            </a:ln>
-          </p:spPr>
-          <p:txBody>
-            <a:bodyPr wrap="none" lIns="0" tIns="0" rIns="0" bIns="0" anchor="t" anchorCtr="0">
-              <a:spAutoFit/>
-            </a:bodyPr>
-            <a:lstStyle/>
-            <a:p>
-              <a:pPr algn="l"/>
-              <a:r>
-                <a:rPr lang="ja-JP" sz="3080" b="1" dirty="0">
+                <a:t>契約の締結</a:t>
+              </a:r>
+            </a:p>
+          </p:txBody>
+        </p:sp>
+        <p:sp>
+          <p:nvSpPr>
+            <p:cNvPr id="10" name="TextBox 10"/>
+            <p:cNvSpPr txBox="1"/>
+            <p:nvPr/>
+          </p:nvSpPr>
+          <p:spPr>
+            <a:xfrm>
+              <a:off x="7676007" y="3260725"/>
+              <a:ext cx="2000250" cy="410718"/>
+            </a:xfrm>
+            <a:prstGeom prst="rect">
+              <a:avLst/>
+            </a:prstGeom>
+            <a:noFill/>
+            <a:ln>
+              <a:noFill/>
+            </a:ln>
+          </p:spPr>
+          <p:txBody>
+            <a:bodyPr wrap="none" lIns="0" tIns="0" rIns="0" bIns="0" anchor="t" anchorCtr="0">
+              <a:spAutoFit/>
+            </a:bodyPr>
+            <a:lstStyle/>
+            <a:p>
+              <a:pPr algn="l"/>
+              <a:r>
+                <a:rPr lang="ja-JP" sz="2100" dirty="0">
                   <a:solidFill>
                     <a:srgbClr val="202C29"/>
                   </a:solidFill>
@@ -6320,39 +8148,101 @@
                   <a:ea typeface="+mn-ea"/>
                   <a:cs typeface="+mn-cs"/>
                 </a:rPr>
-                <a:t>B案の現地調査・条件交渉</a:t>
-              </a:r>
-            </a:p>
-          </p:txBody>
-        </p:sp>
-        <p:sp>
-          <p:nvSpPr>
-            <p:cNvPr id="7" name="TextBox 7"/>
-            <p:cNvSpPr txBox="1"/>
-            <p:nvPr/>
-          </p:nvSpPr>
-          <p:spPr>
-            <a:xfrm>
-              <a:off x="637413" y="4016375"/>
-              <a:ext cx="6546952" cy="396050"/>
-            </a:xfrm>
-            <a:prstGeom prst="rect">
-              <a:avLst/>
-            </a:prstGeom>
-            <a:noFill/>
-            <a:ln>
-              <a:noFill/>
-            </a:ln>
-          </p:spPr>
-          <p:txBody>
-            <a:bodyPr wrap="none" lIns="0" tIns="0" rIns="0" bIns="0" anchor="t" anchorCtr="0">
-              <a:spAutoFit/>
-            </a:bodyPr>
-            <a:lstStyle/>
-            <a:p>
-              <a:pPr algn="l"/>
-              <a:r>
-                <a:rPr lang="ja-JP" sz="2020" dirty="0">
+                <a:t>初期投資の承認</a:t>
+              </a:r>
+            </a:p>
+          </p:txBody>
+        </p:sp>
+        <p:sp>
+          <p:nvSpPr>
+            <p:cNvPr id="11" name="TextBox 11"/>
+            <p:cNvSpPr txBox="1"/>
+            <p:nvPr/>
+          </p:nvSpPr>
+          <p:spPr>
+            <a:xfrm>
+              <a:off x="599313" y="4102100"/>
+              <a:ext cx="3984669" cy="396050"/>
+            </a:xfrm>
+            <a:prstGeom prst="rect">
+              <a:avLst/>
+            </a:prstGeom>
+            <a:noFill/>
+            <a:ln>
+              <a:noFill/>
+            </a:ln>
+          </p:spPr>
+          <p:txBody>
+            <a:bodyPr wrap="none" lIns="0" tIns="0" rIns="0" bIns="0" anchor="t" anchorCtr="0">
+              <a:spAutoFit/>
+            </a:bodyPr>
+            <a:lstStyle/>
+            <a:p>
+              <a:pPr algn="l"/>
+              <a:r>
+                <a:rPr lang="ja-JP" sz="2020" b="1" dirty="0">
+                  <a:solidFill>
+                    <a:srgbClr val="21654C"/>
+                  </a:solidFill>
+                  <a:latin typeface="+mn-lt"/>
+                  <a:ea typeface="+mn-ea"/>
+                  <a:cs typeface="+mn-cs"/>
+                </a:rPr>
+                <a:t>次回の決裁にそろえる3つの材料</a:t>
+              </a:r>
+            </a:p>
+          </p:txBody>
+        </p:sp>
+        <p:sp>
+          <p:nvSpPr>
+            <p:cNvPr id="12" name="Rectangle 12"/>
+            <p:cNvSpPr/>
+            <p:nvPr/>
+          </p:nvSpPr>
+          <p:spPr>
+            <a:xfrm>
+              <a:off x="609600" y="4619625"/>
+              <a:ext cx="3257550" cy="19050"/>
+            </a:xfrm>
+            <a:prstGeom prst="rect">
+              <a:avLst/>
+            </a:prstGeom>
+            <a:solidFill>
+              <a:srgbClr val="21654C"/>
+            </a:solidFill>
+            <a:ln>
+              <a:noFill/>
+            </a:ln>
+          </p:spPr>
+        </p:sp>
+        <p:sp>
+          <p:nvSpPr>
+            <p:cNvPr id="13" name="TextBox 13"/>
+            <p:cNvSpPr txBox="1"/>
+            <p:nvPr/>
+          </p:nvSpPr>
+          <p:spPr>
+            <a:xfrm>
+              <a:off x="599313" y="4806950"/>
+              <a:ext cx="1380236" cy="396050"/>
+            </a:xfrm>
+            <a:prstGeom prst="rect">
+              <a:avLst/>
+            </a:prstGeom>
+            <a:noFill/>
+            <a:ln>
+              <a:noFill/>
+            </a:ln>
+          </p:spPr>
+          <p:txBody>
+            <a:bodyPr wrap="none" lIns="0" tIns="0" rIns="0" bIns="0" anchor="t" anchorCtr="0">
+              <a:spAutoFit/>
+            </a:bodyPr>
+            <a:lstStyle/>
+            <a:p>
+              <a:pPr algn="l"/>
+              <a:r>
+                <a:rPr lang="ja-JP" sz="2020" b="1" dirty="0">
                   <a:solidFill>
                     <a:srgbClr val="202C29"/>
                   </a:solidFill>
@@ -6360,39 +8250,39 @@
                   <a:ea typeface="+mn-ea"/>
                   <a:cs typeface="+mn-cs"/>
                 </a:rPr>
-                <a:t>次回に揃えるもの：客数の根拠、工事見積、店長配置</a:t>
-              </a:r>
-            </a:p>
-          </p:txBody>
-        </p:sp>
-        <p:sp>
-          <p:nvSpPr>
-            <p:cNvPr id="8" name="TextBox 8"/>
-            <p:cNvSpPr txBox="1"/>
-            <p:nvPr/>
-          </p:nvSpPr>
-          <p:spPr>
-            <a:xfrm>
-              <a:off x="637413" y="4692650"/>
-              <a:ext cx="5731154" cy="396050"/>
-            </a:xfrm>
-            <a:prstGeom prst="rect">
-              <a:avLst/>
-            </a:prstGeom>
-            <a:noFill/>
-            <a:ln>
-              <a:noFill/>
-            </a:ln>
-          </p:spPr>
-          <p:txBody>
-            <a:bodyPr wrap="none" lIns="0" tIns="0" rIns="0" bIns="0" anchor="t" anchorCtr="0">
-              <a:spAutoFit/>
-            </a:bodyPr>
-            <a:lstStyle/>
-            <a:p>
-              <a:pPr algn="l"/>
-              <a:r>
-                <a:rPr lang="ja-JP" sz="2020" dirty="0">
+                <a:t>客数の根拠</a:t>
+              </a:r>
+            </a:p>
+          </p:txBody>
+        </p:sp>
+        <p:sp>
+          <p:nvSpPr>
+            <p:cNvPr id="14" name="TextBox 14"/>
+            <p:cNvSpPr txBox="1"/>
+            <p:nvPr/>
+          </p:nvSpPr>
+          <p:spPr>
+            <a:xfrm>
+              <a:off x="601218" y="5292725"/>
+              <a:ext cx="2237994" cy="322707"/>
+            </a:xfrm>
+            <a:prstGeom prst="rect">
+              <a:avLst/>
+            </a:prstGeom>
+            <a:noFill/>
+            <a:ln>
+              <a:noFill/>
+            </a:ln>
+          </p:spPr>
+          <p:txBody>
+            <a:bodyPr wrap="none" lIns="0" tIns="0" rIns="0" bIns="0" anchor="t" anchorCtr="0">
+              <a:spAutoFit/>
+            </a:bodyPr>
+            <a:lstStyle/>
+            <a:p>
+              <a:pPr algn="l"/>
+              <a:r>
+                <a:rPr lang="ja-JP" sz="1650" dirty="0">
                   <a:solidFill>
                     <a:srgbClr val="202C29"/>
                   </a:solidFill>
@@ -6400,7 +8290,211 @@
                   <a:ea typeface="+mn-ea"/>
                   <a:cs typeface="+mn-cs"/>
                 </a:rPr>
-                <a:t>契約・投資の承認は、調査結果を確認してから</a:t>
+                <a:t>調査・試験販売の結果</a:t>
+              </a:r>
+            </a:p>
+          </p:txBody>
+        </p:sp>
+        <p:sp>
+          <p:nvSpPr>
+            <p:cNvPr id="15" name="Rectangle 15"/>
+            <p:cNvSpPr/>
+            <p:nvPr/>
+          </p:nvSpPr>
+          <p:spPr>
+            <a:xfrm>
+              <a:off x="4324350" y="4619625"/>
+              <a:ext cx="3257550" cy="19050"/>
+            </a:xfrm>
+            <a:prstGeom prst="rect">
+              <a:avLst/>
+            </a:prstGeom>
+            <a:solidFill>
+              <a:srgbClr val="21654C"/>
+            </a:solidFill>
+            <a:ln>
+              <a:noFill/>
+            </a:ln>
+          </p:spPr>
+        </p:sp>
+        <p:sp>
+          <p:nvSpPr>
+            <p:cNvPr id="16" name="TextBox 16"/>
+            <p:cNvSpPr txBox="1"/>
+            <p:nvPr/>
+          </p:nvSpPr>
+          <p:spPr>
+            <a:xfrm>
+              <a:off x="4314063" y="4806950"/>
+              <a:ext cx="1108304" cy="396050"/>
+            </a:xfrm>
+            <a:prstGeom prst="rect">
+              <a:avLst/>
+            </a:prstGeom>
+            <a:noFill/>
+            <a:ln>
+              <a:noFill/>
+            </a:ln>
+          </p:spPr>
+          <p:txBody>
+            <a:bodyPr wrap="none" lIns="0" tIns="0" rIns="0" bIns="0" anchor="t" anchorCtr="0">
+              <a:spAutoFit/>
+            </a:bodyPr>
+            <a:lstStyle/>
+            <a:p>
+              <a:pPr algn="l"/>
+              <a:r>
+                <a:rPr lang="ja-JP" sz="2020" b="1" dirty="0">
+                  <a:solidFill>
+                    <a:srgbClr val="202C29"/>
+                  </a:solidFill>
+                  <a:latin typeface="+mn-lt"/>
+                  <a:ea typeface="+mn-ea"/>
+                  <a:cs typeface="+mn-cs"/>
+                </a:rPr>
+                <a:t>工事見積</a:t>
+              </a:r>
+            </a:p>
+          </p:txBody>
+        </p:sp>
+        <p:sp>
+          <p:nvSpPr>
+            <p:cNvPr id="17" name="TextBox 17"/>
+            <p:cNvSpPr txBox="1"/>
+            <p:nvPr/>
+          </p:nvSpPr>
+          <p:spPr>
+            <a:xfrm>
+              <a:off x="4315968" y="5292725"/>
+              <a:ext cx="2582285" cy="322707"/>
+            </a:xfrm>
+            <a:prstGeom prst="rect">
+              <a:avLst/>
+            </a:prstGeom>
+            <a:noFill/>
+            <a:ln>
+              <a:noFill/>
+            </a:ln>
+          </p:spPr>
+          <p:txBody>
+            <a:bodyPr wrap="none" lIns="0" tIns="0" rIns="0" bIns="0" anchor="t" anchorCtr="0">
+              <a:spAutoFit/>
+            </a:bodyPr>
+            <a:lstStyle/>
+            <a:p>
+              <a:pPr algn="l"/>
+              <a:r>
+                <a:rPr lang="ja-JP" sz="1650" dirty="0">
+                  <a:solidFill>
+                    <a:srgbClr val="202C29"/>
+                  </a:solidFill>
+                  <a:latin typeface="+mn-lt"/>
+                  <a:ea typeface="+mn-ea"/>
+                  <a:cs typeface="+mn-cs"/>
+                </a:rPr>
+                <a:t>同条件の3社見積と予備費</a:t>
+              </a:r>
+            </a:p>
+          </p:txBody>
+        </p:sp>
+        <p:sp>
+          <p:nvSpPr>
+            <p:cNvPr id="18" name="Rectangle 18"/>
+            <p:cNvSpPr/>
+            <p:nvPr/>
+          </p:nvSpPr>
+          <p:spPr>
+            <a:xfrm>
+              <a:off x="8039100" y="4619625"/>
+              <a:ext cx="3257550" cy="19050"/>
+            </a:xfrm>
+            <a:prstGeom prst="rect">
+              <a:avLst/>
+            </a:prstGeom>
+            <a:solidFill>
+              <a:srgbClr val="21654C"/>
+            </a:solidFill>
+            <a:ln>
+              <a:noFill/>
+            </a:ln>
+          </p:spPr>
+        </p:sp>
+        <p:sp>
+          <p:nvSpPr>
+            <p:cNvPr id="19" name="TextBox 19"/>
+            <p:cNvSpPr txBox="1"/>
+            <p:nvPr/>
+          </p:nvSpPr>
+          <p:spPr>
+            <a:xfrm>
+              <a:off x="8028813" y="4806950"/>
+              <a:ext cx="1108304" cy="396050"/>
+            </a:xfrm>
+            <a:prstGeom prst="rect">
+              <a:avLst/>
+            </a:prstGeom>
+            <a:noFill/>
+            <a:ln>
+              <a:noFill/>
+            </a:ln>
+          </p:spPr>
+          <p:txBody>
+            <a:bodyPr wrap="none" lIns="0" tIns="0" rIns="0" bIns="0" anchor="t" anchorCtr="0">
+              <a:spAutoFit/>
+            </a:bodyPr>
+            <a:lstStyle/>
+            <a:p>
+              <a:pPr algn="l"/>
+              <a:r>
+                <a:rPr lang="ja-JP" sz="2020" b="1" dirty="0">
+                  <a:solidFill>
+                    <a:srgbClr val="202C29"/>
+                  </a:solidFill>
+                  <a:latin typeface="+mn-lt"/>
+                  <a:ea typeface="+mn-ea"/>
+                  <a:cs typeface="+mn-cs"/>
+                </a:rPr>
+                <a:t>店長配置</a:t>
+              </a:r>
+            </a:p>
+          </p:txBody>
+        </p:sp>
+        <p:sp>
+          <p:nvSpPr>
+            <p:cNvPr id="20" name="TextBox 20"/>
+            <p:cNvSpPr txBox="1"/>
+            <p:nvPr/>
+          </p:nvSpPr>
+          <p:spPr>
+            <a:xfrm>
+              <a:off x="8030718" y="5292725"/>
+              <a:ext cx="2460117" cy="322707"/>
+            </a:xfrm>
+            <a:prstGeom prst="rect">
+              <a:avLst/>
+            </a:prstGeom>
+            <a:noFill/>
+            <a:ln>
+              <a:noFill/>
+            </a:ln>
+          </p:spPr>
+          <p:txBody>
+            <a:bodyPr wrap="none" lIns="0" tIns="0" rIns="0" bIns="0" anchor="t" anchorCtr="0">
+              <a:spAutoFit/>
+            </a:bodyPr>
+            <a:lstStyle/>
+            <a:p>
+              <a:pPr algn="l"/>
+              <a:r>
+                <a:rPr lang="ja-JP" sz="1650" dirty="0">
+                  <a:solidFill>
+                    <a:srgbClr val="202C29"/>
+                  </a:solidFill>
+                  <a:latin typeface="+mn-lt"/>
+                  <a:ea typeface="+mn-ea"/>
+                  <a:cs typeface="+mn-cs"/>
+                </a:rPr>
+                <a:t>配置の見通しと育成日程</a:t>
               </a:r>
             </a:p>
           </p:txBody>
@@ -6408,7 +8502,7 @@
       </p:grpSp>
       <p:grpSp>
         <p:nvGrpSpPr>
-          <p:cNvPr id="12" name="footer"/>
+          <p:cNvPr id="24" name="footer"/>
           <p:cNvGrpSpPr/>
           <p:nvPr/>
         </p:nvGrpSpPr>
@@ -6422,7 +8516,7 @@
         </p:grpSpPr>
         <p:sp>
           <p:nvSpPr>
-            <p:cNvPr id="10" name="TextBox 10"/>
+            <p:cNvPr id="22" name="TextBox 22"/>
             <p:cNvSpPr txBox="1"/>
             <p:nvPr/>
           </p:nvSpPr>
@@ -6462,14 +8556,14 @@
         </p:sp>
         <p:sp>
           <p:nvSpPr>
-            <p:cNvPr id="11" name="TextBox 11"/>
+            <p:cNvPr id="23" name="TextBox 23"/>
             <p:cNvSpPr txBox="1"/>
             <p:nvPr/>
           </p:nvSpPr>
           <p:spPr>
             <a:xfrm>
               <a:off x="10614279" y="6315075"/>
-              <a:ext cx="553364" cy="234696"/>
+              <a:ext cx="704851" cy="234696"/>
             </a:xfrm>
             <a:prstGeom prst="rect">
               <a:avLst/>
@@ -6555,13 +8649,13 @@
     </a:clrScheme>
     <a:fontScheme name="source">
       <a:majorFont>
-        <a:latin typeface="Noto Sans JP"/>
-        <a:ea typeface="Noto Sans JP"/>
-        <a:cs typeface="Noto Sans JP"/>
-        <a:font script="Jpan" typeface="Noto Sans JP"/>
-        <a:font script="Hang" typeface="Noto Sans JP"/>
-        <a:font script="Hans" typeface="Noto Sans JP"/>
-        <a:font script="Hant" typeface="Noto Sans JP"/>
+        <a:latin typeface="BIZ UDPGothic"/>
+        <a:ea typeface="BIZ UDPGothic"/>
+        <a:cs typeface="BIZ UDPGothic"/>
+        <a:font script="Jpan" typeface="BIZ UDPGothic"/>
+        <a:font script="Hang" typeface="BIZ UDPGothic"/>
+        <a:font script="Hans" typeface="BIZ UDPGothic"/>
+        <a:font script="Hant" typeface="BIZ UDPGothic"/>
         <a:font script="Arab" typeface="Times New Roman"/>
         <a:font script="Hebr" typeface="Times New Roman"/>
         <a:font script="Thai" typeface="Angsana New"/>
@@ -6590,13 +8684,13 @@
         <a:font script="Geor" typeface="Sylfaen"/>
       </a:majorFont>
       <a:minorFont>
-        <a:latin typeface="Noto Sans JP"/>
-        <a:ea typeface="Noto Sans JP"/>
-        <a:cs typeface="Noto Sans JP"/>
-        <a:font script="Jpan" typeface="Noto Sans JP"/>
-        <a:font script="Hang" typeface="Noto Sans JP"/>
-        <a:font script="Hans" typeface="Noto Sans JP"/>
-        <a:font script="Hant" typeface="Noto Sans JP"/>
+        <a:latin typeface="BIZ UDPGothic"/>
+        <a:ea typeface="BIZ UDPGothic"/>
+        <a:cs typeface="BIZ UDPGothic"/>
+        <a:font script="Jpan" typeface="BIZ UDPGothic"/>
+        <a:font script="Hang" typeface="BIZ UDPGothic"/>
+        <a:font script="Hans" typeface="BIZ UDPGothic"/>
+        <a:font script="Hant" typeface="BIZ UDPGothic"/>
         <a:font script="Arab" typeface="Arial"/>
         <a:font script="Hebr" typeface="Arial"/>
         <a:font script="Thai" typeface="Cordia New"/>
@@ -6875,13 +8969,13 @@
     </a:clrScheme>
     <a:fontScheme name="source">
       <a:majorFont>
-        <a:latin typeface="Noto Sans JP"/>
-        <a:ea typeface="Noto Sans JP"/>
-        <a:cs typeface="Noto Sans JP"/>
-        <a:font script="Jpan" typeface="Noto Sans JP"/>
-        <a:font script="Hang" typeface="Noto Sans JP"/>
-        <a:font script="Hans" typeface="Noto Sans JP"/>
-        <a:font script="Hant" typeface="Noto Sans JP"/>
+        <a:latin typeface="BIZ UDPGothic"/>
+        <a:ea typeface="BIZ UDPGothic"/>
+        <a:cs typeface="BIZ UDPGothic"/>
+        <a:font script="Jpan" typeface="BIZ UDPGothic"/>
+        <a:font script="Hang" typeface="BIZ UDPGothic"/>
+        <a:font script="Hans" typeface="BIZ UDPGothic"/>
+        <a:font script="Hant" typeface="BIZ UDPGothic"/>
         <a:font script="Arab" typeface="Times New Roman"/>
         <a:font script="Hebr" typeface="Times New Roman"/>
         <a:font script="Thai" typeface="Angsana New"/>
@@ -6910,13 +9004,13 @@
         <a:font script="Geor" typeface="Sylfaen"/>
       </a:majorFont>
       <a:minorFont>
-        <a:latin typeface="Noto Sans JP"/>
-        <a:ea typeface="Noto Sans JP"/>
-        <a:cs typeface="Noto Sans JP"/>
-        <a:font script="Jpan" typeface="Noto Sans JP"/>
-        <a:font script="Hang" typeface="Noto Sans JP"/>
-        <a:font script="Hans" typeface="Noto Sans JP"/>
-        <a:font script="Hant" typeface="Noto Sans JP"/>
+        <a:latin typeface="BIZ UDPGothic"/>
+        <a:ea typeface="BIZ UDPGothic"/>
+        <a:cs typeface="BIZ UDPGothic"/>
+        <a:font script="Jpan" typeface="BIZ UDPGothic"/>
+        <a:font script="Hang" typeface="BIZ UDPGothic"/>
+        <a:font script="Hans" typeface="BIZ UDPGothic"/>
+        <a:font script="Hant" typeface="BIZ UDPGothic"/>
         <a:font script="Arab" typeface="Arial"/>
         <a:font script="Hebr" typeface="Arial"/>
         <a:font script="Thai" typeface="Cordia New"/>
